--- a/112111102_吳映潔.pptx
+++ b/112111102_吳映潔.pptx
@@ -4,8 +4,15 @@
   <p:sldMasterIdLst>
     <p:sldMasterId id="2147483648" r:id="rId1"/>
   </p:sldMasterIdLst>
+  <p:notesMasterIdLst>
+    <p:notesMasterId r:id="rId7"/>
+  </p:notesMasterIdLst>
   <p:sldIdLst>
     <p:sldId id="256" r:id="rId2"/>
+    <p:sldId id="260" r:id="rId3"/>
+    <p:sldId id="259" r:id="rId4"/>
+    <p:sldId id="262" r:id="rId5"/>
+    <p:sldId id="263" r:id="rId6"/>
   </p:sldIdLst>
   <p:sldSz cx="12192000" cy="6858000"/>
   <p:notesSz cx="6858000" cy="9144000"/>
@@ -104,7 +111,748 @@
       </a:defRPr>
     </a:lvl9pPr>
   </p:defaultTextStyle>
+  <p:extLst>
+    <p:ext uri="{EFAFB233-063F-42B5-8137-9DF3F51BA10A}">
+      <p15:sldGuideLst xmlns:p15="http://schemas.microsoft.com/office/powerpoint/2012/main"/>
+    </p:ext>
+  </p:extLst>
 </p:presentation>
+</file>
+
+<file path=ppt/revisionInfo.xml><?xml version="1.0" encoding="utf-8"?>
+<p1510:revInfo xmlns:a="http://schemas.openxmlformats.org/drawingml/2006/main" xmlns:r="http://schemas.openxmlformats.org/officeDocument/2006/relationships" xmlns:p1510="http://schemas.microsoft.com/office/powerpoint/2015/10/main">
+  <p1510:revLst>
+    <p1510:client id="{F9B8B6BF-D384-4909-ADE4-41FF50F4634E}" v="9" dt="2026-06-14T01:30:16.947"/>
+  </p1510:revLst>
+</p1510:revInfo>
+</file>
+
+<file path=ppt/changesInfos/changesInfo1.xml><?xml version="1.0" encoding="utf-8"?>
+<pc:chgInfo xmlns:a="http://schemas.openxmlformats.org/drawingml/2006/main" xmlns:r="http://schemas.openxmlformats.org/officeDocument/2006/relationships" xmlns:ac="http://schemas.microsoft.com/office/drawing/2013/main/command" xmlns:pc="http://schemas.microsoft.com/office/powerpoint/2013/main/command">
+  <pc:docChgLst>
+    <pc:chgData name="映潔 吳" userId="ce8478969c818b5d" providerId="LiveId" clId="{02718E11-8C50-4BF9-8911-C664F181BE0F}"/>
+    <pc:docChg chg="undo custSel addSld delSld modSld sldOrd">
+      <pc:chgData name="映潔 吳" userId="ce8478969c818b5d" providerId="LiveId" clId="{02718E11-8C50-4BF9-8911-C664F181BE0F}" dt="2026-06-14T03:02:00.308" v="719" actId="478"/>
+      <pc:docMkLst>
+        <pc:docMk/>
+      </pc:docMkLst>
+      <pc:sldChg chg="addSp delSp modSp mod setBg">
+        <pc:chgData name="映潔 吳" userId="ce8478969c818b5d" providerId="LiveId" clId="{02718E11-8C50-4BF9-8911-C664F181BE0F}" dt="2026-06-14T01:01:54.872" v="62"/>
+        <pc:sldMkLst>
+          <pc:docMk/>
+          <pc:sldMk cId="1940510760" sldId="256"/>
+        </pc:sldMkLst>
+        <pc:spChg chg="add del mod">
+          <ac:chgData name="映潔 吳" userId="ce8478969c818b5d" providerId="LiveId" clId="{02718E11-8C50-4BF9-8911-C664F181BE0F}" dt="2026-06-14T01:01:51.850" v="61" actId="207"/>
+          <ac:spMkLst>
+            <pc:docMk/>
+            <pc:sldMk cId="1940510760" sldId="256"/>
+            <ac:spMk id="2" creationId="{818132A7-9384-425F-AAB8-345885C5FFFD}"/>
+          </ac:spMkLst>
+        </pc:spChg>
+        <pc:spChg chg="mod">
+          <ac:chgData name="映潔 吳" userId="ce8478969c818b5d" providerId="LiveId" clId="{02718E11-8C50-4BF9-8911-C664F181BE0F}" dt="2026-06-14T01:01:51.850" v="61" actId="207"/>
+          <ac:spMkLst>
+            <pc:docMk/>
+            <pc:sldMk cId="1940510760" sldId="256"/>
+            <ac:spMk id="3" creationId="{95D43DE2-BEBC-8AAB-B48F-1B9B1C4C3145}"/>
+          </ac:spMkLst>
+        </pc:spChg>
+        <pc:spChg chg="add mod">
+          <ac:chgData name="映潔 吳" userId="ce8478969c818b5d" providerId="LiveId" clId="{02718E11-8C50-4BF9-8911-C664F181BE0F}" dt="2026-06-14T00:58:49.682" v="3"/>
+          <ac:spMkLst>
+            <pc:docMk/>
+            <pc:sldMk cId="1940510760" sldId="256"/>
+            <ac:spMk id="5" creationId="{C7FFDD88-788D-1203-9D0E-DB78005FFF24}"/>
+          </ac:spMkLst>
+        </pc:spChg>
+        <pc:spChg chg="add del mod">
+          <ac:chgData name="映潔 吳" userId="ce8478969c818b5d" providerId="LiveId" clId="{02718E11-8C50-4BF9-8911-C664F181BE0F}" dt="2026-06-14T01:00:15.947" v="24" actId="478"/>
+          <ac:spMkLst>
+            <pc:docMk/>
+            <pc:sldMk cId="1940510760" sldId="256"/>
+            <ac:spMk id="7" creationId="{B613ADA6-6325-23E9-FC17-B68580F8167F}"/>
+          </ac:spMkLst>
+        </pc:spChg>
+        <pc:graphicFrameChg chg="add mod">
+          <ac:chgData name="映潔 吳" userId="ce8478969c818b5d" providerId="LiveId" clId="{02718E11-8C50-4BF9-8911-C664F181BE0F}" dt="2026-06-14T00:58:48.182" v="2"/>
+          <ac:graphicFrameMkLst>
+            <pc:docMk/>
+            <pc:sldMk cId="1940510760" sldId="256"/>
+            <ac:graphicFrameMk id="4" creationId="{710099FB-E509-0626-3103-AA29086DE596}"/>
+          </ac:graphicFrameMkLst>
+        </pc:graphicFrameChg>
+      </pc:sldChg>
+      <pc:sldChg chg="new del">
+        <pc:chgData name="映潔 吳" userId="ce8478969c818b5d" providerId="LiveId" clId="{02718E11-8C50-4BF9-8911-C664F181BE0F}" dt="2026-06-14T01:01:34.949" v="58" actId="47"/>
+        <pc:sldMkLst>
+          <pc:docMk/>
+          <pc:sldMk cId="4117208725" sldId="257"/>
+        </pc:sldMkLst>
+      </pc:sldChg>
+      <pc:sldChg chg="addSp delSp modSp add del mod">
+        <pc:chgData name="映潔 吳" userId="ce8478969c818b5d" providerId="LiveId" clId="{02718E11-8C50-4BF9-8911-C664F181BE0F}" dt="2026-06-14T01:32:44.515" v="169" actId="47"/>
+        <pc:sldMkLst>
+          <pc:docMk/>
+          <pc:sldMk cId="2934306591" sldId="258"/>
+        </pc:sldMkLst>
+        <pc:spChg chg="del">
+          <ac:chgData name="映潔 吳" userId="ce8478969c818b5d" providerId="LiveId" clId="{02718E11-8C50-4BF9-8911-C664F181BE0F}" dt="2026-06-14T01:02:24.999" v="63" actId="478"/>
+          <ac:spMkLst>
+            <pc:docMk/>
+            <pc:sldMk cId="2934306591" sldId="258"/>
+            <ac:spMk id="2" creationId="{85D6F87F-3559-74DE-4425-881EF401C385}"/>
+          </ac:spMkLst>
+        </pc:spChg>
+        <pc:spChg chg="mod">
+          <ac:chgData name="映潔 吳" userId="ce8478969c818b5d" providerId="LiveId" clId="{02718E11-8C50-4BF9-8911-C664F181BE0F}" dt="2026-06-14T01:31:33.382" v="163" actId="1076"/>
+          <ac:spMkLst>
+            <pc:docMk/>
+            <pc:sldMk cId="2934306591" sldId="258"/>
+            <ac:spMk id="3" creationId="{4AD2C5C8-DF77-E24B-5850-F42B11EFA6A1}"/>
+          </ac:spMkLst>
+        </pc:spChg>
+        <pc:spChg chg="add mod">
+          <ac:chgData name="映潔 吳" userId="ce8478969c818b5d" providerId="LiveId" clId="{02718E11-8C50-4BF9-8911-C664F181BE0F}" dt="2026-06-14T01:30:07.417" v="144" actId="2711"/>
+          <ac:spMkLst>
+            <pc:docMk/>
+            <pc:sldMk cId="2934306591" sldId="258"/>
+            <ac:spMk id="5" creationId="{988D3A59-09C4-86FE-D43E-99E252E6C22A}"/>
+          </ac:spMkLst>
+        </pc:spChg>
+        <pc:spChg chg="add">
+          <ac:chgData name="映潔 吳" userId="ce8478969c818b5d" providerId="LiveId" clId="{02718E11-8C50-4BF9-8911-C664F181BE0F}" dt="2026-06-14T01:30:15.765" v="145"/>
+          <ac:spMkLst>
+            <pc:docMk/>
+            <pc:sldMk cId="2934306591" sldId="258"/>
+            <ac:spMk id="11" creationId="{860488E5-49EA-0B3A-CD50-86FCCE187F92}"/>
+          </ac:spMkLst>
+        </pc:spChg>
+        <pc:cxnChg chg="add mod">
+          <ac:chgData name="映潔 吳" userId="ce8478969c818b5d" providerId="LiveId" clId="{02718E11-8C50-4BF9-8911-C664F181BE0F}" dt="2026-06-14T01:04:04.991" v="79" actId="14100"/>
+          <ac:cxnSpMkLst>
+            <pc:docMk/>
+            <pc:sldMk cId="2934306591" sldId="258"/>
+            <ac:cxnSpMk id="7" creationId="{9D14B508-30A4-5BF1-BF13-166FA4D4DFB1}"/>
+          </ac:cxnSpMkLst>
+        </pc:cxnChg>
+      </pc:sldChg>
+      <pc:sldChg chg="addSp delSp modSp add mod ord">
+        <pc:chgData name="映潔 吳" userId="ce8478969c818b5d" providerId="LiveId" clId="{02718E11-8C50-4BF9-8911-C664F181BE0F}" dt="2026-06-14T03:00:18.434" v="662" actId="20577"/>
+        <pc:sldMkLst>
+          <pc:docMk/>
+          <pc:sldMk cId="663800678" sldId="259"/>
+        </pc:sldMkLst>
+        <pc:spChg chg="add">
+          <ac:chgData name="映潔 吳" userId="ce8478969c818b5d" providerId="LiveId" clId="{02718E11-8C50-4BF9-8911-C664F181BE0F}" dt="2026-06-14T01:33:37.204" v="231"/>
+          <ac:spMkLst>
+            <pc:docMk/>
+            <pc:sldMk cId="663800678" sldId="259"/>
+            <ac:spMk id="2" creationId="{80CFA12B-30F8-CF6E-351D-7AB9B970CBE2}"/>
+          </ac:spMkLst>
+        </pc:spChg>
+        <pc:spChg chg="mod">
+          <ac:chgData name="映潔 吳" userId="ce8478969c818b5d" providerId="LiveId" clId="{02718E11-8C50-4BF9-8911-C664F181BE0F}" dt="2026-06-14T03:00:01.156" v="643" actId="1076"/>
+          <ac:spMkLst>
+            <pc:docMk/>
+            <pc:sldMk cId="663800678" sldId="259"/>
+            <ac:spMk id="3" creationId="{DBC3311F-D211-BAD2-676E-71C9A24ECE27}"/>
+          </ac:spMkLst>
+        </pc:spChg>
+        <pc:spChg chg="add del mod">
+          <ac:chgData name="映潔 吳" userId="ce8478969c818b5d" providerId="LiveId" clId="{02718E11-8C50-4BF9-8911-C664F181BE0F}" dt="2026-06-14T02:57:23.311" v="588" actId="478"/>
+          <ac:spMkLst>
+            <pc:docMk/>
+            <pc:sldMk cId="663800678" sldId="259"/>
+            <ac:spMk id="4" creationId="{6C3DD775-9038-FA78-C030-33EC60D13BEB}"/>
+          </ac:spMkLst>
+        </pc:spChg>
+        <pc:spChg chg="mod">
+          <ac:chgData name="映潔 吳" userId="ce8478969c818b5d" providerId="LiveId" clId="{02718E11-8C50-4BF9-8911-C664F181BE0F}" dt="2026-06-14T03:00:18.434" v="662" actId="20577"/>
+          <ac:spMkLst>
+            <pc:docMk/>
+            <pc:sldMk cId="663800678" sldId="259"/>
+            <ac:spMk id="5" creationId="{19C20DFD-10D3-9A94-59F9-8B5E8EDDF26B}"/>
+          </ac:spMkLst>
+        </pc:spChg>
+        <pc:spChg chg="add mod">
+          <ac:chgData name="映潔 吳" userId="ce8478969c818b5d" providerId="LiveId" clId="{02718E11-8C50-4BF9-8911-C664F181BE0F}" dt="2026-06-14T02:59:58.433" v="642" actId="1076"/>
+          <ac:spMkLst>
+            <pc:docMk/>
+            <pc:sldMk cId="663800678" sldId="259"/>
+            <ac:spMk id="6" creationId="{FFF0FE57-8B9E-6484-D27B-57638D55EF84}"/>
+          </ac:spMkLst>
+        </pc:spChg>
+        <pc:spChg chg="add mod">
+          <ac:chgData name="映潔 吳" userId="ce8478969c818b5d" providerId="LiveId" clId="{02718E11-8C50-4BF9-8911-C664F181BE0F}" dt="2026-06-14T02:59:58.433" v="642" actId="1076"/>
+          <ac:spMkLst>
+            <pc:docMk/>
+            <pc:sldMk cId="663800678" sldId="259"/>
+            <ac:spMk id="8" creationId="{6D85E43B-1BF6-73A9-F7A5-14C2071FC9AD}"/>
+          </ac:spMkLst>
+        </pc:spChg>
+        <pc:spChg chg="add">
+          <ac:chgData name="映潔 吳" userId="ce8478969c818b5d" providerId="LiveId" clId="{02718E11-8C50-4BF9-8911-C664F181BE0F}" dt="2026-06-14T02:55:42.075" v="535"/>
+          <ac:spMkLst>
+            <pc:docMk/>
+            <pc:sldMk cId="663800678" sldId="259"/>
+            <ac:spMk id="9" creationId="{D7EE80CC-D36A-65B9-C69C-3C681582FC70}"/>
+          </ac:spMkLst>
+        </pc:spChg>
+        <pc:spChg chg="add">
+          <ac:chgData name="映潔 吳" userId="ce8478969c818b5d" providerId="LiveId" clId="{02718E11-8C50-4BF9-8911-C664F181BE0F}" dt="2026-06-14T02:55:44.187" v="536"/>
+          <ac:spMkLst>
+            <pc:docMk/>
+            <pc:sldMk cId="663800678" sldId="259"/>
+            <ac:spMk id="10" creationId="{C60C329D-1798-38D3-0A62-A5B7914CE522}"/>
+          </ac:spMkLst>
+        </pc:spChg>
+        <pc:cxnChg chg="mod">
+          <ac:chgData name="映潔 吳" userId="ce8478969c818b5d" providerId="LiveId" clId="{02718E11-8C50-4BF9-8911-C664F181BE0F}" dt="2026-06-14T01:32:31.517" v="166" actId="208"/>
+          <ac:cxnSpMkLst>
+            <pc:docMk/>
+            <pc:sldMk cId="663800678" sldId="259"/>
+            <ac:cxnSpMk id="7" creationId="{1BFF8266-0591-C63C-461B-F603835BBC51}"/>
+          </ac:cxnSpMkLst>
+        </pc:cxnChg>
+      </pc:sldChg>
+      <pc:sldChg chg="modSp add mod">
+        <pc:chgData name="映潔 吳" userId="ce8478969c818b5d" providerId="LiveId" clId="{02718E11-8C50-4BF9-8911-C664F181BE0F}" dt="2026-06-14T01:53:05.352" v="490" actId="1076"/>
+        <pc:sldMkLst>
+          <pc:docMk/>
+          <pc:sldMk cId="1106161668" sldId="260"/>
+        </pc:sldMkLst>
+        <pc:spChg chg="mod">
+          <ac:chgData name="映潔 吳" userId="ce8478969c818b5d" providerId="LiveId" clId="{02718E11-8C50-4BF9-8911-C664F181BE0F}" dt="2026-06-14T01:53:05.352" v="490" actId="1076"/>
+          <ac:spMkLst>
+            <pc:docMk/>
+            <pc:sldMk cId="1106161668" sldId="260"/>
+            <ac:spMk id="3" creationId="{934FCFF7-C164-ED12-F33D-A6B8CB2956A9}"/>
+          </ac:spMkLst>
+        </pc:spChg>
+        <pc:spChg chg="mod">
+          <ac:chgData name="映潔 吳" userId="ce8478969c818b5d" providerId="LiveId" clId="{02718E11-8C50-4BF9-8911-C664F181BE0F}" dt="2026-06-14T01:37:59.636" v="321" actId="20577"/>
+          <ac:spMkLst>
+            <pc:docMk/>
+            <pc:sldMk cId="1106161668" sldId="260"/>
+            <ac:spMk id="5" creationId="{48929D3E-7B81-B6C9-32A0-E1957C4BCB68}"/>
+          </ac:spMkLst>
+        </pc:spChg>
+      </pc:sldChg>
+      <pc:sldChg chg="addSp delSp modSp add del mod ord">
+        <pc:chgData name="映潔 吳" userId="ce8478969c818b5d" providerId="LiveId" clId="{02718E11-8C50-4BF9-8911-C664F181BE0F}" dt="2026-06-14T03:00:56.384" v="664" actId="47"/>
+        <pc:sldMkLst>
+          <pc:docMk/>
+          <pc:sldMk cId="1039985546" sldId="261"/>
+        </pc:sldMkLst>
+        <pc:spChg chg="del mod">
+          <ac:chgData name="映潔 吳" userId="ce8478969c818b5d" providerId="LiveId" clId="{02718E11-8C50-4BF9-8911-C664F181BE0F}" dt="2026-06-14T01:49:36.490" v="464" actId="478"/>
+          <ac:spMkLst>
+            <pc:docMk/>
+            <pc:sldMk cId="1039985546" sldId="261"/>
+            <ac:spMk id="3" creationId="{168C81FF-D61F-AAD5-201E-791FC56F25E2}"/>
+          </ac:spMkLst>
+        </pc:spChg>
+        <pc:spChg chg="add del mod">
+          <ac:chgData name="映潔 吳" userId="ce8478969c818b5d" providerId="LiveId" clId="{02718E11-8C50-4BF9-8911-C664F181BE0F}" dt="2026-06-14T01:49:44.089" v="465" actId="478"/>
+          <ac:spMkLst>
+            <pc:docMk/>
+            <pc:sldMk cId="1039985546" sldId="261"/>
+            <ac:spMk id="4" creationId="{9D945EA8-0371-69C1-BD95-BACFAF82CAF4}"/>
+          </ac:spMkLst>
+        </pc:spChg>
+        <pc:spChg chg="mod">
+          <ac:chgData name="映潔 吳" userId="ce8478969c818b5d" providerId="LiveId" clId="{02718E11-8C50-4BF9-8911-C664F181BE0F}" dt="2026-06-14T01:49:30.683" v="463" actId="20577"/>
+          <ac:spMkLst>
+            <pc:docMk/>
+            <pc:sldMk cId="1039985546" sldId="261"/>
+            <ac:spMk id="5" creationId="{1AA83D92-83BC-D9F8-873E-C8F6E5503AC8}"/>
+          </ac:spMkLst>
+        </pc:spChg>
+        <pc:spChg chg="add del mod">
+          <ac:chgData name="映潔 吳" userId="ce8478969c818b5d" providerId="LiveId" clId="{02718E11-8C50-4BF9-8911-C664F181BE0F}" dt="2026-06-14T01:57:42.690" v="517" actId="478"/>
+          <ac:spMkLst>
+            <pc:docMk/>
+            <pc:sldMk cId="1039985546" sldId="261"/>
+            <ac:spMk id="6" creationId="{A6A646F3-7318-ED8F-BDB3-9F5ACFA46CCE}"/>
+          </ac:spMkLst>
+        </pc:spChg>
+        <pc:spChg chg="add del mod">
+          <ac:chgData name="映潔 吳" userId="ce8478969c818b5d" providerId="LiveId" clId="{02718E11-8C50-4BF9-8911-C664F181BE0F}" dt="2026-06-14T01:57:38.818" v="514" actId="478"/>
+          <ac:spMkLst>
+            <pc:docMk/>
+            <pc:sldMk cId="1039985546" sldId="261"/>
+            <ac:spMk id="8" creationId="{A1F7DB28-89D6-1DCB-C354-D6BECE919C9C}"/>
+          </ac:spMkLst>
+        </pc:spChg>
+        <pc:spChg chg="add mod">
+          <ac:chgData name="映潔 吳" userId="ce8478969c818b5d" providerId="LiveId" clId="{02718E11-8C50-4BF9-8911-C664F181BE0F}" dt="2026-06-14T01:56:55.192" v="504" actId="20577"/>
+          <ac:spMkLst>
+            <pc:docMk/>
+            <pc:sldMk cId="1039985546" sldId="261"/>
+            <ac:spMk id="9" creationId="{775C80D8-275E-7771-17BE-6973020DA538}"/>
+          </ac:spMkLst>
+        </pc:spChg>
+        <pc:spChg chg="add del mod">
+          <ac:chgData name="映潔 吳" userId="ce8478969c818b5d" providerId="LiveId" clId="{02718E11-8C50-4BF9-8911-C664F181BE0F}" dt="2026-06-14T01:57:40.482" v="515" actId="478"/>
+          <ac:spMkLst>
+            <pc:docMk/>
+            <pc:sldMk cId="1039985546" sldId="261"/>
+            <ac:spMk id="10" creationId="{4751CD69-4D45-B78F-5516-DEA5C958050C}"/>
+          </ac:spMkLst>
+        </pc:spChg>
+        <pc:spChg chg="add del mod">
+          <ac:chgData name="映潔 吳" userId="ce8478969c818b5d" providerId="LiveId" clId="{02718E11-8C50-4BF9-8911-C664F181BE0F}" dt="2026-06-14T01:57:59.270" v="518" actId="478"/>
+          <ac:spMkLst>
+            <pc:docMk/>
+            <pc:sldMk cId="1039985546" sldId="261"/>
+            <ac:spMk id="12" creationId="{69204048-9155-9AD8-9677-661E76A7E14D}"/>
+          </ac:spMkLst>
+        </pc:spChg>
+      </pc:sldChg>
+      <pc:sldChg chg="add del">
+        <pc:chgData name="映潔 吳" userId="ce8478969c818b5d" providerId="LiveId" clId="{02718E11-8C50-4BF9-8911-C664F181BE0F}" dt="2026-06-14T01:40:47.211" v="359" actId="2890"/>
+        <pc:sldMkLst>
+          <pc:docMk/>
+          <pc:sldMk cId="332979469" sldId="262"/>
+        </pc:sldMkLst>
+      </pc:sldChg>
+      <pc:sldChg chg="addSp delSp modSp add mod">
+        <pc:chgData name="映潔 吳" userId="ce8478969c818b5d" providerId="LiveId" clId="{02718E11-8C50-4BF9-8911-C664F181BE0F}" dt="2026-06-14T03:01:42.122" v="718" actId="1076"/>
+        <pc:sldMkLst>
+          <pc:docMk/>
+          <pc:sldMk cId="2027601596" sldId="262"/>
+        </pc:sldMkLst>
+        <pc:spChg chg="del mod">
+          <ac:chgData name="映潔 吳" userId="ce8478969c818b5d" providerId="LiveId" clId="{02718E11-8C50-4BF9-8911-C664F181BE0F}" dt="2026-06-14T03:01:17.018" v="690" actId="478"/>
+          <ac:spMkLst>
+            <pc:docMk/>
+            <pc:sldMk cId="2027601596" sldId="262"/>
+            <ac:spMk id="3" creationId="{CE3EA92D-93F1-4F0A-0EAC-8F9B7CE27050}"/>
+          </ac:spMkLst>
+        </pc:spChg>
+        <pc:spChg chg="add mod">
+          <ac:chgData name="映潔 吳" userId="ce8478969c818b5d" providerId="LiveId" clId="{02718E11-8C50-4BF9-8911-C664F181BE0F}" dt="2026-06-14T03:01:42.122" v="718" actId="1076"/>
+          <ac:spMkLst>
+            <pc:docMk/>
+            <pc:sldMk cId="2027601596" sldId="262"/>
+            <ac:spMk id="4" creationId="{387341E8-841B-44F5-420F-0679D74842FA}"/>
+          </ac:spMkLst>
+        </pc:spChg>
+        <pc:spChg chg="mod">
+          <ac:chgData name="映潔 吳" userId="ce8478969c818b5d" providerId="LiveId" clId="{02718E11-8C50-4BF9-8911-C664F181BE0F}" dt="2026-06-14T03:01:09.753" v="689" actId="20577"/>
+          <ac:spMkLst>
+            <pc:docMk/>
+            <pc:sldMk cId="2027601596" sldId="262"/>
+            <ac:spMk id="5" creationId="{D49023E7-F124-8FB7-88DA-83BA3DAA8DCC}"/>
+          </ac:spMkLst>
+        </pc:spChg>
+      </pc:sldChg>
+      <pc:sldChg chg="delSp modSp add del mod ord">
+        <pc:chgData name="映潔 吳" userId="ce8478969c818b5d" providerId="LiveId" clId="{02718E11-8C50-4BF9-8911-C664F181BE0F}" dt="2026-06-14T03:00:54.973" v="663" actId="47"/>
+        <pc:sldMkLst>
+          <pc:docMk/>
+          <pc:sldMk cId="548452817" sldId="263"/>
+        </pc:sldMkLst>
+        <pc:spChg chg="del mod">
+          <ac:chgData name="映潔 吳" userId="ce8478969c818b5d" providerId="LiveId" clId="{02718E11-8C50-4BF9-8911-C664F181BE0F}" dt="2026-06-14T01:57:21.334" v="507" actId="478"/>
+          <ac:spMkLst>
+            <pc:docMk/>
+            <pc:sldMk cId="548452817" sldId="263"/>
+            <ac:spMk id="8" creationId="{B3189F32-A471-C199-446D-1E07DC560F72}"/>
+          </ac:spMkLst>
+        </pc:spChg>
+        <pc:spChg chg="del">
+          <ac:chgData name="映潔 吳" userId="ce8478969c818b5d" providerId="LiveId" clId="{02718E11-8C50-4BF9-8911-C664F181BE0F}" dt="2026-06-14T01:57:26.015" v="509" actId="478"/>
+          <ac:spMkLst>
+            <pc:docMk/>
+            <pc:sldMk cId="548452817" sldId="263"/>
+            <ac:spMk id="9" creationId="{87D4E07C-93ED-1FEF-10A3-963C70B21DC3}"/>
+          </ac:spMkLst>
+        </pc:spChg>
+        <pc:spChg chg="del">
+          <ac:chgData name="映潔 吳" userId="ce8478969c818b5d" providerId="LiveId" clId="{02718E11-8C50-4BF9-8911-C664F181BE0F}" dt="2026-06-14T01:57:22.731" v="508" actId="478"/>
+          <ac:spMkLst>
+            <pc:docMk/>
+            <pc:sldMk cId="548452817" sldId="263"/>
+            <ac:spMk id="10" creationId="{A56B6BA9-A15A-42ED-C165-3CB8E68E1CBE}"/>
+          </ac:spMkLst>
+        </pc:spChg>
+      </pc:sldChg>
+      <pc:sldChg chg="delSp add mod">
+        <pc:chgData name="映潔 吳" userId="ce8478969c818b5d" providerId="LiveId" clId="{02718E11-8C50-4BF9-8911-C664F181BE0F}" dt="2026-06-14T03:02:00.308" v="719" actId="478"/>
+        <pc:sldMkLst>
+          <pc:docMk/>
+          <pc:sldMk cId="3276122178" sldId="263"/>
+        </pc:sldMkLst>
+        <pc:spChg chg="del">
+          <ac:chgData name="映潔 吳" userId="ce8478969c818b5d" providerId="LiveId" clId="{02718E11-8C50-4BF9-8911-C664F181BE0F}" dt="2026-06-14T03:02:00.308" v="719" actId="478"/>
+          <ac:spMkLst>
+            <pc:docMk/>
+            <pc:sldMk cId="3276122178" sldId="263"/>
+            <ac:spMk id="3" creationId="{73A2830E-9C06-05A3-686F-A1EF06210A69}"/>
+          </ac:spMkLst>
+        </pc:spChg>
+      </pc:sldChg>
+      <pc:sldChg chg="add del">
+        <pc:chgData name="映潔 吳" userId="ce8478969c818b5d" providerId="LiveId" clId="{02718E11-8C50-4BF9-8911-C664F181BE0F}" dt="2026-06-14T03:00:57.395" v="665" actId="47"/>
+        <pc:sldMkLst>
+          <pc:docMk/>
+          <pc:sldMk cId="2457011713" sldId="264"/>
+        </pc:sldMkLst>
+      </pc:sldChg>
+    </pc:docChg>
+  </pc:docChgLst>
+</pc:chgInfo>
+</file>
+
+<file path=ppt/notesMasters/notesMaster1.xml><?xml version="1.0" encoding="utf-8"?>
+<p:notesMaster xmlns:a="http://schemas.openxmlformats.org/drawingml/2006/main" xmlns:r="http://schemas.openxmlformats.org/officeDocument/2006/relationships" xmlns:p="http://schemas.openxmlformats.org/presentationml/2006/main">
+  <p:cSld>
+    <p:bg>
+      <p:bgRef idx="1001">
+        <a:schemeClr val="bg1"/>
+      </p:bgRef>
+    </p:bg>
+    <p:spTree>
+      <p:nvGrpSpPr>
+        <p:cNvPr id="1" name=""/>
+        <p:cNvGrpSpPr/>
+        <p:nvPr/>
+      </p:nvGrpSpPr>
+      <p:grpSpPr>
+        <a:xfrm>
+          <a:off x="0" y="0"/>
+          <a:ext cx="0" cy="0"/>
+          <a:chOff x="0" y="0"/>
+          <a:chExt cx="0" cy="0"/>
+        </a:xfrm>
+      </p:grpSpPr>
+      <p:sp>
+        <p:nvSpPr>
+          <p:cNvPr id="2" name="頁首版面配置區 1"/>
+          <p:cNvSpPr>
+            <a:spLocks noGrp="1"/>
+          </p:cNvSpPr>
+          <p:nvPr>
+            <p:ph type="hdr" sz="quarter"/>
+          </p:nvPr>
+        </p:nvSpPr>
+        <p:spPr>
+          <a:xfrm>
+            <a:off x="0" y="0"/>
+            <a:ext cx="2971800" cy="458788"/>
+          </a:xfrm>
+          <a:prstGeom prst="rect">
+            <a:avLst/>
+          </a:prstGeom>
+        </p:spPr>
+        <p:txBody>
+          <a:bodyPr vert="horz" lIns="91440" tIns="45720" rIns="91440" bIns="45720" rtlCol="0"/>
+          <a:lstStyle>
+            <a:lvl1pPr algn="l">
+              <a:defRPr sz="1200"/>
+            </a:lvl1pPr>
+          </a:lstStyle>
+          <a:p>
+            <a:endParaRPr lang="zh-TW" altLang="en-US"/>
+          </a:p>
+        </p:txBody>
+      </p:sp>
+      <p:sp>
+        <p:nvSpPr>
+          <p:cNvPr id="3" name="日期版面配置區 2"/>
+          <p:cNvSpPr>
+            <a:spLocks noGrp="1"/>
+          </p:cNvSpPr>
+          <p:nvPr>
+            <p:ph type="dt" idx="1"/>
+          </p:nvPr>
+        </p:nvSpPr>
+        <p:spPr>
+          <a:xfrm>
+            <a:off x="3884613" y="0"/>
+            <a:ext cx="2971800" cy="458788"/>
+          </a:xfrm>
+          <a:prstGeom prst="rect">
+            <a:avLst/>
+          </a:prstGeom>
+        </p:spPr>
+        <p:txBody>
+          <a:bodyPr vert="horz" lIns="91440" tIns="45720" rIns="91440" bIns="45720" rtlCol="0"/>
+          <a:lstStyle>
+            <a:lvl1pPr algn="r">
+              <a:defRPr sz="1200"/>
+            </a:lvl1pPr>
+          </a:lstStyle>
+          <a:p>
+            <a:fld id="{DF572D60-C997-4059-9B2E-4DF1C7679F89}" type="datetimeFigureOut">
+              <a:rPr lang="zh-TW" altLang="en-US" smtClean="0"/>
+              <a:t>2026/6/14</a:t>
+            </a:fld>
+            <a:endParaRPr lang="zh-TW" altLang="en-US"/>
+          </a:p>
+        </p:txBody>
+      </p:sp>
+      <p:sp>
+        <p:nvSpPr>
+          <p:cNvPr id="4" name="投影片影像版面配置區 3"/>
+          <p:cNvSpPr>
+            <a:spLocks noGrp="1" noRot="1" noChangeAspect="1"/>
+          </p:cNvSpPr>
+          <p:nvPr>
+            <p:ph type="sldImg" idx="2"/>
+          </p:nvPr>
+        </p:nvSpPr>
+        <p:spPr>
+          <a:xfrm>
+            <a:off x="685800" y="1143000"/>
+            <a:ext cx="5486400" cy="3086100"/>
+          </a:xfrm>
+          <a:prstGeom prst="rect">
+            <a:avLst/>
+          </a:prstGeom>
+          <a:noFill/>
+          <a:ln w="12700">
+            <a:solidFill>
+              <a:prstClr val="black"/>
+            </a:solidFill>
+          </a:ln>
+        </p:spPr>
+        <p:txBody>
+          <a:bodyPr vert="horz" lIns="91440" tIns="45720" rIns="91440" bIns="45720" rtlCol="0" anchor="ctr"/>
+          <a:lstStyle/>
+          <a:p>
+            <a:endParaRPr lang="zh-TW" altLang="en-US"/>
+          </a:p>
+        </p:txBody>
+      </p:sp>
+      <p:sp>
+        <p:nvSpPr>
+          <p:cNvPr id="5" name="備忘稿版面配置區 4"/>
+          <p:cNvSpPr>
+            <a:spLocks noGrp="1"/>
+          </p:cNvSpPr>
+          <p:nvPr>
+            <p:ph type="body" sz="quarter" idx="3"/>
+          </p:nvPr>
+        </p:nvSpPr>
+        <p:spPr>
+          <a:xfrm>
+            <a:off x="685800" y="4400550"/>
+            <a:ext cx="5486400" cy="3600450"/>
+          </a:xfrm>
+          <a:prstGeom prst="rect">
+            <a:avLst/>
+          </a:prstGeom>
+        </p:spPr>
+        <p:txBody>
+          <a:bodyPr vert="horz" lIns="91440" tIns="45720" rIns="91440" bIns="45720" rtlCol="0"/>
+          <a:lstStyle/>
+          <a:p>
+            <a:pPr lvl="0"/>
+            <a:r>
+              <a:rPr lang="zh-TW" altLang="en-US"/>
+              <a:t>按一下以編輯母片文字樣式</a:t>
+            </a:r>
+          </a:p>
+          <a:p>
+            <a:pPr lvl="1"/>
+            <a:r>
+              <a:rPr lang="zh-TW" altLang="en-US"/>
+              <a:t>第二層</a:t>
+            </a:r>
+          </a:p>
+          <a:p>
+            <a:pPr lvl="2"/>
+            <a:r>
+              <a:rPr lang="zh-TW" altLang="en-US"/>
+              <a:t>第三層</a:t>
+            </a:r>
+          </a:p>
+          <a:p>
+            <a:pPr lvl="3"/>
+            <a:r>
+              <a:rPr lang="zh-TW" altLang="en-US"/>
+              <a:t>第四層</a:t>
+            </a:r>
+          </a:p>
+          <a:p>
+            <a:pPr lvl="4"/>
+            <a:r>
+              <a:rPr lang="zh-TW" altLang="en-US"/>
+              <a:t>第五層</a:t>
+            </a:r>
+          </a:p>
+        </p:txBody>
+      </p:sp>
+      <p:sp>
+        <p:nvSpPr>
+          <p:cNvPr id="6" name="頁尾版面配置區 5"/>
+          <p:cNvSpPr>
+            <a:spLocks noGrp="1"/>
+          </p:cNvSpPr>
+          <p:nvPr>
+            <p:ph type="ftr" sz="quarter" idx="4"/>
+          </p:nvPr>
+        </p:nvSpPr>
+        <p:spPr>
+          <a:xfrm>
+            <a:off x="0" y="8685213"/>
+            <a:ext cx="2971800" cy="458787"/>
+          </a:xfrm>
+          <a:prstGeom prst="rect">
+            <a:avLst/>
+          </a:prstGeom>
+        </p:spPr>
+        <p:txBody>
+          <a:bodyPr vert="horz" lIns="91440" tIns="45720" rIns="91440" bIns="45720" rtlCol="0" anchor="b"/>
+          <a:lstStyle>
+            <a:lvl1pPr algn="l">
+              <a:defRPr sz="1200"/>
+            </a:lvl1pPr>
+          </a:lstStyle>
+          <a:p>
+            <a:endParaRPr lang="zh-TW" altLang="en-US"/>
+          </a:p>
+        </p:txBody>
+      </p:sp>
+      <p:sp>
+        <p:nvSpPr>
+          <p:cNvPr id="7" name="投影片編號版面配置區 6"/>
+          <p:cNvSpPr>
+            <a:spLocks noGrp="1"/>
+          </p:cNvSpPr>
+          <p:nvPr>
+            <p:ph type="sldNum" sz="quarter" idx="5"/>
+          </p:nvPr>
+        </p:nvSpPr>
+        <p:spPr>
+          <a:xfrm>
+            <a:off x="3884613" y="8685213"/>
+            <a:ext cx="2971800" cy="458787"/>
+          </a:xfrm>
+          <a:prstGeom prst="rect">
+            <a:avLst/>
+          </a:prstGeom>
+        </p:spPr>
+        <p:txBody>
+          <a:bodyPr vert="horz" lIns="91440" tIns="45720" rIns="91440" bIns="45720" rtlCol="0" anchor="b"/>
+          <a:lstStyle>
+            <a:lvl1pPr algn="r">
+              <a:defRPr sz="1200"/>
+            </a:lvl1pPr>
+          </a:lstStyle>
+          <a:p>
+            <a:fld id="{70BADD85-6A6E-4C1E-A4FA-C0EA4BD81963}" type="slidenum">
+              <a:rPr lang="zh-TW" altLang="en-US" smtClean="0"/>
+              <a:t>‹#›</a:t>
+            </a:fld>
+            <a:endParaRPr lang="zh-TW" altLang="en-US"/>
+          </a:p>
+        </p:txBody>
+      </p:sp>
+    </p:spTree>
+    <p:extLst>
+      <p:ext uri="{BB962C8B-B14F-4D97-AF65-F5344CB8AC3E}">
+        <p14:creationId xmlns:p14="http://schemas.microsoft.com/office/powerpoint/2010/main" val="1540380714"/>
+      </p:ext>
+    </p:extLst>
+  </p:cSld>
+  <p:clrMap bg1="lt1" tx1="dk1" bg2="lt2" tx2="dk2" accent1="accent1" accent2="accent2" accent3="accent3" accent4="accent4" accent5="accent5" accent6="accent6" hlink="hlink" folHlink="folHlink"/>
+  <p:notesStyle>
+    <a:lvl1pPr marL="0" algn="l" defTabSz="914400" rtl="0" eaLnBrk="1" latinLnBrk="0" hangingPunct="1">
+      <a:defRPr sz="1200" kern="1200">
+        <a:solidFill>
+          <a:schemeClr val="tx1"/>
+        </a:solidFill>
+        <a:latin typeface="+mn-lt"/>
+        <a:ea typeface="+mn-ea"/>
+        <a:cs typeface="+mn-cs"/>
+      </a:defRPr>
+    </a:lvl1pPr>
+    <a:lvl2pPr marL="457200" algn="l" defTabSz="914400" rtl="0" eaLnBrk="1" latinLnBrk="0" hangingPunct="1">
+      <a:defRPr sz="1200" kern="1200">
+        <a:solidFill>
+          <a:schemeClr val="tx1"/>
+        </a:solidFill>
+        <a:latin typeface="+mn-lt"/>
+        <a:ea typeface="+mn-ea"/>
+        <a:cs typeface="+mn-cs"/>
+      </a:defRPr>
+    </a:lvl2pPr>
+    <a:lvl3pPr marL="914400" algn="l" defTabSz="914400" rtl="0" eaLnBrk="1" latinLnBrk="0" hangingPunct="1">
+      <a:defRPr sz="1200" kern="1200">
+        <a:solidFill>
+          <a:schemeClr val="tx1"/>
+        </a:solidFill>
+        <a:latin typeface="+mn-lt"/>
+        <a:ea typeface="+mn-ea"/>
+        <a:cs typeface="+mn-cs"/>
+      </a:defRPr>
+    </a:lvl3pPr>
+    <a:lvl4pPr marL="1371600" algn="l" defTabSz="914400" rtl="0" eaLnBrk="1" latinLnBrk="0" hangingPunct="1">
+      <a:defRPr sz="1200" kern="1200">
+        <a:solidFill>
+          <a:schemeClr val="tx1"/>
+        </a:solidFill>
+        <a:latin typeface="+mn-lt"/>
+        <a:ea typeface="+mn-ea"/>
+        <a:cs typeface="+mn-cs"/>
+      </a:defRPr>
+    </a:lvl4pPr>
+    <a:lvl5pPr marL="1828800" algn="l" defTabSz="914400" rtl="0" eaLnBrk="1" latinLnBrk="0" hangingPunct="1">
+      <a:defRPr sz="1200" kern="1200">
+        <a:solidFill>
+          <a:schemeClr val="tx1"/>
+        </a:solidFill>
+        <a:latin typeface="+mn-lt"/>
+        <a:ea typeface="+mn-ea"/>
+        <a:cs typeface="+mn-cs"/>
+      </a:defRPr>
+    </a:lvl5pPr>
+    <a:lvl6pPr marL="2286000" algn="l" defTabSz="914400" rtl="0" eaLnBrk="1" latinLnBrk="0" hangingPunct="1">
+      <a:defRPr sz="1200" kern="1200">
+        <a:solidFill>
+          <a:schemeClr val="tx1"/>
+        </a:solidFill>
+        <a:latin typeface="+mn-lt"/>
+        <a:ea typeface="+mn-ea"/>
+        <a:cs typeface="+mn-cs"/>
+      </a:defRPr>
+    </a:lvl6pPr>
+    <a:lvl7pPr marL="2743200" algn="l" defTabSz="914400" rtl="0" eaLnBrk="1" latinLnBrk="0" hangingPunct="1">
+      <a:defRPr sz="1200" kern="1200">
+        <a:solidFill>
+          <a:schemeClr val="tx1"/>
+        </a:solidFill>
+        <a:latin typeface="+mn-lt"/>
+        <a:ea typeface="+mn-ea"/>
+        <a:cs typeface="+mn-cs"/>
+      </a:defRPr>
+    </a:lvl7pPr>
+    <a:lvl8pPr marL="3200400" algn="l" defTabSz="914400" rtl="0" eaLnBrk="1" latinLnBrk="0" hangingPunct="1">
+      <a:defRPr sz="1200" kern="1200">
+        <a:solidFill>
+          <a:schemeClr val="tx1"/>
+        </a:solidFill>
+        <a:latin typeface="+mn-lt"/>
+        <a:ea typeface="+mn-ea"/>
+        <a:cs typeface="+mn-cs"/>
+      </a:defRPr>
+    </a:lvl8pPr>
+    <a:lvl9pPr marL="3657600" algn="l" defTabSz="914400" rtl="0" eaLnBrk="1" latinLnBrk="0" hangingPunct="1">
+      <a:defRPr sz="1200" kern="1200">
+        <a:solidFill>
+          <a:schemeClr val="tx1"/>
+        </a:solidFill>
+        <a:latin typeface="+mn-lt"/>
+        <a:ea typeface="+mn-ea"/>
+        <a:cs typeface="+mn-cs"/>
+      </a:defRPr>
+    </a:lvl9pPr>
+  </p:notesStyle>
+</p:notesMaster>
 </file>
 
 <file path=ppt/slideLayouts/slideLayout1.xml><?xml version="1.0" encoding="utf-8"?>
@@ -254,7 +1002,7 @@
           <a:p>
             <a:fld id="{DFE1A592-53B1-4732-B9A9-80A052F90276}" type="datetimeFigureOut">
               <a:rPr lang="zh-TW" altLang="en-US" smtClean="0"/>
-              <a:t>2026/6/1</a:t>
+              <a:t>2026/6/14</a:t>
             </a:fld>
             <a:endParaRPr lang="zh-TW" altLang="en-US"/>
           </a:p>
@@ -452,7 +1200,7 @@
           <a:p>
             <a:fld id="{DFE1A592-53B1-4732-B9A9-80A052F90276}" type="datetimeFigureOut">
               <a:rPr lang="zh-TW" altLang="en-US" smtClean="0"/>
-              <a:t>2026/6/1</a:t>
+              <a:t>2026/6/14</a:t>
             </a:fld>
             <a:endParaRPr lang="zh-TW" altLang="en-US"/>
           </a:p>
@@ -660,7 +1408,7 @@
           <a:p>
             <a:fld id="{DFE1A592-53B1-4732-B9A9-80A052F90276}" type="datetimeFigureOut">
               <a:rPr lang="zh-TW" altLang="en-US" smtClean="0"/>
-              <a:t>2026/6/1</a:t>
+              <a:t>2026/6/14</a:t>
             </a:fld>
             <a:endParaRPr lang="zh-TW" altLang="en-US"/>
           </a:p>
@@ -858,7 +1606,7 @@
           <a:p>
             <a:fld id="{DFE1A592-53B1-4732-B9A9-80A052F90276}" type="datetimeFigureOut">
               <a:rPr lang="zh-TW" altLang="en-US" smtClean="0"/>
-              <a:t>2026/6/1</a:t>
+              <a:t>2026/6/14</a:t>
             </a:fld>
             <a:endParaRPr lang="zh-TW" altLang="en-US"/>
           </a:p>
@@ -1133,7 +1881,7 @@
           <a:p>
             <a:fld id="{DFE1A592-53B1-4732-B9A9-80A052F90276}" type="datetimeFigureOut">
               <a:rPr lang="zh-TW" altLang="en-US" smtClean="0"/>
-              <a:t>2026/6/1</a:t>
+              <a:t>2026/6/14</a:t>
             </a:fld>
             <a:endParaRPr lang="zh-TW" altLang="en-US"/>
           </a:p>
@@ -1398,7 +2146,7 @@
           <a:p>
             <a:fld id="{DFE1A592-53B1-4732-B9A9-80A052F90276}" type="datetimeFigureOut">
               <a:rPr lang="zh-TW" altLang="en-US" smtClean="0"/>
-              <a:t>2026/6/1</a:t>
+              <a:t>2026/6/14</a:t>
             </a:fld>
             <a:endParaRPr lang="zh-TW" altLang="en-US"/>
           </a:p>
@@ -1810,7 +2558,7 @@
           <a:p>
             <a:fld id="{DFE1A592-53B1-4732-B9A9-80A052F90276}" type="datetimeFigureOut">
               <a:rPr lang="zh-TW" altLang="en-US" smtClean="0"/>
-              <a:t>2026/6/1</a:t>
+              <a:t>2026/6/14</a:t>
             </a:fld>
             <a:endParaRPr lang="zh-TW" altLang="en-US"/>
           </a:p>
@@ -1951,7 +2699,7 @@
           <a:p>
             <a:fld id="{DFE1A592-53B1-4732-B9A9-80A052F90276}" type="datetimeFigureOut">
               <a:rPr lang="zh-TW" altLang="en-US" smtClean="0"/>
-              <a:t>2026/6/1</a:t>
+              <a:t>2026/6/14</a:t>
             </a:fld>
             <a:endParaRPr lang="zh-TW" altLang="en-US"/>
           </a:p>
@@ -2064,7 +2812,7 @@
           <a:p>
             <a:fld id="{DFE1A592-53B1-4732-B9A9-80A052F90276}" type="datetimeFigureOut">
               <a:rPr lang="zh-TW" altLang="en-US" smtClean="0"/>
-              <a:t>2026/6/1</a:t>
+              <a:t>2026/6/14</a:t>
             </a:fld>
             <a:endParaRPr lang="zh-TW" altLang="en-US"/>
           </a:p>
@@ -2375,7 +3123,7 @@
           <a:p>
             <a:fld id="{DFE1A592-53B1-4732-B9A9-80A052F90276}" type="datetimeFigureOut">
               <a:rPr lang="zh-TW" altLang="en-US" smtClean="0"/>
-              <a:t>2026/6/1</a:t>
+              <a:t>2026/6/14</a:t>
             </a:fld>
             <a:endParaRPr lang="zh-TW" altLang="en-US"/>
           </a:p>
@@ -2663,7 +3411,7 @@
           <a:p>
             <a:fld id="{DFE1A592-53B1-4732-B9A9-80A052F90276}" type="datetimeFigureOut">
               <a:rPr lang="zh-TW" altLang="en-US" smtClean="0"/>
-              <a:t>2026/6/1</a:t>
+              <a:t>2026/6/14</a:t>
             </a:fld>
             <a:endParaRPr lang="zh-TW" altLang="en-US"/>
           </a:p>
@@ -2904,7 +3652,7 @@
           <a:p>
             <a:fld id="{DFE1A592-53B1-4732-B9A9-80A052F90276}" type="datetimeFigureOut">
               <a:rPr lang="zh-TW" altLang="en-US" smtClean="0"/>
-              <a:t>2026/6/1</a:t>
+              <a:t>2026/6/14</a:t>
             </a:fld>
             <a:endParaRPr lang="zh-TW" altLang="en-US"/>
           </a:p>
@@ -3307,6 +4055,17 @@
 <file path=ppt/slides/slide1.xml><?xml version="1.0" encoding="utf-8"?>
 <p:sld xmlns:a="http://schemas.openxmlformats.org/drawingml/2006/main" xmlns:r="http://schemas.openxmlformats.org/officeDocument/2006/relationships" xmlns:p="http://schemas.openxmlformats.org/presentationml/2006/main">
   <p:cSld>
+    <p:bg>
+      <p:bgPr>
+        <a:solidFill>
+          <a:schemeClr val="tx2">
+            <a:lumMod val="90000"/>
+            <a:lumOff val="10000"/>
+          </a:schemeClr>
+        </a:solidFill>
+        <a:effectLst/>
+      </p:bgPr>
+    </p:bg>
     <p:spTree>
       <p:nvGrpSpPr>
         <p:cNvPr id="1" name=""/>
@@ -3337,12 +4096,48 @@
             <p:ph type="ctrTitle"/>
           </p:nvPr>
         </p:nvSpPr>
-        <p:spPr/>
-        <p:txBody>
-          <a:bodyPr/>
+        <p:spPr>
+          <a:xfrm>
+            <a:off x="203200" y="2113279"/>
+            <a:ext cx="11785600" cy="980123"/>
+          </a:xfrm>
+        </p:spPr>
+        <p:txBody>
+          <a:bodyPr>
+            <a:noAutofit/>
+          </a:bodyPr>
           <a:lstStyle/>
           <a:p>
-            <a:endParaRPr lang="zh-TW" altLang="en-US"/>
+            <a:r>
+              <a:rPr lang="zh-TW" altLang="en-US" sz="5400" b="1" dirty="0">
+                <a:solidFill>
+                  <a:schemeClr val="bg1"/>
+                </a:solidFill>
+                <a:latin typeface="微軟正黑體" panose="020B0604030504040204" pitchFamily="34" charset="-120"/>
+                <a:ea typeface="微軟正黑體" panose="020B0604030504040204" pitchFamily="34" charset="-120"/>
+              </a:rPr>
+              <a:t>台灣零售營業額指數與</a:t>
+            </a:r>
+            <a:r>
+              <a:rPr lang="en-US" altLang="zh-TW" sz="5400" b="1" dirty="0">
+                <a:solidFill>
+                  <a:schemeClr val="bg1"/>
+                </a:solidFill>
+                <a:latin typeface="微軟正黑體" panose="020B0604030504040204" pitchFamily="34" charset="-120"/>
+                <a:ea typeface="微軟正黑體" panose="020B0604030504040204" pitchFamily="34" charset="-120"/>
+              </a:rPr>
+              <a:t>CPI</a:t>
+            </a:r>
+            <a:r>
+              <a:rPr lang="zh-TW" altLang="en-US" sz="5400" b="1" dirty="0">
+                <a:solidFill>
+                  <a:schemeClr val="bg1"/>
+                </a:solidFill>
+                <a:latin typeface="微軟正黑體" panose="020B0604030504040204" pitchFamily="34" charset="-120"/>
+                <a:ea typeface="微軟正黑體" panose="020B0604030504040204" pitchFamily="34" charset="-120"/>
+              </a:rPr>
+              <a:t>連動性分析</a:t>
+            </a:r>
           </a:p>
         </p:txBody>
       </p:sp>
@@ -3362,12 +4157,38 @@
             <p:ph type="subTitle" idx="1"/>
           </p:nvPr>
         </p:nvSpPr>
-        <p:spPr/>
-        <p:txBody>
-          <a:bodyPr/>
+        <p:spPr>
+          <a:xfrm>
+            <a:off x="3911600" y="3764599"/>
+            <a:ext cx="4368800" cy="492442"/>
+          </a:xfrm>
+        </p:spPr>
+        <p:txBody>
+          <a:bodyPr>
+            <a:normAutofit/>
+          </a:bodyPr>
           <a:lstStyle/>
           <a:p>
-            <a:endParaRPr lang="zh-TW" altLang="en-US"/>
+            <a:r>
+              <a:rPr lang="en-US" altLang="zh-TW" sz="2800" b="1" dirty="0">
+                <a:solidFill>
+                  <a:schemeClr val="bg1"/>
+                </a:solidFill>
+                <a:latin typeface="微軟正黑體" panose="020B0604030504040204" pitchFamily="34" charset="-120"/>
+                <a:ea typeface="微軟正黑體" panose="020B0604030504040204" pitchFamily="34" charset="-120"/>
+              </a:rPr>
+              <a:t>112111102</a:t>
+            </a:r>
+            <a:r>
+              <a:rPr lang="zh-TW" altLang="en-US" sz="2800" b="1" dirty="0">
+                <a:solidFill>
+                  <a:schemeClr val="bg1"/>
+                </a:solidFill>
+                <a:latin typeface="微軟正黑體" panose="020B0604030504040204" pitchFamily="34" charset="-120"/>
+                <a:ea typeface="微軟正黑體" panose="020B0604030504040204" pitchFamily="34" charset="-120"/>
+              </a:rPr>
+              <a:t> 吳映潔</a:t>
+            </a:r>
           </a:p>
         </p:txBody>
       </p:sp>
@@ -3375,6 +4196,1684 @@
     <p:extLst>
       <p:ext uri="{BB962C8B-B14F-4D97-AF65-F5344CB8AC3E}">
         <p14:creationId xmlns:p14="http://schemas.microsoft.com/office/powerpoint/2010/main" val="1940510760"/>
+      </p:ext>
+    </p:extLst>
+  </p:cSld>
+  <p:clrMapOvr>
+    <a:masterClrMapping/>
+  </p:clrMapOvr>
+</p:sld>
+</file>
+
+<file path=ppt/slides/slide2.xml><?xml version="1.0" encoding="utf-8"?>
+<p:sld xmlns:a="http://schemas.openxmlformats.org/drawingml/2006/main" xmlns:r="http://schemas.openxmlformats.org/officeDocument/2006/relationships" xmlns:p="http://schemas.openxmlformats.org/presentationml/2006/main">
+  <p:cSld>
+    <p:bg>
+      <p:bgPr>
+        <a:solidFill>
+          <a:schemeClr val="tx2">
+            <a:lumMod val="10000"/>
+            <a:lumOff val="90000"/>
+          </a:schemeClr>
+        </a:solidFill>
+        <a:effectLst/>
+      </p:bgPr>
+    </p:bg>
+    <p:spTree>
+      <p:nvGrpSpPr>
+        <p:cNvPr id="1" name="">
+          <a:extLst>
+            <a:ext uri="{FF2B5EF4-FFF2-40B4-BE49-F238E27FC236}">
+              <a16:creationId xmlns:a16="http://schemas.microsoft.com/office/drawing/2014/main" id="{169F402B-BFCB-EA39-B0D0-7288211F8E25}"/>
+            </a:ext>
+          </a:extLst>
+        </p:cNvPr>
+        <p:cNvGrpSpPr/>
+        <p:nvPr/>
+      </p:nvGrpSpPr>
+      <p:grpSpPr>
+        <a:xfrm>
+          <a:off x="0" y="0"/>
+          <a:ext cx="0" cy="0"/>
+          <a:chOff x="0" y="0"/>
+          <a:chExt cx="0" cy="0"/>
+        </a:xfrm>
+      </p:grpSpPr>
+      <p:sp>
+        <p:nvSpPr>
+          <p:cNvPr id="3" name="副標題 2">
+            <a:extLst>
+              <a:ext uri="{FF2B5EF4-FFF2-40B4-BE49-F238E27FC236}">
+                <a16:creationId xmlns:a16="http://schemas.microsoft.com/office/drawing/2014/main" id="{934FCFF7-C164-ED12-F33D-A6B8CB2956A9}"/>
+              </a:ext>
+            </a:extLst>
+          </p:cNvPr>
+          <p:cNvSpPr>
+            <a:spLocks noGrp="1"/>
+          </p:cNvSpPr>
+          <p:nvPr>
+            <p:ph type="subTitle" idx="1"/>
+          </p:nvPr>
+        </p:nvSpPr>
+        <p:spPr>
+          <a:xfrm>
+            <a:off x="2011680" y="2505789"/>
+            <a:ext cx="8168640" cy="1846422"/>
+          </a:xfrm>
+        </p:spPr>
+        <p:txBody>
+          <a:bodyPr>
+            <a:noAutofit/>
+          </a:bodyPr>
+          <a:lstStyle/>
+          <a:p>
+            <a:pPr marL="457200" indent="-457200" algn="l">
+              <a:buFont typeface="Arial" panose="020B0604020202020204" pitchFamily="34" charset="0"/>
+              <a:buChar char="•"/>
+            </a:pPr>
+            <a:r>
+              <a:rPr lang="zh-TW" altLang="en-US" dirty="0">
+                <a:solidFill>
+                  <a:schemeClr val="accent1">
+                    <a:lumMod val="50000"/>
+                  </a:schemeClr>
+                </a:solidFill>
+                <a:latin typeface="微軟正黑體" panose="020B0604030504040204" pitchFamily="34" charset="-120"/>
+                <a:ea typeface="微軟正黑體" panose="020B0604030504040204" pitchFamily="34" charset="-120"/>
+              </a:rPr>
+              <a:t>零售營業額可反映市場消費狀況</a:t>
+            </a:r>
+            <a:endParaRPr lang="en-US" altLang="zh-TW" dirty="0">
+              <a:solidFill>
+                <a:schemeClr val="accent1">
+                  <a:lumMod val="50000"/>
+                </a:schemeClr>
+              </a:solidFill>
+              <a:latin typeface="微軟正黑體" panose="020B0604030504040204" pitchFamily="34" charset="-120"/>
+              <a:ea typeface="微軟正黑體" panose="020B0604030504040204" pitchFamily="34" charset="-120"/>
+            </a:endParaRPr>
+          </a:p>
+          <a:p>
+            <a:pPr marL="457200" indent="-457200" algn="l">
+              <a:buFont typeface="Arial" panose="020B0604020202020204" pitchFamily="34" charset="0"/>
+              <a:buChar char="•"/>
+            </a:pPr>
+            <a:r>
+              <a:rPr lang="en-US" altLang="zh-TW" dirty="0">
+                <a:solidFill>
+                  <a:schemeClr val="accent1">
+                    <a:lumMod val="50000"/>
+                  </a:schemeClr>
+                </a:solidFill>
+                <a:latin typeface="微軟正黑體" panose="020B0604030504040204" pitchFamily="34" charset="-120"/>
+                <a:ea typeface="微軟正黑體" panose="020B0604030504040204" pitchFamily="34" charset="-120"/>
+              </a:rPr>
+              <a:t>CPI </a:t>
+            </a:r>
+            <a:r>
+              <a:rPr lang="zh-TW" altLang="en-US" dirty="0">
+                <a:solidFill>
+                  <a:schemeClr val="accent1">
+                    <a:lumMod val="50000"/>
+                  </a:schemeClr>
+                </a:solidFill>
+                <a:latin typeface="微軟正黑體" panose="020B0604030504040204" pitchFamily="34" charset="-120"/>
+                <a:ea typeface="微軟正黑體" panose="020B0604030504040204" pitchFamily="34" charset="-120"/>
+              </a:rPr>
+              <a:t>代表整體物價變化</a:t>
+            </a:r>
+            <a:endParaRPr lang="en-US" altLang="zh-TW" dirty="0">
+              <a:solidFill>
+                <a:schemeClr val="accent1">
+                  <a:lumMod val="50000"/>
+                </a:schemeClr>
+              </a:solidFill>
+              <a:latin typeface="微軟正黑體" panose="020B0604030504040204" pitchFamily="34" charset="-120"/>
+              <a:ea typeface="微軟正黑體" panose="020B0604030504040204" pitchFamily="34" charset="-120"/>
+            </a:endParaRPr>
+          </a:p>
+          <a:p>
+            <a:pPr marL="457200" indent="-457200" algn="l">
+              <a:buFont typeface="Arial" panose="020B0604020202020204" pitchFamily="34" charset="0"/>
+              <a:buChar char="•"/>
+            </a:pPr>
+            <a:r>
+              <a:rPr lang="zh-TW" altLang="en-US" dirty="0">
+                <a:solidFill>
+                  <a:schemeClr val="accent1">
+                    <a:lumMod val="50000"/>
+                  </a:schemeClr>
+                </a:solidFill>
+                <a:latin typeface="微軟正黑體" panose="020B0604030504040204" pitchFamily="34" charset="-120"/>
+                <a:ea typeface="微軟正黑體" panose="020B0604030504040204" pitchFamily="34" charset="-120"/>
+              </a:rPr>
+              <a:t>傳統報表難以同時分析時間、產業與價格因素</a:t>
+            </a:r>
+            <a:endParaRPr lang="en-US" altLang="zh-TW" dirty="0">
+              <a:solidFill>
+                <a:schemeClr val="accent1">
+                  <a:lumMod val="50000"/>
+                </a:schemeClr>
+              </a:solidFill>
+              <a:latin typeface="微軟正黑體" panose="020B0604030504040204" pitchFamily="34" charset="-120"/>
+              <a:ea typeface="微軟正黑體" panose="020B0604030504040204" pitchFamily="34" charset="-120"/>
+            </a:endParaRPr>
+          </a:p>
+          <a:p>
+            <a:pPr marL="457200" indent="-457200" algn="l">
+              <a:buFont typeface="Arial" panose="020B0604020202020204" pitchFamily="34" charset="0"/>
+              <a:buChar char="•"/>
+            </a:pPr>
+            <a:r>
+              <a:rPr lang="zh-TW" altLang="en-US" dirty="0">
+                <a:solidFill>
+                  <a:schemeClr val="accent1">
+                    <a:lumMod val="50000"/>
+                  </a:schemeClr>
+                </a:solidFill>
+                <a:latin typeface="微軟正黑體" panose="020B0604030504040204" pitchFamily="34" charset="-120"/>
+                <a:ea typeface="微軟正黑體" panose="020B0604030504040204" pitchFamily="34" charset="-120"/>
+              </a:rPr>
+              <a:t>希望透過 </a:t>
+            </a:r>
+            <a:r>
+              <a:rPr lang="en-US" altLang="zh-TW" dirty="0">
+                <a:solidFill>
+                  <a:schemeClr val="accent1">
+                    <a:lumMod val="50000"/>
+                  </a:schemeClr>
+                </a:solidFill>
+                <a:latin typeface="微軟正黑體" panose="020B0604030504040204" pitchFamily="34" charset="-120"/>
+                <a:ea typeface="微軟正黑體" panose="020B0604030504040204" pitchFamily="34" charset="-120"/>
+              </a:rPr>
+              <a:t>Power BI </a:t>
+            </a:r>
+            <a:r>
+              <a:rPr lang="zh-TW" altLang="en-US" dirty="0">
+                <a:solidFill>
+                  <a:schemeClr val="accent1">
+                    <a:lumMod val="50000"/>
+                  </a:schemeClr>
+                </a:solidFill>
+                <a:latin typeface="微軟正黑體" panose="020B0604030504040204" pitchFamily="34" charset="-120"/>
+                <a:ea typeface="微軟正黑體" panose="020B0604030504040204" pitchFamily="34" charset="-120"/>
+              </a:rPr>
+              <a:t>建立互動式儀表板，分析兩者之關聯</a:t>
+            </a:r>
+          </a:p>
+        </p:txBody>
+      </p:sp>
+      <p:sp>
+        <p:nvSpPr>
+          <p:cNvPr id="5" name="標題 4">
+            <a:extLst>
+              <a:ext uri="{FF2B5EF4-FFF2-40B4-BE49-F238E27FC236}">
+                <a16:creationId xmlns:a16="http://schemas.microsoft.com/office/drawing/2014/main" id="{48929D3E-7B81-B6C9-32A0-E1957C4BCB68}"/>
+              </a:ext>
+            </a:extLst>
+          </p:cNvPr>
+          <p:cNvSpPr>
+            <a:spLocks noGrp="1"/>
+          </p:cNvSpPr>
+          <p:nvPr>
+            <p:ph type="ctrTitle"/>
+          </p:nvPr>
+        </p:nvSpPr>
+        <p:spPr>
+          <a:xfrm>
+            <a:off x="538480" y="223521"/>
+            <a:ext cx="11115040" cy="833120"/>
+          </a:xfrm>
+        </p:spPr>
+        <p:txBody>
+          <a:bodyPr>
+            <a:normAutofit/>
+          </a:bodyPr>
+          <a:lstStyle/>
+          <a:p>
+            <a:r>
+              <a:rPr lang="zh-TW" altLang="en-US" sz="4000" b="1" dirty="0">
+                <a:solidFill>
+                  <a:schemeClr val="tx2">
+                    <a:lumMod val="90000"/>
+                    <a:lumOff val="10000"/>
+                  </a:schemeClr>
+                </a:solidFill>
+                <a:latin typeface="微軟正黑體" panose="020B0604030504040204" pitchFamily="34" charset="-120"/>
+                <a:ea typeface="微軟正黑體" panose="020B0604030504040204" pitchFamily="34" charset="-120"/>
+              </a:rPr>
+              <a:t>動機</a:t>
+            </a:r>
+          </a:p>
+        </p:txBody>
+      </p:sp>
+      <p:cxnSp>
+        <p:nvCxnSpPr>
+          <p:cNvPr id="7" name="直線接點 6">
+            <a:extLst>
+              <a:ext uri="{FF2B5EF4-FFF2-40B4-BE49-F238E27FC236}">
+                <a16:creationId xmlns:a16="http://schemas.microsoft.com/office/drawing/2014/main" id="{C12CFC3C-FBB7-BEA8-3F4C-290BA07D3121}"/>
+              </a:ext>
+            </a:extLst>
+          </p:cNvPr>
+          <p:cNvCxnSpPr>
+            <a:cxnSpLocks/>
+          </p:cNvCxnSpPr>
+          <p:nvPr/>
+        </p:nvCxnSpPr>
+        <p:spPr>
+          <a:xfrm>
+            <a:off x="538480" y="1249680"/>
+            <a:ext cx="11115040" cy="0"/>
+          </a:xfrm>
+          <a:prstGeom prst="line">
+            <a:avLst/>
+          </a:prstGeom>
+          <a:ln>
+            <a:solidFill>
+              <a:schemeClr val="accent1">
+                <a:lumMod val="50000"/>
+              </a:schemeClr>
+            </a:solidFill>
+          </a:ln>
+        </p:spPr>
+        <p:style>
+          <a:lnRef idx="3">
+            <a:schemeClr val="accent1"/>
+          </a:lnRef>
+          <a:fillRef idx="0">
+            <a:schemeClr val="accent1"/>
+          </a:fillRef>
+          <a:effectRef idx="2">
+            <a:schemeClr val="accent1"/>
+          </a:effectRef>
+          <a:fontRef idx="minor">
+            <a:schemeClr val="tx1"/>
+          </a:fontRef>
+        </p:style>
+      </p:cxnSp>
+    </p:spTree>
+    <p:extLst>
+      <p:ext uri="{BB962C8B-B14F-4D97-AF65-F5344CB8AC3E}">
+        <p14:creationId xmlns:p14="http://schemas.microsoft.com/office/powerpoint/2010/main" val="1106161668"/>
+      </p:ext>
+    </p:extLst>
+  </p:cSld>
+  <p:clrMapOvr>
+    <a:masterClrMapping/>
+  </p:clrMapOvr>
+</p:sld>
+</file>
+
+<file path=ppt/slides/slide3.xml><?xml version="1.0" encoding="utf-8"?>
+<p:sld xmlns:a="http://schemas.openxmlformats.org/drawingml/2006/main" xmlns:r="http://schemas.openxmlformats.org/officeDocument/2006/relationships" xmlns:p="http://schemas.openxmlformats.org/presentationml/2006/main">
+  <p:cSld>
+    <p:bg>
+      <p:bgPr>
+        <a:solidFill>
+          <a:schemeClr val="tx2">
+            <a:lumMod val="10000"/>
+            <a:lumOff val="90000"/>
+          </a:schemeClr>
+        </a:solidFill>
+        <a:effectLst/>
+      </p:bgPr>
+    </p:bg>
+    <p:spTree>
+      <p:nvGrpSpPr>
+        <p:cNvPr id="1" name="">
+          <a:extLst>
+            <a:ext uri="{FF2B5EF4-FFF2-40B4-BE49-F238E27FC236}">
+              <a16:creationId xmlns:a16="http://schemas.microsoft.com/office/drawing/2014/main" id="{64168EFC-32B3-7289-464F-BFDBE66EA86F}"/>
+            </a:ext>
+          </a:extLst>
+        </p:cNvPr>
+        <p:cNvGrpSpPr/>
+        <p:nvPr/>
+      </p:nvGrpSpPr>
+      <p:grpSpPr>
+        <a:xfrm>
+          <a:off x="0" y="0"/>
+          <a:ext cx="0" cy="0"/>
+          <a:chOff x="0" y="0"/>
+          <a:chExt cx="0" cy="0"/>
+        </a:xfrm>
+      </p:grpSpPr>
+      <p:sp>
+        <p:nvSpPr>
+          <p:cNvPr id="3" name="副標題 2">
+            <a:extLst>
+              <a:ext uri="{FF2B5EF4-FFF2-40B4-BE49-F238E27FC236}">
+                <a16:creationId xmlns:a16="http://schemas.microsoft.com/office/drawing/2014/main" id="{DBC3311F-D211-BAD2-676E-71C9A24ECE27}"/>
+              </a:ext>
+            </a:extLst>
+          </p:cNvPr>
+          <p:cNvSpPr>
+            <a:spLocks noGrp="1"/>
+          </p:cNvSpPr>
+          <p:nvPr>
+            <p:ph type="subTitle" idx="1"/>
+          </p:nvPr>
+        </p:nvSpPr>
+        <p:spPr>
+          <a:xfrm>
+            <a:off x="3317240" y="1644754"/>
+            <a:ext cx="5557520" cy="1387336"/>
+          </a:xfrm>
+        </p:spPr>
+        <p:txBody>
+          <a:bodyPr>
+            <a:noAutofit/>
+          </a:bodyPr>
+          <a:lstStyle/>
+          <a:p>
+            <a:r>
+              <a:rPr lang="zh-TW" altLang="en-US" sz="2800" b="1" dirty="0">
+                <a:solidFill>
+                  <a:schemeClr val="accent1">
+                    <a:lumMod val="50000"/>
+                  </a:schemeClr>
+                </a:solidFill>
+                <a:latin typeface="微軟正黑體" panose="020B0604030504040204" pitchFamily="34" charset="-120"/>
+                <a:ea typeface="微軟正黑體" panose="020B0604030504040204" pitchFamily="34" charset="-120"/>
+              </a:rPr>
+              <a:t>資料與工具</a:t>
+            </a:r>
+          </a:p>
+          <a:p>
+            <a:pPr marL="457200" indent="-457200" algn="l">
+              <a:buFont typeface="Arial" panose="020B0604020202020204" pitchFamily="34" charset="0"/>
+              <a:buChar char="•"/>
+            </a:pPr>
+            <a:r>
+              <a:rPr lang="zh-TW" altLang="en-US" dirty="0">
+                <a:solidFill>
+                  <a:schemeClr val="accent1">
+                    <a:lumMod val="50000"/>
+                  </a:schemeClr>
+                </a:solidFill>
+                <a:latin typeface="微軟正黑體" panose="020B0604030504040204" pitchFamily="34" charset="-120"/>
+                <a:ea typeface="微軟正黑體" panose="020B0604030504040204" pitchFamily="34" charset="-120"/>
+              </a:rPr>
+              <a:t>政府開放資料（經濟部 </a:t>
+            </a:r>
+            <a:r>
+              <a:rPr lang="en-US" altLang="zh-TW" dirty="0">
+                <a:solidFill>
+                  <a:schemeClr val="accent1">
+                    <a:lumMod val="50000"/>
+                  </a:schemeClr>
+                </a:solidFill>
+                <a:latin typeface="微軟正黑體" panose="020B0604030504040204" pitchFamily="34" charset="-120"/>
+                <a:ea typeface="微軟正黑體" panose="020B0604030504040204" pitchFamily="34" charset="-120"/>
+              </a:rPr>
+              <a:t>+ </a:t>
+            </a:r>
+            <a:r>
+              <a:rPr lang="zh-TW" altLang="en-US" dirty="0">
+                <a:solidFill>
+                  <a:schemeClr val="accent1">
+                    <a:lumMod val="50000"/>
+                  </a:schemeClr>
+                </a:solidFill>
+                <a:latin typeface="微軟正黑體" panose="020B0604030504040204" pitchFamily="34" charset="-120"/>
+                <a:ea typeface="微軟正黑體" panose="020B0604030504040204" pitchFamily="34" charset="-120"/>
+              </a:rPr>
+              <a:t>主計總處）</a:t>
+            </a:r>
+            <a:endParaRPr lang="en-US" altLang="zh-TW" dirty="0">
+              <a:solidFill>
+                <a:schemeClr val="accent1">
+                  <a:lumMod val="50000"/>
+                </a:schemeClr>
+              </a:solidFill>
+              <a:latin typeface="微軟正黑體" panose="020B0604030504040204" pitchFamily="34" charset="-120"/>
+              <a:ea typeface="微軟正黑體" panose="020B0604030504040204" pitchFamily="34" charset="-120"/>
+            </a:endParaRPr>
+          </a:p>
+          <a:p>
+            <a:pPr marL="457200" indent="-457200" algn="l">
+              <a:buFont typeface="Arial" panose="020B0604020202020204" pitchFamily="34" charset="0"/>
+              <a:buChar char="•"/>
+            </a:pPr>
+            <a:r>
+              <a:rPr lang="en-US" altLang="zh-TW" dirty="0">
+                <a:solidFill>
+                  <a:schemeClr val="accent1">
+                    <a:lumMod val="50000"/>
+                  </a:schemeClr>
+                </a:solidFill>
+                <a:latin typeface="微軟正黑體" panose="020B0604030504040204" pitchFamily="34" charset="-120"/>
+                <a:ea typeface="微軟正黑體" panose="020B0604030504040204" pitchFamily="34" charset="-120"/>
+              </a:rPr>
+              <a:t>Power BI</a:t>
+            </a:r>
+            <a:endParaRPr lang="zh-TW" altLang="en-US" dirty="0">
+              <a:solidFill>
+                <a:schemeClr val="accent1">
+                  <a:lumMod val="50000"/>
+                </a:schemeClr>
+              </a:solidFill>
+              <a:latin typeface="微軟正黑體" panose="020B0604030504040204" pitchFamily="34" charset="-120"/>
+              <a:ea typeface="微軟正黑體" panose="020B0604030504040204" pitchFamily="34" charset="-120"/>
+            </a:endParaRPr>
+          </a:p>
+        </p:txBody>
+      </p:sp>
+      <p:sp>
+        <p:nvSpPr>
+          <p:cNvPr id="5" name="標題 4">
+            <a:extLst>
+              <a:ext uri="{FF2B5EF4-FFF2-40B4-BE49-F238E27FC236}">
+                <a16:creationId xmlns:a16="http://schemas.microsoft.com/office/drawing/2014/main" id="{19C20DFD-10D3-9A94-59F9-8B5E8EDDF26B}"/>
+              </a:ext>
+            </a:extLst>
+          </p:cNvPr>
+          <p:cNvSpPr>
+            <a:spLocks noGrp="1"/>
+          </p:cNvSpPr>
+          <p:nvPr>
+            <p:ph type="ctrTitle"/>
+          </p:nvPr>
+        </p:nvSpPr>
+        <p:spPr>
+          <a:xfrm>
+            <a:off x="538480" y="243845"/>
+            <a:ext cx="11115040" cy="833120"/>
+          </a:xfrm>
+        </p:spPr>
+        <p:txBody>
+          <a:bodyPr>
+            <a:normAutofit/>
+          </a:bodyPr>
+          <a:lstStyle/>
+          <a:p>
+            <a:r>
+              <a:rPr lang="zh-TW" altLang="en-US" sz="4000" b="1" dirty="0">
+                <a:solidFill>
+                  <a:schemeClr val="tx2">
+                    <a:lumMod val="90000"/>
+                    <a:lumOff val="10000"/>
+                  </a:schemeClr>
+                </a:solidFill>
+                <a:latin typeface="微軟正黑體" panose="020B0604030504040204" pitchFamily="34" charset="-120"/>
+                <a:ea typeface="微軟正黑體" panose="020B0604030504040204" pitchFamily="34" charset="-120"/>
+              </a:rPr>
+              <a:t>研究方法與達成標準</a:t>
+            </a:r>
+          </a:p>
+        </p:txBody>
+      </p:sp>
+      <p:cxnSp>
+        <p:nvCxnSpPr>
+          <p:cNvPr id="7" name="直線接點 6">
+            <a:extLst>
+              <a:ext uri="{FF2B5EF4-FFF2-40B4-BE49-F238E27FC236}">
+                <a16:creationId xmlns:a16="http://schemas.microsoft.com/office/drawing/2014/main" id="{1BFF8266-0591-C63C-461B-F603835BBC51}"/>
+              </a:ext>
+            </a:extLst>
+          </p:cNvPr>
+          <p:cNvCxnSpPr>
+            <a:cxnSpLocks/>
+          </p:cNvCxnSpPr>
+          <p:nvPr/>
+        </p:nvCxnSpPr>
+        <p:spPr>
+          <a:xfrm>
+            <a:off x="538480" y="1249680"/>
+            <a:ext cx="11115040" cy="0"/>
+          </a:xfrm>
+          <a:prstGeom prst="line">
+            <a:avLst/>
+          </a:prstGeom>
+          <a:ln>
+            <a:solidFill>
+              <a:schemeClr val="accent1">
+                <a:lumMod val="50000"/>
+              </a:schemeClr>
+            </a:solidFill>
+          </a:ln>
+        </p:spPr>
+        <p:style>
+          <a:lnRef idx="3">
+            <a:schemeClr val="accent1"/>
+          </a:lnRef>
+          <a:fillRef idx="0">
+            <a:schemeClr val="accent1"/>
+          </a:fillRef>
+          <a:effectRef idx="2">
+            <a:schemeClr val="accent1"/>
+          </a:effectRef>
+          <a:fontRef idx="minor">
+            <a:schemeClr val="tx1"/>
+          </a:fontRef>
+        </p:style>
+      </p:cxnSp>
+      <p:sp>
+        <p:nvSpPr>
+          <p:cNvPr id="6" name="副標題 2">
+            <a:extLst>
+              <a:ext uri="{FF2B5EF4-FFF2-40B4-BE49-F238E27FC236}">
+                <a16:creationId xmlns:a16="http://schemas.microsoft.com/office/drawing/2014/main" id="{FFF0FE57-8B9E-6484-D27B-57638D55EF84}"/>
+              </a:ext>
+            </a:extLst>
+          </p:cNvPr>
+          <p:cNvSpPr txBox="1">
+            <a:spLocks/>
+          </p:cNvSpPr>
+          <p:nvPr/>
+        </p:nvSpPr>
+        <p:spPr>
+          <a:xfrm>
+            <a:off x="1557152" y="3428081"/>
+            <a:ext cx="3520173" cy="2668031"/>
+          </a:xfrm>
+          <a:prstGeom prst="rect">
+            <a:avLst/>
+          </a:prstGeom>
+        </p:spPr>
+        <p:txBody>
+          <a:bodyPr vert="horz" lIns="91440" tIns="45720" rIns="91440" bIns="45720" rtlCol="0">
+            <a:noAutofit/>
+          </a:bodyPr>
+          <a:lstStyle>
+            <a:lvl1pPr marL="0" indent="0" algn="ctr" defTabSz="914400" rtl="0" eaLnBrk="1" latinLnBrk="0" hangingPunct="1">
+              <a:lnSpc>
+                <a:spcPct val="90000"/>
+              </a:lnSpc>
+              <a:spcBef>
+                <a:spcPts val="1000"/>
+              </a:spcBef>
+              <a:buFont typeface="Arial" panose="020B0604020202020204" pitchFamily="34" charset="0"/>
+              <a:buNone/>
+              <a:defRPr sz="2400" kern="1200">
+                <a:solidFill>
+                  <a:schemeClr val="tx1"/>
+                </a:solidFill>
+                <a:latin typeface="+mn-lt"/>
+                <a:ea typeface="+mn-ea"/>
+                <a:cs typeface="+mn-cs"/>
+              </a:defRPr>
+            </a:lvl1pPr>
+            <a:lvl2pPr marL="457200" indent="0" algn="ctr" defTabSz="914400" rtl="0" eaLnBrk="1" latinLnBrk="0" hangingPunct="1">
+              <a:lnSpc>
+                <a:spcPct val="90000"/>
+              </a:lnSpc>
+              <a:spcBef>
+                <a:spcPts val="500"/>
+              </a:spcBef>
+              <a:buFont typeface="Arial" panose="020B0604020202020204" pitchFamily="34" charset="0"/>
+              <a:buNone/>
+              <a:defRPr sz="2000" kern="1200">
+                <a:solidFill>
+                  <a:schemeClr val="tx1"/>
+                </a:solidFill>
+                <a:latin typeface="+mn-lt"/>
+                <a:ea typeface="+mn-ea"/>
+                <a:cs typeface="+mn-cs"/>
+              </a:defRPr>
+            </a:lvl2pPr>
+            <a:lvl3pPr marL="914400" indent="0" algn="ctr" defTabSz="914400" rtl="0" eaLnBrk="1" latinLnBrk="0" hangingPunct="1">
+              <a:lnSpc>
+                <a:spcPct val="90000"/>
+              </a:lnSpc>
+              <a:spcBef>
+                <a:spcPts val="500"/>
+              </a:spcBef>
+              <a:buFont typeface="Arial" panose="020B0604020202020204" pitchFamily="34" charset="0"/>
+              <a:buNone/>
+              <a:defRPr sz="1800" kern="1200">
+                <a:solidFill>
+                  <a:schemeClr val="tx1"/>
+                </a:solidFill>
+                <a:latin typeface="+mn-lt"/>
+                <a:ea typeface="+mn-ea"/>
+                <a:cs typeface="+mn-cs"/>
+              </a:defRPr>
+            </a:lvl3pPr>
+            <a:lvl4pPr marL="1371600" indent="0" algn="ctr" defTabSz="914400" rtl="0" eaLnBrk="1" latinLnBrk="0" hangingPunct="1">
+              <a:lnSpc>
+                <a:spcPct val="90000"/>
+              </a:lnSpc>
+              <a:spcBef>
+                <a:spcPts val="500"/>
+              </a:spcBef>
+              <a:buFont typeface="Arial" panose="020B0604020202020204" pitchFamily="34" charset="0"/>
+              <a:buNone/>
+              <a:defRPr sz="1600" kern="1200">
+                <a:solidFill>
+                  <a:schemeClr val="tx1"/>
+                </a:solidFill>
+                <a:latin typeface="+mn-lt"/>
+                <a:ea typeface="+mn-ea"/>
+                <a:cs typeface="+mn-cs"/>
+              </a:defRPr>
+            </a:lvl4pPr>
+            <a:lvl5pPr marL="1828800" indent="0" algn="ctr" defTabSz="914400" rtl="0" eaLnBrk="1" latinLnBrk="0" hangingPunct="1">
+              <a:lnSpc>
+                <a:spcPct val="90000"/>
+              </a:lnSpc>
+              <a:spcBef>
+                <a:spcPts val="500"/>
+              </a:spcBef>
+              <a:buFont typeface="Arial" panose="020B0604020202020204" pitchFamily="34" charset="0"/>
+              <a:buNone/>
+              <a:defRPr sz="1600" kern="1200">
+                <a:solidFill>
+                  <a:schemeClr val="tx1"/>
+                </a:solidFill>
+                <a:latin typeface="+mn-lt"/>
+                <a:ea typeface="+mn-ea"/>
+                <a:cs typeface="+mn-cs"/>
+              </a:defRPr>
+            </a:lvl5pPr>
+            <a:lvl6pPr marL="2286000" indent="0" algn="ctr" defTabSz="914400" rtl="0" eaLnBrk="1" latinLnBrk="0" hangingPunct="1">
+              <a:lnSpc>
+                <a:spcPct val="90000"/>
+              </a:lnSpc>
+              <a:spcBef>
+                <a:spcPts val="500"/>
+              </a:spcBef>
+              <a:buFont typeface="Arial" panose="020B0604020202020204" pitchFamily="34" charset="0"/>
+              <a:buNone/>
+              <a:defRPr sz="1600" kern="1200">
+                <a:solidFill>
+                  <a:schemeClr val="tx1"/>
+                </a:solidFill>
+                <a:latin typeface="+mn-lt"/>
+                <a:ea typeface="+mn-ea"/>
+                <a:cs typeface="+mn-cs"/>
+              </a:defRPr>
+            </a:lvl6pPr>
+            <a:lvl7pPr marL="2743200" indent="0" algn="ctr" defTabSz="914400" rtl="0" eaLnBrk="1" latinLnBrk="0" hangingPunct="1">
+              <a:lnSpc>
+                <a:spcPct val="90000"/>
+              </a:lnSpc>
+              <a:spcBef>
+                <a:spcPts val="500"/>
+              </a:spcBef>
+              <a:buFont typeface="Arial" panose="020B0604020202020204" pitchFamily="34" charset="0"/>
+              <a:buNone/>
+              <a:defRPr sz="1600" kern="1200">
+                <a:solidFill>
+                  <a:schemeClr val="tx1"/>
+                </a:solidFill>
+                <a:latin typeface="+mn-lt"/>
+                <a:ea typeface="+mn-ea"/>
+                <a:cs typeface="+mn-cs"/>
+              </a:defRPr>
+            </a:lvl7pPr>
+            <a:lvl8pPr marL="3200400" indent="0" algn="ctr" defTabSz="914400" rtl="0" eaLnBrk="1" latinLnBrk="0" hangingPunct="1">
+              <a:lnSpc>
+                <a:spcPct val="90000"/>
+              </a:lnSpc>
+              <a:spcBef>
+                <a:spcPts val="500"/>
+              </a:spcBef>
+              <a:buFont typeface="Arial" panose="020B0604020202020204" pitchFamily="34" charset="0"/>
+              <a:buNone/>
+              <a:defRPr sz="1600" kern="1200">
+                <a:solidFill>
+                  <a:schemeClr val="tx1"/>
+                </a:solidFill>
+                <a:latin typeface="+mn-lt"/>
+                <a:ea typeface="+mn-ea"/>
+                <a:cs typeface="+mn-cs"/>
+              </a:defRPr>
+            </a:lvl8pPr>
+            <a:lvl9pPr marL="3657600" indent="0" algn="ctr" defTabSz="914400" rtl="0" eaLnBrk="1" latinLnBrk="0" hangingPunct="1">
+              <a:lnSpc>
+                <a:spcPct val="90000"/>
+              </a:lnSpc>
+              <a:spcBef>
+                <a:spcPts val="500"/>
+              </a:spcBef>
+              <a:buFont typeface="Arial" panose="020B0604020202020204" pitchFamily="34" charset="0"/>
+              <a:buNone/>
+              <a:defRPr sz="1600" kern="1200">
+                <a:solidFill>
+                  <a:schemeClr val="tx1"/>
+                </a:solidFill>
+                <a:latin typeface="+mn-lt"/>
+                <a:ea typeface="+mn-ea"/>
+                <a:cs typeface="+mn-cs"/>
+              </a:defRPr>
+            </a:lvl9pPr>
+          </a:lstStyle>
+          <a:p>
+            <a:r>
+              <a:rPr lang="zh-TW" altLang="en-US" sz="2800" b="1" dirty="0">
+                <a:solidFill>
+                  <a:schemeClr val="accent1">
+                    <a:lumMod val="50000"/>
+                  </a:schemeClr>
+                </a:solidFill>
+                <a:latin typeface="微軟正黑體" panose="020B0604030504040204" pitchFamily="34" charset="-120"/>
+                <a:ea typeface="微軟正黑體" panose="020B0604030504040204" pitchFamily="34" charset="-120"/>
+              </a:rPr>
+              <a:t>分析方法</a:t>
+            </a:r>
+            <a:endParaRPr lang="en-US" altLang="zh-TW" sz="2800" dirty="0">
+              <a:solidFill>
+                <a:schemeClr val="accent1">
+                  <a:lumMod val="50000"/>
+                </a:schemeClr>
+              </a:solidFill>
+              <a:latin typeface="微軟正黑體" panose="020B0604030504040204" pitchFamily="34" charset="-120"/>
+              <a:ea typeface="微軟正黑體" panose="020B0604030504040204" pitchFamily="34" charset="-120"/>
+            </a:endParaRPr>
+          </a:p>
+          <a:p>
+            <a:pPr marL="457200" indent="-457200" algn="l">
+              <a:buFont typeface="Arial" panose="020B0604020202020204" pitchFamily="34" charset="0"/>
+              <a:buChar char="•"/>
+            </a:pPr>
+            <a:r>
+              <a:rPr lang="zh-TW" altLang="en-US" dirty="0">
+                <a:solidFill>
+                  <a:schemeClr val="accent1">
+                    <a:lumMod val="50000"/>
+                  </a:schemeClr>
+                </a:solidFill>
+                <a:latin typeface="微軟正黑體" panose="020B0604030504040204" pitchFamily="34" charset="-120"/>
+                <a:ea typeface="微軟正黑體" panose="020B0604030504040204" pitchFamily="34" charset="-120"/>
+              </a:rPr>
+              <a:t>時序分析</a:t>
+            </a:r>
+            <a:endParaRPr lang="en-US" altLang="zh-TW" dirty="0">
+              <a:solidFill>
+                <a:schemeClr val="accent1">
+                  <a:lumMod val="50000"/>
+                </a:schemeClr>
+              </a:solidFill>
+              <a:latin typeface="微軟正黑體" panose="020B0604030504040204" pitchFamily="34" charset="-120"/>
+              <a:ea typeface="微軟正黑體" panose="020B0604030504040204" pitchFamily="34" charset="-120"/>
+            </a:endParaRPr>
+          </a:p>
+          <a:p>
+            <a:pPr marL="457200" indent="-457200" algn="l">
+              <a:buFont typeface="Arial" panose="020B0604020202020204" pitchFamily="34" charset="0"/>
+              <a:buChar char="•"/>
+            </a:pPr>
+            <a:r>
+              <a:rPr lang="en-US" altLang="zh-TW" dirty="0">
+                <a:solidFill>
+                  <a:schemeClr val="accent1">
+                    <a:lumMod val="50000"/>
+                  </a:schemeClr>
+                </a:solidFill>
+                <a:latin typeface="微軟正黑體" panose="020B0604030504040204" pitchFamily="34" charset="-120"/>
+                <a:ea typeface="微軟正黑體" panose="020B0604030504040204" pitchFamily="34" charset="-120"/>
+              </a:rPr>
+              <a:t>Pearson </a:t>
+            </a:r>
+            <a:r>
+              <a:rPr lang="zh-TW" altLang="en-US" dirty="0">
+                <a:solidFill>
+                  <a:schemeClr val="accent1">
+                    <a:lumMod val="50000"/>
+                  </a:schemeClr>
+                </a:solidFill>
+                <a:latin typeface="微軟正黑體" panose="020B0604030504040204" pitchFamily="34" charset="-120"/>
+                <a:ea typeface="微軟正黑體" panose="020B0604030504040204" pitchFamily="34" charset="-120"/>
+              </a:rPr>
+              <a:t>相關係數</a:t>
+            </a:r>
+            <a:endParaRPr lang="en-US" altLang="zh-TW" dirty="0">
+              <a:solidFill>
+                <a:schemeClr val="accent1">
+                  <a:lumMod val="50000"/>
+                </a:schemeClr>
+              </a:solidFill>
+              <a:latin typeface="微軟正黑體" panose="020B0604030504040204" pitchFamily="34" charset="-120"/>
+              <a:ea typeface="微軟正黑體" panose="020B0604030504040204" pitchFamily="34" charset="-120"/>
+            </a:endParaRPr>
+          </a:p>
+          <a:p>
+            <a:pPr marL="457200" indent="-457200" algn="l">
+              <a:buFont typeface="Arial" panose="020B0604020202020204" pitchFamily="34" charset="0"/>
+              <a:buChar char="•"/>
+            </a:pPr>
+            <a:r>
+              <a:rPr lang="en-US" altLang="zh-TW" dirty="0">
+                <a:solidFill>
+                  <a:schemeClr val="accent1">
+                    <a:lumMod val="50000"/>
+                  </a:schemeClr>
+                </a:solidFill>
+                <a:latin typeface="微軟正黑體" panose="020B0604030504040204" pitchFamily="34" charset="-120"/>
+                <a:ea typeface="微軟正黑體" panose="020B0604030504040204" pitchFamily="34" charset="-120"/>
+              </a:rPr>
+              <a:t>YoY </a:t>
+            </a:r>
+            <a:r>
+              <a:rPr lang="zh-TW" altLang="en-US" dirty="0">
+                <a:solidFill>
+                  <a:schemeClr val="accent1">
+                    <a:lumMod val="50000"/>
+                  </a:schemeClr>
+                </a:solidFill>
+                <a:latin typeface="微軟正黑體" panose="020B0604030504040204" pitchFamily="34" charset="-120"/>
+                <a:ea typeface="微軟正黑體" panose="020B0604030504040204" pitchFamily="34" charset="-120"/>
+              </a:rPr>
+              <a:t>年增率</a:t>
+            </a:r>
+            <a:endParaRPr lang="en-US" altLang="zh-TW" dirty="0">
+              <a:solidFill>
+                <a:schemeClr val="accent1">
+                  <a:lumMod val="50000"/>
+                </a:schemeClr>
+              </a:solidFill>
+              <a:latin typeface="微軟正黑體" panose="020B0604030504040204" pitchFamily="34" charset="-120"/>
+              <a:ea typeface="微軟正黑體" panose="020B0604030504040204" pitchFamily="34" charset="-120"/>
+            </a:endParaRPr>
+          </a:p>
+          <a:p>
+            <a:pPr marL="457200" indent="-457200" algn="l">
+              <a:buFont typeface="Arial" panose="020B0604020202020204" pitchFamily="34" charset="0"/>
+              <a:buChar char="•"/>
+            </a:pPr>
+            <a:r>
+              <a:rPr lang="en-US" altLang="zh-TW" dirty="0">
+                <a:solidFill>
+                  <a:schemeClr val="accent1">
+                    <a:lumMod val="50000"/>
+                  </a:schemeClr>
+                </a:solidFill>
+                <a:latin typeface="微軟正黑體" panose="020B0604030504040204" pitchFamily="34" charset="-120"/>
+                <a:ea typeface="微軟正黑體" panose="020B0604030504040204" pitchFamily="34" charset="-120"/>
+              </a:rPr>
+              <a:t>CPI </a:t>
+            </a:r>
+            <a:r>
+              <a:rPr lang="zh-TW" altLang="en-US" dirty="0">
+                <a:solidFill>
+                  <a:schemeClr val="accent1">
+                    <a:lumMod val="50000"/>
+                  </a:schemeClr>
+                </a:solidFill>
+                <a:latin typeface="微軟正黑體" panose="020B0604030504040204" pitchFamily="34" charset="-120"/>
+                <a:ea typeface="微軟正黑體" panose="020B0604030504040204" pitchFamily="34" charset="-120"/>
+              </a:rPr>
+              <a:t>實質化修正</a:t>
+            </a:r>
+            <a:endParaRPr lang="en-US" altLang="zh-TW" dirty="0">
+              <a:solidFill>
+                <a:schemeClr val="accent1">
+                  <a:lumMod val="50000"/>
+                </a:schemeClr>
+              </a:solidFill>
+              <a:latin typeface="微軟正黑體" panose="020B0604030504040204" pitchFamily="34" charset="-120"/>
+              <a:ea typeface="微軟正黑體" panose="020B0604030504040204" pitchFamily="34" charset="-120"/>
+            </a:endParaRPr>
+          </a:p>
+          <a:p>
+            <a:pPr marL="457200" indent="-457200" algn="l">
+              <a:buFont typeface="Arial" panose="020B0604020202020204" pitchFamily="34" charset="0"/>
+              <a:buChar char="•"/>
+            </a:pPr>
+            <a:r>
+              <a:rPr lang="zh-TW" altLang="en-US" dirty="0">
+                <a:solidFill>
+                  <a:schemeClr val="accent1">
+                    <a:lumMod val="50000"/>
+                  </a:schemeClr>
+                </a:solidFill>
+                <a:latin typeface="微軟正黑體" panose="020B0604030504040204" pitchFamily="34" charset="-120"/>
+                <a:ea typeface="微軟正黑體" panose="020B0604030504040204" pitchFamily="34" charset="-120"/>
+              </a:rPr>
+              <a:t>時間序列預測</a:t>
+            </a:r>
+          </a:p>
+        </p:txBody>
+      </p:sp>
+      <p:sp>
+        <p:nvSpPr>
+          <p:cNvPr id="8" name="副標題 2">
+            <a:extLst>
+              <a:ext uri="{FF2B5EF4-FFF2-40B4-BE49-F238E27FC236}">
+                <a16:creationId xmlns:a16="http://schemas.microsoft.com/office/drawing/2014/main" id="{6D85E43B-1BF6-73A9-F7A5-14C2071FC9AD}"/>
+              </a:ext>
+            </a:extLst>
+          </p:cNvPr>
+          <p:cNvSpPr txBox="1">
+            <a:spLocks/>
+          </p:cNvSpPr>
+          <p:nvPr/>
+        </p:nvSpPr>
+        <p:spPr>
+          <a:xfrm>
+            <a:off x="7114673" y="3429000"/>
+            <a:ext cx="4169022" cy="2848205"/>
+          </a:xfrm>
+          <a:prstGeom prst="rect">
+            <a:avLst/>
+          </a:prstGeom>
+        </p:spPr>
+        <p:txBody>
+          <a:bodyPr vert="horz" lIns="91440" tIns="45720" rIns="91440" bIns="45720" rtlCol="0">
+            <a:noAutofit/>
+          </a:bodyPr>
+          <a:lstStyle>
+            <a:lvl1pPr marL="0" indent="0" algn="ctr" defTabSz="914400" rtl="0" eaLnBrk="1" latinLnBrk="0" hangingPunct="1">
+              <a:lnSpc>
+                <a:spcPct val="90000"/>
+              </a:lnSpc>
+              <a:spcBef>
+                <a:spcPts val="1000"/>
+              </a:spcBef>
+              <a:buFont typeface="Arial" panose="020B0604020202020204" pitchFamily="34" charset="0"/>
+              <a:buNone/>
+              <a:defRPr sz="2400" kern="1200">
+                <a:solidFill>
+                  <a:schemeClr val="tx1"/>
+                </a:solidFill>
+                <a:latin typeface="+mn-lt"/>
+                <a:ea typeface="+mn-ea"/>
+                <a:cs typeface="+mn-cs"/>
+              </a:defRPr>
+            </a:lvl1pPr>
+            <a:lvl2pPr marL="457200" indent="0" algn="ctr" defTabSz="914400" rtl="0" eaLnBrk="1" latinLnBrk="0" hangingPunct="1">
+              <a:lnSpc>
+                <a:spcPct val="90000"/>
+              </a:lnSpc>
+              <a:spcBef>
+                <a:spcPts val="500"/>
+              </a:spcBef>
+              <a:buFont typeface="Arial" panose="020B0604020202020204" pitchFamily="34" charset="0"/>
+              <a:buNone/>
+              <a:defRPr sz="2000" kern="1200">
+                <a:solidFill>
+                  <a:schemeClr val="tx1"/>
+                </a:solidFill>
+                <a:latin typeface="+mn-lt"/>
+                <a:ea typeface="+mn-ea"/>
+                <a:cs typeface="+mn-cs"/>
+              </a:defRPr>
+            </a:lvl2pPr>
+            <a:lvl3pPr marL="914400" indent="0" algn="ctr" defTabSz="914400" rtl="0" eaLnBrk="1" latinLnBrk="0" hangingPunct="1">
+              <a:lnSpc>
+                <a:spcPct val="90000"/>
+              </a:lnSpc>
+              <a:spcBef>
+                <a:spcPts val="500"/>
+              </a:spcBef>
+              <a:buFont typeface="Arial" panose="020B0604020202020204" pitchFamily="34" charset="0"/>
+              <a:buNone/>
+              <a:defRPr sz="1800" kern="1200">
+                <a:solidFill>
+                  <a:schemeClr val="tx1"/>
+                </a:solidFill>
+                <a:latin typeface="+mn-lt"/>
+                <a:ea typeface="+mn-ea"/>
+                <a:cs typeface="+mn-cs"/>
+              </a:defRPr>
+            </a:lvl3pPr>
+            <a:lvl4pPr marL="1371600" indent="0" algn="ctr" defTabSz="914400" rtl="0" eaLnBrk="1" latinLnBrk="0" hangingPunct="1">
+              <a:lnSpc>
+                <a:spcPct val="90000"/>
+              </a:lnSpc>
+              <a:spcBef>
+                <a:spcPts val="500"/>
+              </a:spcBef>
+              <a:buFont typeface="Arial" panose="020B0604020202020204" pitchFamily="34" charset="0"/>
+              <a:buNone/>
+              <a:defRPr sz="1600" kern="1200">
+                <a:solidFill>
+                  <a:schemeClr val="tx1"/>
+                </a:solidFill>
+                <a:latin typeface="+mn-lt"/>
+                <a:ea typeface="+mn-ea"/>
+                <a:cs typeface="+mn-cs"/>
+              </a:defRPr>
+            </a:lvl4pPr>
+            <a:lvl5pPr marL="1828800" indent="0" algn="ctr" defTabSz="914400" rtl="0" eaLnBrk="1" latinLnBrk="0" hangingPunct="1">
+              <a:lnSpc>
+                <a:spcPct val="90000"/>
+              </a:lnSpc>
+              <a:spcBef>
+                <a:spcPts val="500"/>
+              </a:spcBef>
+              <a:buFont typeface="Arial" panose="020B0604020202020204" pitchFamily="34" charset="0"/>
+              <a:buNone/>
+              <a:defRPr sz="1600" kern="1200">
+                <a:solidFill>
+                  <a:schemeClr val="tx1"/>
+                </a:solidFill>
+                <a:latin typeface="+mn-lt"/>
+                <a:ea typeface="+mn-ea"/>
+                <a:cs typeface="+mn-cs"/>
+              </a:defRPr>
+            </a:lvl5pPr>
+            <a:lvl6pPr marL="2286000" indent="0" algn="ctr" defTabSz="914400" rtl="0" eaLnBrk="1" latinLnBrk="0" hangingPunct="1">
+              <a:lnSpc>
+                <a:spcPct val="90000"/>
+              </a:lnSpc>
+              <a:spcBef>
+                <a:spcPts val="500"/>
+              </a:spcBef>
+              <a:buFont typeface="Arial" panose="020B0604020202020204" pitchFamily="34" charset="0"/>
+              <a:buNone/>
+              <a:defRPr sz="1600" kern="1200">
+                <a:solidFill>
+                  <a:schemeClr val="tx1"/>
+                </a:solidFill>
+                <a:latin typeface="+mn-lt"/>
+                <a:ea typeface="+mn-ea"/>
+                <a:cs typeface="+mn-cs"/>
+              </a:defRPr>
+            </a:lvl6pPr>
+            <a:lvl7pPr marL="2743200" indent="0" algn="ctr" defTabSz="914400" rtl="0" eaLnBrk="1" latinLnBrk="0" hangingPunct="1">
+              <a:lnSpc>
+                <a:spcPct val="90000"/>
+              </a:lnSpc>
+              <a:spcBef>
+                <a:spcPts val="500"/>
+              </a:spcBef>
+              <a:buFont typeface="Arial" panose="020B0604020202020204" pitchFamily="34" charset="0"/>
+              <a:buNone/>
+              <a:defRPr sz="1600" kern="1200">
+                <a:solidFill>
+                  <a:schemeClr val="tx1"/>
+                </a:solidFill>
+                <a:latin typeface="+mn-lt"/>
+                <a:ea typeface="+mn-ea"/>
+                <a:cs typeface="+mn-cs"/>
+              </a:defRPr>
+            </a:lvl7pPr>
+            <a:lvl8pPr marL="3200400" indent="0" algn="ctr" defTabSz="914400" rtl="0" eaLnBrk="1" latinLnBrk="0" hangingPunct="1">
+              <a:lnSpc>
+                <a:spcPct val="90000"/>
+              </a:lnSpc>
+              <a:spcBef>
+                <a:spcPts val="500"/>
+              </a:spcBef>
+              <a:buFont typeface="Arial" panose="020B0604020202020204" pitchFamily="34" charset="0"/>
+              <a:buNone/>
+              <a:defRPr sz="1600" kern="1200">
+                <a:solidFill>
+                  <a:schemeClr val="tx1"/>
+                </a:solidFill>
+                <a:latin typeface="+mn-lt"/>
+                <a:ea typeface="+mn-ea"/>
+                <a:cs typeface="+mn-cs"/>
+              </a:defRPr>
+            </a:lvl8pPr>
+            <a:lvl9pPr marL="3657600" indent="0" algn="ctr" defTabSz="914400" rtl="0" eaLnBrk="1" latinLnBrk="0" hangingPunct="1">
+              <a:lnSpc>
+                <a:spcPct val="90000"/>
+              </a:lnSpc>
+              <a:spcBef>
+                <a:spcPts val="500"/>
+              </a:spcBef>
+              <a:buFont typeface="Arial" panose="020B0604020202020204" pitchFamily="34" charset="0"/>
+              <a:buNone/>
+              <a:defRPr sz="1600" kern="1200">
+                <a:solidFill>
+                  <a:schemeClr val="tx1"/>
+                </a:solidFill>
+                <a:latin typeface="+mn-lt"/>
+                <a:ea typeface="+mn-ea"/>
+                <a:cs typeface="+mn-cs"/>
+              </a:defRPr>
+            </a:lvl9pPr>
+          </a:lstStyle>
+          <a:p>
+            <a:r>
+              <a:rPr lang="zh-TW" altLang="en-US" sz="2800" b="1" dirty="0">
+                <a:solidFill>
+                  <a:schemeClr val="accent1">
+                    <a:lumMod val="50000"/>
+                  </a:schemeClr>
+                </a:solidFill>
+                <a:latin typeface="微軟正黑體" panose="020B0604030504040204" pitchFamily="34" charset="-120"/>
+                <a:ea typeface="微軟正黑體" panose="020B0604030504040204" pitchFamily="34" charset="-120"/>
+              </a:rPr>
+              <a:t>達成成果</a:t>
+            </a:r>
+            <a:endParaRPr lang="en-US" altLang="zh-TW" sz="2800" b="1" dirty="0">
+              <a:solidFill>
+                <a:schemeClr val="accent1">
+                  <a:lumMod val="50000"/>
+                </a:schemeClr>
+              </a:solidFill>
+              <a:latin typeface="微軟正黑體" panose="020B0604030504040204" pitchFamily="34" charset="-120"/>
+              <a:ea typeface="微軟正黑體" panose="020B0604030504040204" pitchFamily="34" charset="-120"/>
+            </a:endParaRPr>
+          </a:p>
+          <a:p>
+            <a:pPr marL="457200" indent="-457200" algn="l">
+              <a:buFont typeface="Arial" panose="020B0604020202020204" pitchFamily="34" charset="0"/>
+              <a:buChar char="•"/>
+            </a:pPr>
+            <a:r>
+              <a:rPr lang="zh-TW" altLang="en-US" dirty="0">
+                <a:solidFill>
+                  <a:schemeClr val="accent1">
+                    <a:lumMod val="50000"/>
+                  </a:schemeClr>
+                </a:solidFill>
+                <a:latin typeface="微軟正黑體" panose="020B0604030504040204" pitchFamily="34" charset="-120"/>
+                <a:ea typeface="微軟正黑體" panose="020B0604030504040204" pitchFamily="34" charset="-120"/>
+              </a:rPr>
+              <a:t>建立互動式 </a:t>
+            </a:r>
+            <a:r>
+              <a:rPr lang="en-US" altLang="zh-TW" dirty="0">
+                <a:solidFill>
+                  <a:schemeClr val="accent1">
+                    <a:lumMod val="50000"/>
+                  </a:schemeClr>
+                </a:solidFill>
+                <a:latin typeface="微軟正黑體" panose="020B0604030504040204" pitchFamily="34" charset="-120"/>
+                <a:ea typeface="微軟正黑體" panose="020B0604030504040204" pitchFamily="34" charset="-120"/>
+              </a:rPr>
+              <a:t>BI </a:t>
+            </a:r>
+            <a:r>
+              <a:rPr lang="zh-TW" altLang="en-US" dirty="0">
+                <a:solidFill>
+                  <a:schemeClr val="accent1">
+                    <a:lumMod val="50000"/>
+                  </a:schemeClr>
+                </a:solidFill>
+                <a:latin typeface="微軟正黑體" panose="020B0604030504040204" pitchFamily="34" charset="-120"/>
+                <a:ea typeface="微軟正黑體" panose="020B0604030504040204" pitchFamily="34" charset="-120"/>
+              </a:rPr>
+              <a:t>儀表板</a:t>
+            </a:r>
+            <a:endParaRPr lang="en-US" altLang="zh-TW" dirty="0">
+              <a:solidFill>
+                <a:schemeClr val="accent1">
+                  <a:lumMod val="50000"/>
+                </a:schemeClr>
+              </a:solidFill>
+              <a:latin typeface="微軟正黑體" panose="020B0604030504040204" pitchFamily="34" charset="-120"/>
+              <a:ea typeface="微軟正黑體" panose="020B0604030504040204" pitchFamily="34" charset="-120"/>
+            </a:endParaRPr>
+          </a:p>
+          <a:p>
+            <a:pPr marL="457200" indent="-457200" algn="l">
+              <a:buFont typeface="Arial" panose="020B0604020202020204" pitchFamily="34" charset="0"/>
+              <a:buChar char="•"/>
+            </a:pPr>
+            <a:r>
+              <a:rPr lang="en-US" altLang="zh-TW" dirty="0">
+                <a:solidFill>
+                  <a:schemeClr val="accent1">
+                    <a:lumMod val="50000"/>
+                  </a:schemeClr>
+                </a:solidFill>
+                <a:latin typeface="微軟正黑體" panose="020B0604030504040204" pitchFamily="34" charset="-120"/>
+                <a:ea typeface="微軟正黑體" panose="020B0604030504040204" pitchFamily="34" charset="-120"/>
+              </a:rPr>
+              <a:t>CPI </a:t>
+            </a:r>
+            <a:r>
+              <a:rPr lang="zh-TW" altLang="en-US" dirty="0">
+                <a:solidFill>
+                  <a:schemeClr val="accent1">
+                    <a:lumMod val="50000"/>
+                  </a:schemeClr>
+                </a:solidFill>
+                <a:latin typeface="微軟正黑體" panose="020B0604030504040204" pitchFamily="34" charset="-120"/>
+                <a:ea typeface="微軟正黑體" panose="020B0604030504040204" pitchFamily="34" charset="-120"/>
+              </a:rPr>
+              <a:t>與零售指數關聯分析</a:t>
+            </a:r>
+            <a:endParaRPr lang="en-US" altLang="zh-TW" dirty="0">
+              <a:solidFill>
+                <a:schemeClr val="accent1">
+                  <a:lumMod val="50000"/>
+                </a:schemeClr>
+              </a:solidFill>
+              <a:latin typeface="微軟正黑體" panose="020B0604030504040204" pitchFamily="34" charset="-120"/>
+              <a:ea typeface="微軟正黑體" panose="020B0604030504040204" pitchFamily="34" charset="-120"/>
+            </a:endParaRPr>
+          </a:p>
+          <a:p>
+            <a:pPr marL="457200" indent="-457200" algn="l">
+              <a:buFont typeface="Arial" panose="020B0604020202020204" pitchFamily="34" charset="0"/>
+              <a:buChar char="•"/>
+            </a:pPr>
+            <a:r>
+              <a:rPr lang="zh-TW" altLang="en-US" dirty="0">
+                <a:solidFill>
+                  <a:schemeClr val="accent1">
+                    <a:lumMod val="50000"/>
+                  </a:schemeClr>
+                </a:solidFill>
+                <a:latin typeface="微軟正黑體" panose="020B0604030504040204" pitchFamily="34" charset="-120"/>
+                <a:ea typeface="微軟正黑體" panose="020B0604030504040204" pitchFamily="34" charset="-120"/>
+              </a:rPr>
+              <a:t>各零售通路比較</a:t>
+            </a:r>
+            <a:endParaRPr lang="en-US" altLang="zh-TW" dirty="0">
+              <a:solidFill>
+                <a:schemeClr val="accent1">
+                  <a:lumMod val="50000"/>
+                </a:schemeClr>
+              </a:solidFill>
+              <a:latin typeface="微軟正黑體" panose="020B0604030504040204" pitchFamily="34" charset="-120"/>
+              <a:ea typeface="微軟正黑體" panose="020B0604030504040204" pitchFamily="34" charset="-120"/>
+            </a:endParaRPr>
+          </a:p>
+          <a:p>
+            <a:pPr marL="457200" indent="-457200" algn="l">
+              <a:buFont typeface="Arial" panose="020B0604020202020204" pitchFamily="34" charset="0"/>
+              <a:buChar char="•"/>
+            </a:pPr>
+            <a:r>
+              <a:rPr lang="zh-TW" altLang="en-US" dirty="0">
+                <a:solidFill>
+                  <a:schemeClr val="accent1">
+                    <a:lumMod val="50000"/>
+                  </a:schemeClr>
+                </a:solidFill>
+                <a:latin typeface="微軟正黑體" panose="020B0604030504040204" pitchFamily="34" charset="-120"/>
+                <a:ea typeface="微軟正黑體" panose="020B0604030504040204" pitchFamily="34" charset="-120"/>
+              </a:rPr>
+              <a:t>實質 </a:t>
+            </a:r>
+            <a:r>
+              <a:rPr lang="en-US" altLang="zh-TW" dirty="0">
+                <a:solidFill>
+                  <a:schemeClr val="accent1">
+                    <a:lumMod val="50000"/>
+                  </a:schemeClr>
+                </a:solidFill>
+                <a:latin typeface="微軟正黑體" panose="020B0604030504040204" pitchFamily="34" charset="-120"/>
+                <a:ea typeface="微軟正黑體" panose="020B0604030504040204" pitchFamily="34" charset="-120"/>
+              </a:rPr>
+              <a:t>vs </a:t>
+            </a:r>
+            <a:r>
+              <a:rPr lang="zh-TW" altLang="en-US" dirty="0">
+                <a:solidFill>
+                  <a:schemeClr val="accent1">
+                    <a:lumMod val="50000"/>
+                  </a:schemeClr>
+                </a:solidFill>
+                <a:latin typeface="微軟正黑體" panose="020B0604030504040204" pitchFamily="34" charset="-120"/>
+                <a:ea typeface="微軟正黑體" panose="020B0604030504040204" pitchFamily="34" charset="-120"/>
+              </a:rPr>
+              <a:t>名目營業額比較</a:t>
+            </a:r>
+            <a:endParaRPr lang="en-US" altLang="zh-TW" dirty="0">
+              <a:solidFill>
+                <a:schemeClr val="accent1">
+                  <a:lumMod val="50000"/>
+                </a:schemeClr>
+              </a:solidFill>
+              <a:latin typeface="微軟正黑體" panose="020B0604030504040204" pitchFamily="34" charset="-120"/>
+              <a:ea typeface="微軟正黑體" panose="020B0604030504040204" pitchFamily="34" charset="-120"/>
+            </a:endParaRPr>
+          </a:p>
+          <a:p>
+            <a:pPr marL="457200" indent="-457200" algn="l">
+              <a:buFont typeface="Arial" panose="020B0604020202020204" pitchFamily="34" charset="0"/>
+              <a:buChar char="•"/>
+            </a:pPr>
+            <a:r>
+              <a:rPr lang="zh-TW" altLang="en-US" dirty="0">
+                <a:solidFill>
+                  <a:schemeClr val="accent1">
+                    <a:lumMod val="50000"/>
+                  </a:schemeClr>
+                </a:solidFill>
+                <a:latin typeface="微軟正黑體" panose="020B0604030504040204" pitchFamily="34" charset="-120"/>
+                <a:ea typeface="微軟正黑體" panose="020B0604030504040204" pitchFamily="34" charset="-120"/>
+              </a:rPr>
+              <a:t>趨勢預測模型</a:t>
+            </a:r>
+          </a:p>
+        </p:txBody>
+      </p:sp>
+    </p:spTree>
+    <p:extLst>
+      <p:ext uri="{BB962C8B-B14F-4D97-AF65-F5344CB8AC3E}">
+        <p14:creationId xmlns:p14="http://schemas.microsoft.com/office/powerpoint/2010/main" val="663800678"/>
+      </p:ext>
+    </p:extLst>
+  </p:cSld>
+  <p:clrMapOvr>
+    <a:masterClrMapping/>
+  </p:clrMapOvr>
+</p:sld>
+</file>
+
+<file path=ppt/slides/slide4.xml><?xml version="1.0" encoding="utf-8"?>
+<p:sld xmlns:a="http://schemas.openxmlformats.org/drawingml/2006/main" xmlns:r="http://schemas.openxmlformats.org/officeDocument/2006/relationships" xmlns:p="http://schemas.openxmlformats.org/presentationml/2006/main">
+  <p:cSld>
+    <p:bg>
+      <p:bgPr>
+        <a:solidFill>
+          <a:schemeClr val="tx2">
+            <a:lumMod val="10000"/>
+            <a:lumOff val="90000"/>
+          </a:schemeClr>
+        </a:solidFill>
+        <a:effectLst/>
+      </p:bgPr>
+    </p:bg>
+    <p:spTree>
+      <p:nvGrpSpPr>
+        <p:cNvPr id="1" name="">
+          <a:extLst>
+            <a:ext uri="{FF2B5EF4-FFF2-40B4-BE49-F238E27FC236}">
+              <a16:creationId xmlns:a16="http://schemas.microsoft.com/office/drawing/2014/main" id="{A00A857C-39C4-87D4-DA50-CD0D744315A3}"/>
+            </a:ext>
+          </a:extLst>
+        </p:cNvPr>
+        <p:cNvGrpSpPr/>
+        <p:nvPr/>
+      </p:nvGrpSpPr>
+      <p:grpSpPr>
+        <a:xfrm>
+          <a:off x="0" y="0"/>
+          <a:ext cx="0" cy="0"/>
+          <a:chOff x="0" y="0"/>
+          <a:chExt cx="0" cy="0"/>
+        </a:xfrm>
+      </p:grpSpPr>
+      <p:sp>
+        <p:nvSpPr>
+          <p:cNvPr id="5" name="標題 4">
+            <a:extLst>
+              <a:ext uri="{FF2B5EF4-FFF2-40B4-BE49-F238E27FC236}">
+                <a16:creationId xmlns:a16="http://schemas.microsoft.com/office/drawing/2014/main" id="{D49023E7-F124-8FB7-88DA-83BA3DAA8DCC}"/>
+              </a:ext>
+            </a:extLst>
+          </p:cNvPr>
+          <p:cNvSpPr>
+            <a:spLocks noGrp="1"/>
+          </p:cNvSpPr>
+          <p:nvPr>
+            <p:ph type="ctrTitle"/>
+          </p:nvPr>
+        </p:nvSpPr>
+        <p:spPr>
+          <a:xfrm>
+            <a:off x="538480" y="223521"/>
+            <a:ext cx="11115040" cy="833120"/>
+          </a:xfrm>
+        </p:spPr>
+        <p:txBody>
+          <a:bodyPr>
+            <a:normAutofit/>
+          </a:bodyPr>
+          <a:lstStyle/>
+          <a:p>
+            <a:r>
+              <a:rPr lang="zh-TW" altLang="en-US" sz="4000" b="1" dirty="0">
+                <a:solidFill>
+                  <a:schemeClr val="tx2">
+                    <a:lumMod val="90000"/>
+                    <a:lumOff val="10000"/>
+                  </a:schemeClr>
+                </a:solidFill>
+                <a:latin typeface="微軟正黑體" panose="020B0604030504040204" pitchFamily="34" charset="-120"/>
+                <a:ea typeface="微軟正黑體" panose="020B0604030504040204" pitchFamily="34" charset="-120"/>
+              </a:rPr>
+              <a:t>實際操作</a:t>
+            </a:r>
+          </a:p>
+        </p:txBody>
+      </p:sp>
+      <p:cxnSp>
+        <p:nvCxnSpPr>
+          <p:cNvPr id="7" name="直線接點 6">
+            <a:extLst>
+              <a:ext uri="{FF2B5EF4-FFF2-40B4-BE49-F238E27FC236}">
+                <a16:creationId xmlns:a16="http://schemas.microsoft.com/office/drawing/2014/main" id="{C40BC236-5A03-7B21-8AE0-7C38CF38EF8F}"/>
+              </a:ext>
+            </a:extLst>
+          </p:cNvPr>
+          <p:cNvCxnSpPr>
+            <a:cxnSpLocks/>
+          </p:cNvCxnSpPr>
+          <p:nvPr/>
+        </p:nvCxnSpPr>
+        <p:spPr>
+          <a:xfrm>
+            <a:off x="538480" y="1249680"/>
+            <a:ext cx="11115040" cy="0"/>
+          </a:xfrm>
+          <a:prstGeom prst="line">
+            <a:avLst/>
+          </a:prstGeom>
+          <a:ln>
+            <a:solidFill>
+              <a:schemeClr val="accent1">
+                <a:lumMod val="50000"/>
+              </a:schemeClr>
+            </a:solidFill>
+          </a:ln>
+        </p:spPr>
+        <p:style>
+          <a:lnRef idx="3">
+            <a:schemeClr val="accent1"/>
+          </a:lnRef>
+          <a:fillRef idx="0">
+            <a:schemeClr val="accent1"/>
+          </a:fillRef>
+          <a:effectRef idx="2">
+            <a:schemeClr val="accent1"/>
+          </a:effectRef>
+          <a:fontRef idx="minor">
+            <a:schemeClr val="tx1"/>
+          </a:fontRef>
+        </p:style>
+      </p:cxnSp>
+      <p:sp>
+        <p:nvSpPr>
+          <p:cNvPr id="4" name="文字方塊 3">
+            <a:extLst>
+              <a:ext uri="{FF2B5EF4-FFF2-40B4-BE49-F238E27FC236}">
+                <a16:creationId xmlns:a16="http://schemas.microsoft.com/office/drawing/2014/main" id="{387341E8-841B-44F5-420F-0679D74842FA}"/>
+              </a:ext>
+            </a:extLst>
+          </p:cNvPr>
+          <p:cNvSpPr txBox="1"/>
+          <p:nvPr/>
+        </p:nvSpPr>
+        <p:spPr>
+          <a:xfrm>
+            <a:off x="3048762" y="3167390"/>
+            <a:ext cx="6094476" cy="523220"/>
+          </a:xfrm>
+          <a:prstGeom prst="rect">
+            <a:avLst/>
+          </a:prstGeom>
+          <a:noFill/>
+        </p:spPr>
+        <p:txBody>
+          <a:bodyPr wrap="square">
+            <a:spAutoFit/>
+          </a:bodyPr>
+          <a:lstStyle/>
+          <a:p>
+            <a:pPr algn="ctr"/>
+            <a:r>
+              <a:rPr lang="zh-TW" altLang="en-US" sz="2800" b="1" dirty="0">
+                <a:solidFill>
+                  <a:schemeClr val="accent1">
+                    <a:lumMod val="50000"/>
+                  </a:schemeClr>
+                </a:solidFill>
+                <a:latin typeface="微軟正黑體" panose="020B0604030504040204" pitchFamily="34" charset="-120"/>
+                <a:ea typeface="微軟正黑體" panose="020B0604030504040204" pitchFamily="34" charset="-120"/>
+              </a:rPr>
+              <a:t>儀表板 </a:t>
+            </a:r>
+            <a:r>
+              <a:rPr lang="en-US" altLang="zh-TW" sz="2800" b="1" dirty="0">
+                <a:solidFill>
+                  <a:schemeClr val="accent1">
+                    <a:lumMod val="50000"/>
+                  </a:schemeClr>
+                </a:solidFill>
+                <a:latin typeface="微軟正黑體" panose="020B0604030504040204" pitchFamily="34" charset="-120"/>
+                <a:ea typeface="微軟正黑體" panose="020B0604030504040204" pitchFamily="34" charset="-120"/>
+              </a:rPr>
+              <a:t>DEMO</a:t>
+            </a:r>
+          </a:p>
+        </p:txBody>
+      </p:sp>
+    </p:spTree>
+    <p:extLst>
+      <p:ext uri="{BB962C8B-B14F-4D97-AF65-F5344CB8AC3E}">
+        <p14:creationId xmlns:p14="http://schemas.microsoft.com/office/powerpoint/2010/main" val="2027601596"/>
+      </p:ext>
+    </p:extLst>
+  </p:cSld>
+  <p:clrMapOvr>
+    <a:masterClrMapping/>
+  </p:clrMapOvr>
+</p:sld>
+</file>
+
+<file path=ppt/slides/slide5.xml><?xml version="1.0" encoding="utf-8"?>
+<p:sld xmlns:a="http://schemas.openxmlformats.org/drawingml/2006/main" xmlns:r="http://schemas.openxmlformats.org/officeDocument/2006/relationships" xmlns:p="http://schemas.openxmlformats.org/presentationml/2006/main">
+  <p:cSld>
+    <p:bg>
+      <p:bgPr>
+        <a:solidFill>
+          <a:schemeClr val="tx2">
+            <a:lumMod val="10000"/>
+            <a:lumOff val="90000"/>
+          </a:schemeClr>
+        </a:solidFill>
+        <a:effectLst/>
+      </p:bgPr>
+    </p:bg>
+    <p:spTree>
+      <p:nvGrpSpPr>
+        <p:cNvPr id="1" name="">
+          <a:extLst>
+            <a:ext uri="{FF2B5EF4-FFF2-40B4-BE49-F238E27FC236}">
+              <a16:creationId xmlns:a16="http://schemas.microsoft.com/office/drawing/2014/main" id="{163800BB-5565-D1A8-CA09-77827450D441}"/>
+            </a:ext>
+          </a:extLst>
+        </p:cNvPr>
+        <p:cNvGrpSpPr/>
+        <p:nvPr/>
+      </p:nvGrpSpPr>
+      <p:grpSpPr>
+        <a:xfrm>
+          <a:off x="0" y="0"/>
+          <a:ext cx="0" cy="0"/>
+          <a:chOff x="0" y="0"/>
+          <a:chExt cx="0" cy="0"/>
+        </a:xfrm>
+      </p:grpSpPr>
+      <p:sp>
+        <p:nvSpPr>
+          <p:cNvPr id="5" name="標題 4">
+            <a:extLst>
+              <a:ext uri="{FF2B5EF4-FFF2-40B4-BE49-F238E27FC236}">
+                <a16:creationId xmlns:a16="http://schemas.microsoft.com/office/drawing/2014/main" id="{B6D9DCCD-B774-36A1-26EF-1BC6477C1597}"/>
+              </a:ext>
+            </a:extLst>
+          </p:cNvPr>
+          <p:cNvSpPr>
+            <a:spLocks noGrp="1"/>
+          </p:cNvSpPr>
+          <p:nvPr>
+            <p:ph type="ctrTitle"/>
+          </p:nvPr>
+        </p:nvSpPr>
+        <p:spPr>
+          <a:xfrm>
+            <a:off x="538480" y="223521"/>
+            <a:ext cx="11115040" cy="833120"/>
+          </a:xfrm>
+        </p:spPr>
+        <p:txBody>
+          <a:bodyPr>
+            <a:normAutofit/>
+          </a:bodyPr>
+          <a:lstStyle/>
+          <a:p>
+            <a:r>
+              <a:rPr lang="en-US" altLang="zh-TW" sz="4000" b="1" dirty="0">
+                <a:solidFill>
+                  <a:schemeClr val="tx2">
+                    <a:lumMod val="90000"/>
+                    <a:lumOff val="10000"/>
+                  </a:schemeClr>
+                </a:solidFill>
+                <a:latin typeface="微軟正黑體" panose="020B0604030504040204" pitchFamily="34" charset="-120"/>
+                <a:ea typeface="微軟正黑體" panose="020B0604030504040204" pitchFamily="34" charset="-120"/>
+              </a:rPr>
+              <a:t>GIT </a:t>
+            </a:r>
+            <a:r>
+              <a:rPr lang="zh-TW" altLang="en-US" sz="4000" b="1" dirty="0">
+                <a:solidFill>
+                  <a:schemeClr val="tx2">
+                    <a:lumMod val="90000"/>
+                    <a:lumOff val="10000"/>
+                  </a:schemeClr>
+                </a:solidFill>
+                <a:latin typeface="微軟正黑體" panose="020B0604030504040204" pitchFamily="34" charset="-120"/>
+                <a:ea typeface="微軟正黑體" panose="020B0604030504040204" pitchFamily="34" charset="-120"/>
+              </a:rPr>
+              <a:t>版本紀錄</a:t>
+            </a:r>
+          </a:p>
+        </p:txBody>
+      </p:sp>
+      <p:cxnSp>
+        <p:nvCxnSpPr>
+          <p:cNvPr id="7" name="直線接點 6">
+            <a:extLst>
+              <a:ext uri="{FF2B5EF4-FFF2-40B4-BE49-F238E27FC236}">
+                <a16:creationId xmlns:a16="http://schemas.microsoft.com/office/drawing/2014/main" id="{316DB3C5-2469-5463-A7D6-AF659F949A25}"/>
+              </a:ext>
+            </a:extLst>
+          </p:cNvPr>
+          <p:cNvCxnSpPr>
+            <a:cxnSpLocks/>
+          </p:cNvCxnSpPr>
+          <p:nvPr/>
+        </p:nvCxnSpPr>
+        <p:spPr>
+          <a:xfrm>
+            <a:off x="538480" y="1249680"/>
+            <a:ext cx="11115040" cy="0"/>
+          </a:xfrm>
+          <a:prstGeom prst="line">
+            <a:avLst/>
+          </a:prstGeom>
+          <a:ln>
+            <a:solidFill>
+              <a:schemeClr val="accent1">
+                <a:lumMod val="50000"/>
+              </a:schemeClr>
+            </a:solidFill>
+          </a:ln>
+        </p:spPr>
+        <p:style>
+          <a:lnRef idx="3">
+            <a:schemeClr val="accent1"/>
+          </a:lnRef>
+          <a:fillRef idx="0">
+            <a:schemeClr val="accent1"/>
+          </a:fillRef>
+          <a:effectRef idx="2">
+            <a:schemeClr val="accent1"/>
+          </a:effectRef>
+          <a:fontRef idx="minor">
+            <a:schemeClr val="tx1"/>
+          </a:fontRef>
+        </p:style>
+      </p:cxnSp>
+    </p:spTree>
+    <p:extLst>
+      <p:ext uri="{BB962C8B-B14F-4D97-AF65-F5344CB8AC3E}">
+        <p14:creationId xmlns:p14="http://schemas.microsoft.com/office/powerpoint/2010/main" val="3276122178"/>
       </p:ext>
     </p:extLst>
   </p:cSld>
@@ -3697,4 +6196,319 @@
     </a:ext>
   </a:extLst>
 </a:theme>
+</file>
+
+<file path=ppt/theme/theme2.xml><?xml version="1.0" encoding="utf-8"?>
+<a:theme xmlns:a="http://schemas.openxmlformats.org/drawingml/2006/main" name="Office 佈景主題">
+  <a:themeElements>
+    <a:clrScheme name="Office">
+      <a:dk1>
+        <a:sysClr val="windowText" lastClr="000000"/>
+      </a:dk1>
+      <a:lt1>
+        <a:sysClr val="window" lastClr="FFFFFF"/>
+      </a:lt1>
+      <a:dk2>
+        <a:srgbClr val="0E2841"/>
+      </a:dk2>
+      <a:lt2>
+        <a:srgbClr val="E8E8E8"/>
+      </a:lt2>
+      <a:accent1>
+        <a:srgbClr val="156082"/>
+      </a:accent1>
+      <a:accent2>
+        <a:srgbClr val="E97132"/>
+      </a:accent2>
+      <a:accent3>
+        <a:srgbClr val="196B24"/>
+      </a:accent3>
+      <a:accent4>
+        <a:srgbClr val="0F9ED5"/>
+      </a:accent4>
+      <a:accent5>
+        <a:srgbClr val="A02B93"/>
+      </a:accent5>
+      <a:accent6>
+        <a:srgbClr val="4EA72E"/>
+      </a:accent6>
+      <a:hlink>
+        <a:srgbClr val="467886"/>
+      </a:hlink>
+      <a:folHlink>
+        <a:srgbClr val="96607D"/>
+      </a:folHlink>
+    </a:clrScheme>
+    <a:fontScheme name="Office">
+      <a:majorFont>
+        <a:latin typeface="Aptos Display" panose="02110004020202020204"/>
+        <a:ea typeface=""/>
+        <a:cs typeface=""/>
+        <a:font script="Jpan" typeface="游ゴシック Light"/>
+        <a:font script="Hang" typeface="맑은 고딕"/>
+        <a:font script="Hans" typeface="等线 Light"/>
+        <a:font script="Hant" typeface="新細明體"/>
+        <a:font script="Arab" typeface="Times New Roman"/>
+        <a:font script="Hebr" typeface="Times New Roman"/>
+        <a:font script="Thai" typeface="Angsana New"/>
+        <a:font script="Ethi" typeface="Nyala"/>
+        <a:font script="Beng" typeface="Vrinda"/>
+        <a:font script="Gujr" typeface="Shruti"/>
+        <a:font script="Khmr" typeface="MoolBoran"/>
+        <a:font script="Knda" typeface="Tunga"/>
+        <a:font script="Guru" typeface="Raavi"/>
+        <a:font script="Cans" typeface="Euphemia"/>
+        <a:font script="Cher" typeface="Plantagenet Cherokee"/>
+        <a:font script="Yiii" typeface="Microsoft Yi Baiti"/>
+        <a:font script="Tibt" typeface="Microsoft Himalaya"/>
+        <a:font script="Thaa" typeface="MV Boli"/>
+        <a:font script="Deva" typeface="Mangal"/>
+        <a:font script="Telu" typeface="Gautami"/>
+        <a:font script="Taml" typeface="Latha"/>
+        <a:font script="Syrc" typeface="Estrangelo Edessa"/>
+        <a:font script="Orya" typeface="Kalinga"/>
+        <a:font script="Mlym" typeface="Kartika"/>
+        <a:font script="Laoo" typeface="DokChampa"/>
+        <a:font script="Sinh" typeface="Iskoola Pota"/>
+        <a:font script="Mong" typeface="Mongolian Baiti"/>
+        <a:font script="Viet" typeface="Times New Roman"/>
+        <a:font script="Uigh" typeface="Microsoft Uighur"/>
+        <a:font script="Geor" typeface="Sylfaen"/>
+        <a:font script="Armn" typeface="Arial"/>
+        <a:font script="Bugi" typeface="Leelawadee UI"/>
+        <a:font script="Bopo" typeface="Microsoft JhengHei"/>
+        <a:font script="Java" typeface="Javanese Text"/>
+        <a:font script="Lisu" typeface="Segoe UI"/>
+        <a:font script="Mymr" typeface="Myanmar Text"/>
+        <a:font script="Nkoo" typeface="Ebrima"/>
+        <a:font script="Olck" typeface="Nirmala UI"/>
+        <a:font script="Osma" typeface="Ebrima"/>
+        <a:font script="Phag" typeface="Phagspa"/>
+        <a:font script="Syrn" typeface="Estrangelo Edessa"/>
+        <a:font script="Syrj" typeface="Estrangelo Edessa"/>
+        <a:font script="Syre" typeface="Estrangelo Edessa"/>
+        <a:font script="Sora" typeface="Nirmala UI"/>
+        <a:font script="Tale" typeface="Microsoft Tai Le"/>
+        <a:font script="Talu" typeface="Microsoft New Tai Lue"/>
+        <a:font script="Tfng" typeface="Ebrima"/>
+      </a:majorFont>
+      <a:minorFont>
+        <a:latin typeface="Aptos" panose="02110004020202020204"/>
+        <a:ea typeface=""/>
+        <a:cs typeface=""/>
+        <a:font script="Jpan" typeface="游ゴシック"/>
+        <a:font script="Hang" typeface="맑은 고딕"/>
+        <a:font script="Hans" typeface="等线"/>
+        <a:font script="Hant" typeface="新細明體"/>
+        <a:font script="Arab" typeface="Arial"/>
+        <a:font script="Hebr" typeface="Arial"/>
+        <a:font script="Thai" typeface="Cordia New"/>
+        <a:font script="Ethi" typeface="Nyala"/>
+        <a:font script="Beng" typeface="Vrinda"/>
+        <a:font script="Gujr" typeface="Shruti"/>
+        <a:font script="Khmr" typeface="DaunPenh"/>
+        <a:font script="Knda" typeface="Tunga"/>
+        <a:font script="Guru" typeface="Raavi"/>
+        <a:font script="Cans" typeface="Euphemia"/>
+        <a:font script="Cher" typeface="Plantagenet Cherokee"/>
+        <a:font script="Yiii" typeface="Microsoft Yi Baiti"/>
+        <a:font script="Tibt" typeface="Microsoft Himalaya"/>
+        <a:font script="Thaa" typeface="MV Boli"/>
+        <a:font script="Deva" typeface="Mangal"/>
+        <a:font script="Telu" typeface="Gautami"/>
+        <a:font script="Taml" typeface="Latha"/>
+        <a:font script="Syrc" typeface="Estrangelo Edessa"/>
+        <a:font script="Orya" typeface="Kalinga"/>
+        <a:font script="Mlym" typeface="Kartika"/>
+        <a:font script="Laoo" typeface="DokChampa"/>
+        <a:font script="Sinh" typeface="Iskoola Pota"/>
+        <a:font script="Mong" typeface="Mongolian Baiti"/>
+        <a:font script="Viet" typeface="Arial"/>
+        <a:font script="Uigh" typeface="Microsoft Uighur"/>
+        <a:font script="Geor" typeface="Sylfaen"/>
+        <a:font script="Armn" typeface="Arial"/>
+        <a:font script="Bugi" typeface="Leelawadee UI"/>
+        <a:font script="Bopo" typeface="Microsoft JhengHei"/>
+        <a:font script="Java" typeface="Javanese Text"/>
+        <a:font script="Lisu" typeface="Segoe UI"/>
+        <a:font script="Mymr" typeface="Myanmar Text"/>
+        <a:font script="Nkoo" typeface="Ebrima"/>
+        <a:font script="Olck" typeface="Nirmala UI"/>
+        <a:font script="Osma" typeface="Ebrima"/>
+        <a:font script="Phag" typeface="Phagspa"/>
+        <a:font script="Syrn" typeface="Estrangelo Edessa"/>
+        <a:font script="Syrj" typeface="Estrangelo Edessa"/>
+        <a:font script="Syre" typeface="Estrangelo Edessa"/>
+        <a:font script="Sora" typeface="Nirmala UI"/>
+        <a:font script="Tale" typeface="Microsoft Tai Le"/>
+        <a:font script="Talu" typeface="Microsoft New Tai Lue"/>
+        <a:font script="Tfng" typeface="Ebrima"/>
+      </a:minorFont>
+    </a:fontScheme>
+    <a:fmtScheme name="Office">
+      <a:fillStyleLst>
+        <a:solidFill>
+          <a:schemeClr val="phClr"/>
+        </a:solidFill>
+        <a:gradFill rotWithShape="1">
+          <a:gsLst>
+            <a:gs pos="0">
+              <a:schemeClr val="phClr">
+                <a:lumMod val="110000"/>
+                <a:satMod val="105000"/>
+                <a:tint val="67000"/>
+              </a:schemeClr>
+            </a:gs>
+            <a:gs pos="50000">
+              <a:schemeClr val="phClr">
+                <a:lumMod val="105000"/>
+                <a:satMod val="103000"/>
+                <a:tint val="73000"/>
+              </a:schemeClr>
+            </a:gs>
+            <a:gs pos="100000">
+              <a:schemeClr val="phClr">
+                <a:lumMod val="105000"/>
+                <a:satMod val="109000"/>
+                <a:tint val="81000"/>
+              </a:schemeClr>
+            </a:gs>
+          </a:gsLst>
+          <a:lin ang="5400000" scaled="0"/>
+        </a:gradFill>
+        <a:gradFill rotWithShape="1">
+          <a:gsLst>
+            <a:gs pos="0">
+              <a:schemeClr val="phClr">
+                <a:satMod val="103000"/>
+                <a:lumMod val="102000"/>
+                <a:tint val="94000"/>
+              </a:schemeClr>
+            </a:gs>
+            <a:gs pos="50000">
+              <a:schemeClr val="phClr">
+                <a:satMod val="110000"/>
+                <a:lumMod val="100000"/>
+                <a:shade val="100000"/>
+              </a:schemeClr>
+            </a:gs>
+            <a:gs pos="100000">
+              <a:schemeClr val="phClr">
+                <a:lumMod val="99000"/>
+                <a:satMod val="120000"/>
+                <a:shade val="78000"/>
+              </a:schemeClr>
+            </a:gs>
+          </a:gsLst>
+          <a:lin ang="5400000" scaled="0"/>
+        </a:gradFill>
+      </a:fillStyleLst>
+      <a:lnStyleLst>
+        <a:ln w="12700" cap="flat" cmpd="sng" algn="ctr">
+          <a:solidFill>
+            <a:schemeClr val="phClr"/>
+          </a:solidFill>
+          <a:prstDash val="solid"/>
+          <a:miter lim="800000"/>
+        </a:ln>
+        <a:ln w="19050" cap="flat" cmpd="sng" algn="ctr">
+          <a:solidFill>
+            <a:schemeClr val="phClr"/>
+          </a:solidFill>
+          <a:prstDash val="solid"/>
+          <a:miter lim="800000"/>
+        </a:ln>
+        <a:ln w="25400" cap="flat" cmpd="sng" algn="ctr">
+          <a:solidFill>
+            <a:schemeClr val="phClr"/>
+          </a:solidFill>
+          <a:prstDash val="solid"/>
+          <a:miter lim="800000"/>
+        </a:ln>
+      </a:lnStyleLst>
+      <a:effectStyleLst>
+        <a:effectStyle>
+          <a:effectLst/>
+        </a:effectStyle>
+        <a:effectStyle>
+          <a:effectLst/>
+        </a:effectStyle>
+        <a:effectStyle>
+          <a:effectLst>
+            <a:outerShdw blurRad="57150" dist="19050" dir="5400000" algn="ctr" rotWithShape="0">
+              <a:srgbClr val="000000">
+                <a:alpha val="63000"/>
+              </a:srgbClr>
+            </a:outerShdw>
+          </a:effectLst>
+        </a:effectStyle>
+      </a:effectStyleLst>
+      <a:bgFillStyleLst>
+        <a:solidFill>
+          <a:schemeClr val="phClr"/>
+        </a:solidFill>
+        <a:solidFill>
+          <a:schemeClr val="phClr">
+            <a:tint val="95000"/>
+            <a:satMod val="170000"/>
+          </a:schemeClr>
+        </a:solidFill>
+        <a:gradFill rotWithShape="1">
+          <a:gsLst>
+            <a:gs pos="0">
+              <a:schemeClr val="phClr">
+                <a:tint val="93000"/>
+                <a:satMod val="150000"/>
+                <a:shade val="98000"/>
+                <a:lumMod val="102000"/>
+              </a:schemeClr>
+            </a:gs>
+            <a:gs pos="50000">
+              <a:schemeClr val="phClr">
+                <a:tint val="98000"/>
+                <a:satMod val="130000"/>
+                <a:shade val="90000"/>
+                <a:lumMod val="103000"/>
+              </a:schemeClr>
+            </a:gs>
+            <a:gs pos="100000">
+              <a:schemeClr val="phClr">
+                <a:shade val="63000"/>
+                <a:satMod val="120000"/>
+              </a:schemeClr>
+            </a:gs>
+          </a:gsLst>
+          <a:lin ang="5400000" scaled="0"/>
+        </a:gradFill>
+      </a:bgFillStyleLst>
+    </a:fmtScheme>
+  </a:themeElements>
+  <a:objectDefaults>
+    <a:lnDef>
+      <a:spPr/>
+      <a:bodyPr/>
+      <a:lstStyle/>
+      <a:style>
+        <a:lnRef idx="2">
+          <a:schemeClr val="accent1"/>
+        </a:lnRef>
+        <a:fillRef idx="0">
+          <a:schemeClr val="accent1"/>
+        </a:fillRef>
+        <a:effectRef idx="1">
+          <a:schemeClr val="accent1"/>
+        </a:effectRef>
+        <a:fontRef idx="minor">
+          <a:schemeClr val="tx1"/>
+        </a:fontRef>
+      </a:style>
+    </a:lnDef>
+  </a:objectDefaults>
+  <a:extraClrSchemeLst/>
+  <a:extLst>
+    <a:ext uri="{05A4C25C-085E-4340-85A3-A5531E510DB2}">
+      <thm15:themeFamily xmlns:thm15="http://schemas.microsoft.com/office/thememl/2012/main" name="Office Theme" id="{2E142A2C-CD16-42D6-873A-C26D2A0506FA}" vid="{1BDDFF52-6CD6-40A5-AB3C-68EB2F1E4D0A}"/>
+    </a:ext>
+  </a:extLst>
+</a:theme>
 </file>
--- a/112111102_吳映潔.pptx
+++ b/112111102_吳映潔.pptx
@@ -132,7 +132,7 @@
   <pc:docChgLst>
     <pc:chgData name="映潔 吳" userId="ce8478969c818b5d" providerId="LiveId" clId="{02718E11-8C50-4BF9-8911-C664F181BE0F}"/>
     <pc:docChg chg="undo custSel addSld delSld modSld sldOrd">
-      <pc:chgData name="映潔 吳" userId="ce8478969c818b5d" providerId="LiveId" clId="{02718E11-8C50-4BF9-8911-C664F181BE0F}" dt="2026-06-14T03:02:00.308" v="719" actId="478"/>
+      <pc:chgData name="映潔 吳" userId="ce8478969c818b5d" providerId="LiveId" clId="{02718E11-8C50-4BF9-8911-C664F181BE0F}" dt="2026-06-14T03:11:11.274" v="775" actId="1076"/>
       <pc:docMkLst>
         <pc:docMk/>
       </pc:docMkLst>
@@ -418,7 +418,7 @@
         </pc:sldMkLst>
       </pc:sldChg>
       <pc:sldChg chg="addSp delSp modSp add mod">
-        <pc:chgData name="映潔 吳" userId="ce8478969c818b5d" providerId="LiveId" clId="{02718E11-8C50-4BF9-8911-C664F181BE0F}" dt="2026-06-14T03:01:42.122" v="718" actId="1076"/>
+        <pc:chgData name="映潔 吳" userId="ce8478969c818b5d" providerId="LiveId" clId="{02718E11-8C50-4BF9-8911-C664F181BE0F}" dt="2026-06-14T03:11:11.274" v="775" actId="1076"/>
         <pc:sldMkLst>
           <pc:docMk/>
           <pc:sldMk cId="2027601596" sldId="262"/>
@@ -432,7 +432,7 @@
           </ac:spMkLst>
         </pc:spChg>
         <pc:spChg chg="add mod">
-          <ac:chgData name="映潔 吳" userId="ce8478969c818b5d" providerId="LiveId" clId="{02718E11-8C50-4BF9-8911-C664F181BE0F}" dt="2026-06-14T03:01:42.122" v="718" actId="1076"/>
+          <ac:chgData name="映潔 吳" userId="ce8478969c818b5d" providerId="LiveId" clId="{02718E11-8C50-4BF9-8911-C664F181BE0F}" dt="2026-06-14T03:11:11.274" v="775" actId="1076"/>
           <ac:spMkLst>
             <pc:docMk/>
             <pc:sldMk cId="2027601596" sldId="262"/>
@@ -447,6 +447,14 @@
             <ac:spMk id="5" creationId="{D49023E7-F124-8FB7-88DA-83BA3DAA8DCC}"/>
           </ac:spMkLst>
         </pc:spChg>
+        <pc:picChg chg="add mod">
+          <ac:chgData name="映潔 吳" userId="ce8478969c818b5d" providerId="LiveId" clId="{02718E11-8C50-4BF9-8911-C664F181BE0F}" dt="2026-06-14T03:11:08.328" v="774" actId="1076"/>
+          <ac:picMkLst>
+            <pc:docMk/>
+            <pc:sldMk cId="2027601596" sldId="262"/>
+            <ac:picMk id="3" creationId="{90D80FC2-1E81-1302-1FF3-A64105E71FE5}"/>
+          </ac:picMkLst>
+        </pc:picChg>
       </pc:sldChg>
       <pc:sldChg chg="delSp modSp add del mod ord">
         <pc:chgData name="映潔 吳" userId="ce8478969c818b5d" providerId="LiveId" clId="{02718E11-8C50-4BF9-8911-C664F181BE0F}" dt="2026-06-14T03:00:54.973" v="663" actId="47"/>
@@ -479,8 +487,8 @@
           </ac:spMkLst>
         </pc:spChg>
       </pc:sldChg>
-      <pc:sldChg chg="delSp add mod">
-        <pc:chgData name="映潔 吳" userId="ce8478969c818b5d" providerId="LiveId" clId="{02718E11-8C50-4BF9-8911-C664F181BE0F}" dt="2026-06-14T03:02:00.308" v="719" actId="478"/>
+      <pc:sldChg chg="addSp delSp modSp add mod">
+        <pc:chgData name="映潔 吳" userId="ce8478969c818b5d" providerId="LiveId" clId="{02718E11-8C50-4BF9-8911-C664F181BE0F}" dt="2026-06-14T03:10:46.990" v="768" actId="1076"/>
         <pc:sldMkLst>
           <pc:docMk/>
           <pc:sldMk cId="3276122178" sldId="263"/>
@@ -493,6 +501,22 @@
             <ac:spMk id="3" creationId="{73A2830E-9C06-05A3-686F-A1EF06210A69}"/>
           </ac:spMkLst>
         </pc:spChg>
+        <pc:spChg chg="add mod">
+          <ac:chgData name="映潔 吳" userId="ce8478969c818b5d" providerId="LiveId" clId="{02718E11-8C50-4BF9-8911-C664F181BE0F}" dt="2026-06-14T03:10:46.990" v="768" actId="1076"/>
+          <ac:spMkLst>
+            <pc:docMk/>
+            <pc:sldMk cId="3276122178" sldId="263"/>
+            <ac:spMk id="6" creationId="{8842C115-4F9A-66ED-F82C-EA9D9EE8DE41}"/>
+          </ac:spMkLst>
+        </pc:spChg>
+        <pc:picChg chg="add mod">
+          <ac:chgData name="映潔 吳" userId="ce8478969c818b5d" providerId="LiveId" clId="{02718E11-8C50-4BF9-8911-C664F181BE0F}" dt="2026-06-14T03:10:29.079" v="724" actId="1076"/>
+          <ac:picMkLst>
+            <pc:docMk/>
+            <pc:sldMk cId="3276122178" sldId="263"/>
+            <ac:picMk id="3" creationId="{CEE97A7F-D95E-69D5-204B-EA2D559F0FFD}"/>
+          </ac:picMkLst>
+        </pc:picChg>
       </pc:sldChg>
       <pc:sldChg chg="add del">
         <pc:chgData name="映潔 吳" userId="ce8478969c818b5d" providerId="LiveId" clId="{02718E11-8C50-4BF9-8911-C664F181BE0F}" dt="2026-06-14T03:00:57.395" v="665" actId="47"/>
@@ -5679,7 +5703,7 @@
         </p:nvSpPr>
         <p:spPr>
           <a:xfrm>
-            <a:off x="3048762" y="3167390"/>
+            <a:off x="3048761" y="1320302"/>
             <a:ext cx="6094476" cy="523220"/>
           </a:xfrm>
           <a:prstGeom prst="rect">
@@ -5721,6 +5745,42 @@
           </a:p>
         </p:txBody>
       </p:sp>
+      <p:pic>
+        <p:nvPicPr>
+          <p:cNvPr id="3" name="圖片 2">
+            <a:extLst>
+              <a:ext uri="{FF2B5EF4-FFF2-40B4-BE49-F238E27FC236}">
+                <a16:creationId xmlns:a16="http://schemas.microsoft.com/office/drawing/2014/main" id="{90D80FC2-1E81-1302-1FF3-A64105E71FE5}"/>
+              </a:ext>
+            </a:extLst>
+          </p:cNvPr>
+          <p:cNvPicPr>
+            <a:picLocks noChangeAspect="1"/>
+          </p:cNvPicPr>
+          <p:nvPr/>
+        </p:nvPicPr>
+        <p:blipFill>
+          <a:blip r:embed="rId2">
+            <a:extLst>
+              <a:ext uri="{28A0092B-C50C-407E-A947-70E740481C1C}">
+                <a14:useLocalDpi xmlns:a14="http://schemas.microsoft.com/office/drawing/2010/main" val="0"/>
+              </a:ext>
+            </a:extLst>
+          </a:blip>
+          <a:stretch>
+            <a:fillRect/>
+          </a:stretch>
+        </p:blipFill>
+        <p:spPr>
+          <a:xfrm>
+            <a:off x="1764674" y="1914143"/>
+            <a:ext cx="8662651" cy="4872741"/>
+          </a:xfrm>
+          <a:prstGeom prst="rect">
+            <a:avLst/>
+          </a:prstGeom>
+        </p:spPr>
+      </p:pic>
     </p:spTree>
     <p:extLst>
       <p:ext uri="{BB962C8B-B14F-4D97-AF65-F5344CB8AC3E}">
@@ -5870,6 +5930,95 @@
           </a:fontRef>
         </p:style>
       </p:cxnSp>
+      <p:pic>
+        <p:nvPicPr>
+          <p:cNvPr id="3" name="圖片 2">
+            <a:extLst>
+              <a:ext uri="{FF2B5EF4-FFF2-40B4-BE49-F238E27FC236}">
+                <a16:creationId xmlns:a16="http://schemas.microsoft.com/office/drawing/2014/main" id="{CEE97A7F-D95E-69D5-204B-EA2D559F0FFD}"/>
+              </a:ext>
+            </a:extLst>
+          </p:cNvPr>
+          <p:cNvPicPr>
+            <a:picLocks noChangeAspect="1"/>
+          </p:cNvPicPr>
+          <p:nvPr/>
+        </p:nvPicPr>
+        <p:blipFill>
+          <a:blip r:embed="rId2">
+            <a:extLst>
+              <a:ext uri="{28A0092B-C50C-407E-A947-70E740481C1C}">
+                <a14:useLocalDpi xmlns:a14="http://schemas.microsoft.com/office/drawing/2010/main" val="0"/>
+              </a:ext>
+            </a:extLst>
+          </a:blip>
+          <a:stretch>
+            <a:fillRect/>
+          </a:stretch>
+        </p:blipFill>
+        <p:spPr>
+          <a:xfrm>
+            <a:off x="1076067" y="2464908"/>
+            <a:ext cx="10039866" cy="3143412"/>
+          </a:xfrm>
+          <a:prstGeom prst="rect">
+            <a:avLst/>
+          </a:prstGeom>
+        </p:spPr>
+      </p:pic>
+      <p:sp>
+        <p:nvSpPr>
+          <p:cNvPr id="6" name="文字方塊 5">
+            <a:extLst>
+              <a:ext uri="{FF2B5EF4-FFF2-40B4-BE49-F238E27FC236}">
+                <a16:creationId xmlns:a16="http://schemas.microsoft.com/office/drawing/2014/main" id="{8842C115-4F9A-66ED-F82C-EA9D9EE8DE41}"/>
+              </a:ext>
+            </a:extLst>
+          </p:cNvPr>
+          <p:cNvSpPr txBox="1"/>
+          <p:nvPr/>
+        </p:nvSpPr>
+        <p:spPr>
+          <a:xfrm>
+            <a:off x="3048762" y="1442720"/>
+            <a:ext cx="6094476" cy="523220"/>
+          </a:xfrm>
+          <a:prstGeom prst="rect">
+            <a:avLst/>
+          </a:prstGeom>
+          <a:noFill/>
+        </p:spPr>
+        <p:txBody>
+          <a:bodyPr wrap="square">
+            <a:spAutoFit/>
+          </a:bodyPr>
+          <a:lstStyle/>
+          <a:p>
+            <a:pPr algn="ctr"/>
+            <a:r>
+              <a:rPr lang="zh-TW" altLang="en-US" sz="2800" b="1" dirty="0">
+                <a:solidFill>
+                  <a:schemeClr val="accent1">
+                    <a:lumMod val="50000"/>
+                  </a:schemeClr>
+                </a:solidFill>
+                <a:latin typeface="微軟正黑體" panose="020B0604030504040204" pitchFamily="34" charset="-120"/>
+                <a:ea typeface="微軟正黑體" panose="020B0604030504040204" pitchFamily="34" charset="-120"/>
+              </a:rPr>
+              <a:t>還要再改，不是最新版</a:t>
+            </a:r>
+            <a:endParaRPr lang="en-US" altLang="zh-TW" sz="2800" b="1" dirty="0">
+              <a:solidFill>
+                <a:schemeClr val="accent1">
+                  <a:lumMod val="50000"/>
+                </a:schemeClr>
+              </a:solidFill>
+              <a:latin typeface="微軟正黑體" panose="020B0604030504040204" pitchFamily="34" charset="-120"/>
+              <a:ea typeface="微軟正黑體" panose="020B0604030504040204" pitchFamily="34" charset="-120"/>
+            </a:endParaRPr>
+          </a:p>
+        </p:txBody>
+      </p:sp>
     </p:spTree>
     <p:extLst>
       <p:ext uri="{BB962C8B-B14F-4D97-AF65-F5344CB8AC3E}">

--- a/112111102_吳映潔.pptx
+++ b/112111102_吳映潔.pptx
@@ -132,7 +132,7 @@
   <pc:docChgLst>
     <pc:chgData name="映潔 吳" userId="ce8478969c818b5d" providerId="LiveId" clId="{02718E11-8C50-4BF9-8911-C664F181BE0F}"/>
     <pc:docChg chg="undo custSel addSld delSld modSld sldOrd">
-      <pc:chgData name="映潔 吳" userId="ce8478969c818b5d" providerId="LiveId" clId="{02718E11-8C50-4BF9-8911-C664F181BE0F}" dt="2026-06-14T03:11:11.274" v="775" actId="1076"/>
+      <pc:chgData name="映潔 吳" userId="ce8478969c818b5d" providerId="LiveId" clId="{02718E11-8C50-4BF9-8911-C664F181BE0F}" dt="2026-06-14T04:30:12.701" v="784" actId="1076"/>
       <pc:docMkLst>
         <pc:docMk/>
       </pc:docMkLst>
@@ -418,7 +418,7 @@
         </pc:sldMkLst>
       </pc:sldChg>
       <pc:sldChg chg="addSp delSp modSp add mod">
-        <pc:chgData name="映潔 吳" userId="ce8478969c818b5d" providerId="LiveId" clId="{02718E11-8C50-4BF9-8911-C664F181BE0F}" dt="2026-06-14T03:11:11.274" v="775" actId="1076"/>
+        <pc:chgData name="映潔 吳" userId="ce8478969c818b5d" providerId="LiveId" clId="{02718E11-8C50-4BF9-8911-C664F181BE0F}" dt="2026-06-14T04:30:12.701" v="784" actId="1076"/>
         <pc:sldMkLst>
           <pc:docMk/>
           <pc:sldMk cId="2027601596" sldId="262"/>
@@ -432,7 +432,7 @@
           </ac:spMkLst>
         </pc:spChg>
         <pc:spChg chg="add mod">
-          <ac:chgData name="映潔 吳" userId="ce8478969c818b5d" providerId="LiveId" clId="{02718E11-8C50-4BF9-8911-C664F181BE0F}" dt="2026-06-14T03:11:11.274" v="775" actId="1076"/>
+          <ac:chgData name="映潔 吳" userId="ce8478969c818b5d" providerId="LiveId" clId="{02718E11-8C50-4BF9-8911-C664F181BE0F}" dt="2026-06-14T04:30:12.701" v="784" actId="1076"/>
           <ac:spMkLst>
             <pc:docMk/>
             <pc:sldMk cId="2027601596" sldId="262"/>
@@ -447,8 +447,16 @@
             <ac:spMk id="5" creationId="{D49023E7-F124-8FB7-88DA-83BA3DAA8DCC}"/>
           </ac:spMkLst>
         </pc:spChg>
-        <pc:picChg chg="add mod">
-          <ac:chgData name="映潔 吳" userId="ce8478969c818b5d" providerId="LiveId" clId="{02718E11-8C50-4BF9-8911-C664F181BE0F}" dt="2026-06-14T03:11:08.328" v="774" actId="1076"/>
+        <pc:spChg chg="add mod">
+          <ac:chgData name="映潔 吳" userId="ce8478969c818b5d" providerId="LiveId" clId="{02718E11-8C50-4BF9-8911-C664F181BE0F}" dt="2026-06-14T04:30:12.701" v="784" actId="1076"/>
+          <ac:spMkLst>
+            <pc:docMk/>
+            <pc:sldMk cId="2027601596" sldId="262"/>
+            <ac:spMk id="6" creationId="{CAA08505-B2BF-B0C2-4659-C4BCC6A0ADE4}"/>
+          </ac:spMkLst>
+        </pc:spChg>
+        <pc:picChg chg="add del mod">
+          <ac:chgData name="映潔 吳" userId="ce8478969c818b5d" providerId="LiveId" clId="{02718E11-8C50-4BF9-8911-C664F181BE0F}" dt="2026-06-14T04:29:40.906" v="779" actId="478"/>
           <ac:picMkLst>
             <pc:docMk/>
             <pc:sldMk cId="2027601596" sldId="262"/>
@@ -5703,7 +5711,7 @@
         </p:nvSpPr>
         <p:spPr>
           <a:xfrm>
-            <a:off x="3048761" y="1320302"/>
+            <a:off x="3048000" y="2472592"/>
             <a:ext cx="6094476" cy="523220"/>
           </a:xfrm>
           <a:prstGeom prst="rect">
@@ -5745,42 +5753,61 @@
           </a:p>
         </p:txBody>
       </p:sp>
-      <p:pic>
-        <p:nvPicPr>
-          <p:cNvPr id="3" name="圖片 2">
-            <a:extLst>
-              <a:ext uri="{FF2B5EF4-FFF2-40B4-BE49-F238E27FC236}">
-                <a16:creationId xmlns:a16="http://schemas.microsoft.com/office/drawing/2014/main" id="{90D80FC2-1E81-1302-1FF3-A64105E71FE5}"/>
-              </a:ext>
-            </a:extLst>
-          </p:cNvPr>
-          <p:cNvPicPr>
-            <a:picLocks noChangeAspect="1"/>
-          </p:cNvPicPr>
+      <p:sp>
+        <p:nvSpPr>
+          <p:cNvPr id="6" name="文字方塊 5">
+            <a:extLst>
+              <a:ext uri="{FF2B5EF4-FFF2-40B4-BE49-F238E27FC236}">
+                <a16:creationId xmlns:a16="http://schemas.microsoft.com/office/drawing/2014/main" id="{CAA08505-B2BF-B0C2-4659-C4BCC6A0ADE4}"/>
+              </a:ext>
+            </a:extLst>
+          </p:cNvPr>
+          <p:cNvSpPr txBox="1"/>
           <p:nvPr/>
-        </p:nvPicPr>
-        <p:blipFill>
-          <a:blip r:embed="rId2">
-            <a:extLst>
-              <a:ext uri="{28A0092B-C50C-407E-A947-70E740481C1C}">
-                <a14:useLocalDpi xmlns:a14="http://schemas.microsoft.com/office/drawing/2010/main" val="0"/>
-              </a:ext>
-            </a:extLst>
-          </a:blip>
-          <a:stretch>
-            <a:fillRect/>
-          </a:stretch>
-        </p:blipFill>
+        </p:nvSpPr>
         <p:spPr>
           <a:xfrm>
-            <a:off x="1764674" y="1914143"/>
-            <a:ext cx="8662651" cy="4872741"/>
+            <a:off x="3048000" y="3523779"/>
+            <a:ext cx="6096000" cy="1200329"/>
           </a:xfrm>
           <a:prstGeom prst="rect">
             <a:avLst/>
           </a:prstGeom>
+          <a:noFill/>
         </p:spPr>
-      </p:pic>
+        <p:txBody>
+          <a:bodyPr wrap="square">
+            <a:spAutoFit/>
+          </a:bodyPr>
+          <a:lstStyle/>
+          <a:p>
+            <a:r>
+              <a:rPr lang="zh-TW" altLang="en-US" dirty="0">
+                <a:solidFill>
+                  <a:schemeClr val="accent1">
+                    <a:lumMod val="50000"/>
+                  </a:schemeClr>
+                </a:solidFill>
+                <a:hlinkClick r:id="rId2">
+                  <a:extLst>
+                    <a:ext uri="{A12FA001-AC4F-418D-AE19-62706E023703}">
+                      <ahyp:hlinkClr xmlns:ahyp="http://schemas.microsoft.com/office/drawing/2018/hyperlinkcolor" val="tx"/>
+                    </a:ext>
+                  </a:extLst>
+                </a:hlinkClick>
+              </a:rPr>
+              <a:t>https://app.powerbi.com/view?r=eyJrIjoiMDA3Nzg3ZTItNWM1My00YTZlLTgwN2MtMWM4NTJiYzg3OTIyIiwidCI6IjQ1NmIwZjQ0LWMyNjItNDNjMC1hZGM2LWUzN2MwNTVhZWNkMCIsImMiOjEwfQ%3D%3D</a:t>
+            </a:r>
+            <a:endParaRPr lang="zh-TW" altLang="en-US" dirty="0">
+              <a:solidFill>
+                <a:schemeClr val="accent1">
+                  <a:lumMod val="50000"/>
+                </a:schemeClr>
+              </a:solidFill>
+            </a:endParaRPr>
+          </a:p>
+        </p:txBody>
+      </p:sp>
     </p:spTree>
     <p:extLst>
       <p:ext uri="{BB962C8B-B14F-4D97-AF65-F5344CB8AC3E}">

--- a/112111102_吳映潔.pptx
+++ b/112111102_吳映潔.pptx
@@ -5,14 +5,19 @@
     <p:sldMasterId id="2147483648" r:id="rId1"/>
   </p:sldMasterIdLst>
   <p:notesMasterIdLst>
-    <p:notesMasterId r:id="rId7"/>
+    <p:notesMasterId r:id="rId12"/>
   </p:notesMasterIdLst>
   <p:sldIdLst>
     <p:sldId id="256" r:id="rId2"/>
     <p:sldId id="260" r:id="rId3"/>
     <p:sldId id="259" r:id="rId4"/>
-    <p:sldId id="262" r:id="rId5"/>
-    <p:sldId id="263" r:id="rId6"/>
+    <p:sldId id="265" r:id="rId5"/>
+    <p:sldId id="262" r:id="rId6"/>
+    <p:sldId id="267" r:id="rId7"/>
+    <p:sldId id="268" r:id="rId8"/>
+    <p:sldId id="266" r:id="rId9"/>
+    <p:sldId id="264" r:id="rId10"/>
+    <p:sldId id="263" r:id="rId11"/>
   </p:sldIdLst>
   <p:sldSz cx="12192000" cy="6858000"/>
   <p:notesSz cx="6858000" cy="9144000"/>
@@ -132,7 +137,7 @@
   <pc:docChgLst>
     <pc:chgData name="映潔 吳" userId="ce8478969c818b5d" providerId="LiveId" clId="{02718E11-8C50-4BF9-8911-C664F181BE0F}"/>
     <pc:docChg chg="undo custSel addSld delSld modSld sldOrd">
-      <pc:chgData name="映潔 吳" userId="ce8478969c818b5d" providerId="LiveId" clId="{02718E11-8C50-4BF9-8911-C664F181BE0F}" dt="2026-06-14T04:30:12.701" v="784" actId="1076"/>
+      <pc:chgData name="映潔 吳" userId="ce8478969c818b5d" providerId="LiveId" clId="{02718E11-8C50-4BF9-8911-C664F181BE0F}" dt="2026-06-14T08:16:47.375" v="838" actId="1076"/>
       <pc:docMkLst>
         <pc:docMk/>
       </pc:docMkLst>
@@ -238,7 +243,7 @@
         </pc:cxnChg>
       </pc:sldChg>
       <pc:sldChg chg="addSp delSp modSp add mod ord">
-        <pc:chgData name="映潔 吳" userId="ce8478969c818b5d" providerId="LiveId" clId="{02718E11-8C50-4BF9-8911-C664F181BE0F}" dt="2026-06-14T03:00:18.434" v="662" actId="20577"/>
+        <pc:chgData name="映潔 吳" userId="ce8478969c818b5d" providerId="LiveId" clId="{02718E11-8C50-4BF9-8911-C664F181BE0F}" dt="2026-06-14T08:00:21.771" v="788" actId="1076"/>
         <pc:sldMkLst>
           <pc:docMk/>
           <pc:sldMk cId="663800678" sldId="259"/>
@@ -252,7 +257,7 @@
           </ac:spMkLst>
         </pc:spChg>
         <pc:spChg chg="mod">
-          <ac:chgData name="映潔 吳" userId="ce8478969c818b5d" providerId="LiveId" clId="{02718E11-8C50-4BF9-8911-C664F181BE0F}" dt="2026-06-14T03:00:01.156" v="643" actId="1076"/>
+          <ac:chgData name="映潔 吳" userId="ce8478969c818b5d" providerId="LiveId" clId="{02718E11-8C50-4BF9-8911-C664F181BE0F}" dt="2026-06-14T08:00:21.771" v="788" actId="1076"/>
           <ac:spMkLst>
             <pc:docMk/>
             <pc:sldMk cId="663800678" sldId="259"/>
@@ -276,7 +281,7 @@
           </ac:spMkLst>
         </pc:spChg>
         <pc:spChg chg="add mod">
-          <ac:chgData name="映潔 吳" userId="ce8478969c818b5d" providerId="LiveId" clId="{02718E11-8C50-4BF9-8911-C664F181BE0F}" dt="2026-06-14T02:59:58.433" v="642" actId="1076"/>
+          <ac:chgData name="映潔 吳" userId="ce8478969c818b5d" providerId="LiveId" clId="{02718E11-8C50-4BF9-8911-C664F181BE0F}" dt="2026-06-14T08:00:02.174" v="786" actId="14100"/>
           <ac:spMkLst>
             <pc:docMk/>
             <pc:sldMk cId="663800678" sldId="259"/>
@@ -284,7 +289,7 @@
           </ac:spMkLst>
         </pc:spChg>
         <pc:spChg chg="add mod">
-          <ac:chgData name="映潔 吳" userId="ce8478969c818b5d" providerId="LiveId" clId="{02718E11-8C50-4BF9-8911-C664F181BE0F}" dt="2026-06-14T02:59:58.433" v="642" actId="1076"/>
+          <ac:chgData name="映潔 吳" userId="ce8478969c818b5d" providerId="LiveId" clId="{02718E11-8C50-4BF9-8911-C664F181BE0F}" dt="2026-06-14T08:00:17.988" v="787" actId="1076"/>
           <ac:spMkLst>
             <pc:docMk/>
             <pc:sldMk cId="663800678" sldId="259"/>
@@ -417,8 +422,8 @@
           <pc:sldMk cId="332979469" sldId="262"/>
         </pc:sldMkLst>
       </pc:sldChg>
-      <pc:sldChg chg="addSp delSp modSp add mod">
-        <pc:chgData name="映潔 吳" userId="ce8478969c818b5d" providerId="LiveId" clId="{02718E11-8C50-4BF9-8911-C664F181BE0F}" dt="2026-06-14T04:30:12.701" v="784" actId="1076"/>
+      <pc:sldChg chg="addSp delSp modSp add del mod">
+        <pc:chgData name="映潔 吳" userId="ce8478969c818b5d" providerId="LiveId" clId="{02718E11-8C50-4BF9-8911-C664F181BE0F}" dt="2026-06-14T08:16:29.316" v="836" actId="1076"/>
         <pc:sldMkLst>
           <pc:docMk/>
           <pc:sldMk cId="2027601596" sldId="262"/>
@@ -431,8 +436,8 @@
             <ac:spMk id="3" creationId="{CE3EA92D-93F1-4F0A-0EAC-8F9B7CE27050}"/>
           </ac:spMkLst>
         </pc:spChg>
-        <pc:spChg chg="add mod">
-          <ac:chgData name="映潔 吳" userId="ce8478969c818b5d" providerId="LiveId" clId="{02718E11-8C50-4BF9-8911-C664F181BE0F}" dt="2026-06-14T04:30:12.701" v="784" actId="1076"/>
+        <pc:spChg chg="add del mod">
+          <ac:chgData name="映潔 吳" userId="ce8478969c818b5d" providerId="LiveId" clId="{02718E11-8C50-4BF9-8911-C664F181BE0F}" dt="2026-06-14T08:08:03.694" v="789" actId="478"/>
           <ac:spMkLst>
             <pc:docMk/>
             <pc:sldMk cId="2027601596" sldId="262"/>
@@ -440,27 +445,43 @@
           </ac:spMkLst>
         </pc:spChg>
         <pc:spChg chg="mod">
-          <ac:chgData name="映潔 吳" userId="ce8478969c818b5d" providerId="LiveId" clId="{02718E11-8C50-4BF9-8911-C664F181BE0F}" dt="2026-06-14T03:01:09.753" v="689" actId="20577"/>
+          <ac:chgData name="映潔 吳" userId="ce8478969c818b5d" providerId="LiveId" clId="{02718E11-8C50-4BF9-8911-C664F181BE0F}" dt="2026-06-14T08:08:26.129" v="806" actId="20577"/>
           <ac:spMkLst>
             <pc:docMk/>
             <pc:sldMk cId="2027601596" sldId="262"/>
             <ac:spMk id="5" creationId="{D49023E7-F124-8FB7-88DA-83BA3DAA8DCC}"/>
           </ac:spMkLst>
         </pc:spChg>
-        <pc:spChg chg="add mod">
-          <ac:chgData name="映潔 吳" userId="ce8478969c818b5d" providerId="LiveId" clId="{02718E11-8C50-4BF9-8911-C664F181BE0F}" dt="2026-06-14T04:30:12.701" v="784" actId="1076"/>
+        <pc:spChg chg="add del mod">
+          <ac:chgData name="映潔 吳" userId="ce8478969c818b5d" providerId="LiveId" clId="{02718E11-8C50-4BF9-8911-C664F181BE0F}" dt="2026-06-14T08:08:31.257" v="807" actId="478"/>
           <ac:spMkLst>
             <pc:docMk/>
             <pc:sldMk cId="2027601596" sldId="262"/>
             <ac:spMk id="6" creationId="{CAA08505-B2BF-B0C2-4659-C4BCC6A0ADE4}"/>
           </ac:spMkLst>
         </pc:spChg>
+        <pc:picChg chg="add del">
+          <ac:chgData name="映潔 吳" userId="ce8478969c818b5d" providerId="LiveId" clId="{02718E11-8C50-4BF9-8911-C664F181BE0F}" dt="2026-06-14T08:09:18.910" v="812" actId="478"/>
+          <ac:picMkLst>
+            <pc:docMk/>
+            <pc:sldMk cId="2027601596" sldId="262"/>
+            <ac:picMk id="3" creationId="{27F8C4D3-9E64-32C8-9338-16A141ACB15C}"/>
+          </ac:picMkLst>
+        </pc:picChg>
         <pc:picChg chg="add del mod">
           <ac:chgData name="映潔 吳" userId="ce8478969c818b5d" providerId="LiveId" clId="{02718E11-8C50-4BF9-8911-C664F181BE0F}" dt="2026-06-14T04:29:40.906" v="779" actId="478"/>
           <ac:picMkLst>
             <pc:docMk/>
             <pc:sldMk cId="2027601596" sldId="262"/>
             <ac:picMk id="3" creationId="{90D80FC2-1E81-1302-1FF3-A64105E71FE5}"/>
+          </ac:picMkLst>
+        </pc:picChg>
+        <pc:picChg chg="add mod modCrop">
+          <ac:chgData name="映潔 吳" userId="ce8478969c818b5d" providerId="LiveId" clId="{02718E11-8C50-4BF9-8911-C664F181BE0F}" dt="2026-06-14T08:16:29.316" v="836" actId="1076"/>
+          <ac:picMkLst>
+            <pc:docMk/>
+            <pc:sldMk cId="2027601596" sldId="262"/>
+            <ac:picMk id="9" creationId="{AB04FBD2-9E8F-240F-C77A-AF99EEB47B96}"/>
           </ac:picMkLst>
         </pc:picChg>
       </pc:sldChg>
@@ -526,12 +547,79 @@
           </ac:picMkLst>
         </pc:picChg>
       </pc:sldChg>
+      <pc:sldChg chg="add">
+        <pc:chgData name="映潔 吳" userId="ce8478969c818b5d" providerId="LiveId" clId="{02718E11-8C50-4BF9-8911-C664F181BE0F}" dt="2026-06-14T08:08:17.828" v="791" actId="2890"/>
+        <pc:sldMkLst>
+          <pc:docMk/>
+          <pc:sldMk cId="2185778571" sldId="264"/>
+        </pc:sldMkLst>
+      </pc:sldChg>
       <pc:sldChg chg="add del">
         <pc:chgData name="映潔 吳" userId="ce8478969c818b5d" providerId="LiveId" clId="{02718E11-8C50-4BF9-8911-C664F181BE0F}" dt="2026-06-14T03:00:57.395" v="665" actId="47"/>
         <pc:sldMkLst>
           <pc:docMk/>
           <pc:sldMk cId="2457011713" sldId="264"/>
         </pc:sldMkLst>
+      </pc:sldChg>
+      <pc:sldChg chg="modSp add mod ord">
+        <pc:chgData name="映潔 吳" userId="ce8478969c818b5d" providerId="LiveId" clId="{02718E11-8C50-4BF9-8911-C664F181BE0F}" dt="2026-06-14T08:16:47.375" v="838" actId="1076"/>
+        <pc:sldMkLst>
+          <pc:docMk/>
+          <pc:sldMk cId="2787629452" sldId="265"/>
+        </pc:sldMkLst>
+        <pc:picChg chg="mod modCrop">
+          <ac:chgData name="映潔 吳" userId="ce8478969c818b5d" providerId="LiveId" clId="{02718E11-8C50-4BF9-8911-C664F181BE0F}" dt="2026-06-14T08:16:47.375" v="838" actId="1076"/>
+          <ac:picMkLst>
+            <pc:docMk/>
+            <pc:sldMk cId="2787629452" sldId="265"/>
+            <ac:picMk id="3" creationId="{86CB18BA-52FD-7495-232B-C44A1C8C411E}"/>
+          </ac:picMkLst>
+        </pc:picChg>
+      </pc:sldChg>
+      <pc:sldChg chg="addSp modSp add mod">
+        <pc:chgData name="映潔 吳" userId="ce8478969c818b5d" providerId="LiveId" clId="{02718E11-8C50-4BF9-8911-C664F181BE0F}" dt="2026-06-14T08:16:05.127" v="834" actId="1076"/>
+        <pc:sldMkLst>
+          <pc:docMk/>
+          <pc:sldMk cId="2040838702" sldId="266"/>
+        </pc:sldMkLst>
+        <pc:picChg chg="add mod modCrop">
+          <ac:chgData name="映潔 吳" userId="ce8478969c818b5d" providerId="LiveId" clId="{02718E11-8C50-4BF9-8911-C664F181BE0F}" dt="2026-06-14T08:16:05.127" v="834" actId="1076"/>
+          <ac:picMkLst>
+            <pc:docMk/>
+            <pc:sldMk cId="2040838702" sldId="266"/>
+            <ac:picMk id="3" creationId="{60E4581A-6BF8-20FF-7991-797E72FE5654}"/>
+          </ac:picMkLst>
+        </pc:picChg>
+      </pc:sldChg>
+      <pc:sldChg chg="addSp modSp add mod">
+        <pc:chgData name="映潔 吳" userId="ce8478969c818b5d" providerId="LiveId" clId="{02718E11-8C50-4BF9-8911-C664F181BE0F}" dt="2026-06-14T08:15:05.557" v="829" actId="1076"/>
+        <pc:sldMkLst>
+          <pc:docMk/>
+          <pc:sldMk cId="447743623" sldId="267"/>
+        </pc:sldMkLst>
+        <pc:picChg chg="add mod modCrop">
+          <ac:chgData name="映潔 吳" userId="ce8478969c818b5d" providerId="LiveId" clId="{02718E11-8C50-4BF9-8911-C664F181BE0F}" dt="2026-06-14T08:15:05.557" v="829" actId="1076"/>
+          <ac:picMkLst>
+            <pc:docMk/>
+            <pc:sldMk cId="447743623" sldId="267"/>
+            <ac:picMk id="3" creationId="{5404BADE-A680-0A74-8DD5-3801F91A2C89}"/>
+          </ac:picMkLst>
+        </pc:picChg>
+      </pc:sldChg>
+      <pc:sldChg chg="addSp modSp add mod">
+        <pc:chgData name="映潔 吳" userId="ce8478969c818b5d" providerId="LiveId" clId="{02718E11-8C50-4BF9-8911-C664F181BE0F}" dt="2026-06-14T08:15:30.080" v="831" actId="1076"/>
+        <pc:sldMkLst>
+          <pc:docMk/>
+          <pc:sldMk cId="1217901577" sldId="268"/>
+        </pc:sldMkLst>
+        <pc:picChg chg="add mod modCrop">
+          <ac:chgData name="映潔 吳" userId="ce8478969c818b5d" providerId="LiveId" clId="{02718E11-8C50-4BF9-8911-C664F181BE0F}" dt="2026-06-14T08:15:30.080" v="831" actId="1076"/>
+          <ac:picMkLst>
+            <pc:docMk/>
+            <pc:sldMk cId="1217901577" sldId="268"/>
+            <ac:picMk id="3" creationId="{A4307F2D-00C9-0DB6-95E7-CA07AE37E20D}"/>
+          </ac:picMkLst>
+        </pc:picChg>
       </pc:sldChg>
     </pc:docChg>
   </pc:docChgLst>
@@ -4237,6 +4325,244 @@
 </p:sld>
 </file>
 
+<file path=ppt/slides/slide10.xml><?xml version="1.0" encoding="utf-8"?>
+<p:sld xmlns:a="http://schemas.openxmlformats.org/drawingml/2006/main" xmlns:r="http://schemas.openxmlformats.org/officeDocument/2006/relationships" xmlns:p="http://schemas.openxmlformats.org/presentationml/2006/main">
+  <p:cSld>
+    <p:bg>
+      <p:bgPr>
+        <a:solidFill>
+          <a:schemeClr val="tx2">
+            <a:lumMod val="10000"/>
+            <a:lumOff val="90000"/>
+          </a:schemeClr>
+        </a:solidFill>
+        <a:effectLst/>
+      </p:bgPr>
+    </p:bg>
+    <p:spTree>
+      <p:nvGrpSpPr>
+        <p:cNvPr id="1" name="">
+          <a:extLst>
+            <a:ext uri="{FF2B5EF4-FFF2-40B4-BE49-F238E27FC236}">
+              <a16:creationId xmlns:a16="http://schemas.microsoft.com/office/drawing/2014/main" id="{163800BB-5565-D1A8-CA09-77827450D441}"/>
+            </a:ext>
+          </a:extLst>
+        </p:cNvPr>
+        <p:cNvGrpSpPr/>
+        <p:nvPr/>
+      </p:nvGrpSpPr>
+      <p:grpSpPr>
+        <a:xfrm>
+          <a:off x="0" y="0"/>
+          <a:ext cx="0" cy="0"/>
+          <a:chOff x="0" y="0"/>
+          <a:chExt cx="0" cy="0"/>
+        </a:xfrm>
+      </p:grpSpPr>
+      <p:sp>
+        <p:nvSpPr>
+          <p:cNvPr id="5" name="標題 4">
+            <a:extLst>
+              <a:ext uri="{FF2B5EF4-FFF2-40B4-BE49-F238E27FC236}">
+                <a16:creationId xmlns:a16="http://schemas.microsoft.com/office/drawing/2014/main" id="{B6D9DCCD-B774-36A1-26EF-1BC6477C1597}"/>
+              </a:ext>
+            </a:extLst>
+          </p:cNvPr>
+          <p:cNvSpPr>
+            <a:spLocks noGrp="1"/>
+          </p:cNvSpPr>
+          <p:nvPr>
+            <p:ph type="ctrTitle"/>
+          </p:nvPr>
+        </p:nvSpPr>
+        <p:spPr>
+          <a:xfrm>
+            <a:off x="538480" y="223521"/>
+            <a:ext cx="11115040" cy="833120"/>
+          </a:xfrm>
+        </p:spPr>
+        <p:txBody>
+          <a:bodyPr>
+            <a:normAutofit/>
+          </a:bodyPr>
+          <a:lstStyle/>
+          <a:p>
+            <a:r>
+              <a:rPr lang="en-US" altLang="zh-TW" sz="4000" b="1" dirty="0">
+                <a:solidFill>
+                  <a:schemeClr val="tx2">
+                    <a:lumMod val="90000"/>
+                    <a:lumOff val="10000"/>
+                  </a:schemeClr>
+                </a:solidFill>
+                <a:latin typeface="微軟正黑體" panose="020B0604030504040204" pitchFamily="34" charset="-120"/>
+                <a:ea typeface="微軟正黑體" panose="020B0604030504040204" pitchFamily="34" charset="-120"/>
+              </a:rPr>
+              <a:t>GIT </a:t>
+            </a:r>
+            <a:r>
+              <a:rPr lang="zh-TW" altLang="en-US" sz="4000" b="1" dirty="0">
+                <a:solidFill>
+                  <a:schemeClr val="tx2">
+                    <a:lumMod val="90000"/>
+                    <a:lumOff val="10000"/>
+                  </a:schemeClr>
+                </a:solidFill>
+                <a:latin typeface="微軟正黑體" panose="020B0604030504040204" pitchFamily="34" charset="-120"/>
+                <a:ea typeface="微軟正黑體" panose="020B0604030504040204" pitchFamily="34" charset="-120"/>
+              </a:rPr>
+              <a:t>版本紀錄</a:t>
+            </a:r>
+          </a:p>
+        </p:txBody>
+      </p:sp>
+      <p:cxnSp>
+        <p:nvCxnSpPr>
+          <p:cNvPr id="7" name="直線接點 6">
+            <a:extLst>
+              <a:ext uri="{FF2B5EF4-FFF2-40B4-BE49-F238E27FC236}">
+                <a16:creationId xmlns:a16="http://schemas.microsoft.com/office/drawing/2014/main" id="{316DB3C5-2469-5463-A7D6-AF659F949A25}"/>
+              </a:ext>
+            </a:extLst>
+          </p:cNvPr>
+          <p:cNvCxnSpPr>
+            <a:cxnSpLocks/>
+          </p:cNvCxnSpPr>
+          <p:nvPr/>
+        </p:nvCxnSpPr>
+        <p:spPr>
+          <a:xfrm>
+            <a:off x="538480" y="1249680"/>
+            <a:ext cx="11115040" cy="0"/>
+          </a:xfrm>
+          <a:prstGeom prst="line">
+            <a:avLst/>
+          </a:prstGeom>
+          <a:ln>
+            <a:solidFill>
+              <a:schemeClr val="accent1">
+                <a:lumMod val="50000"/>
+              </a:schemeClr>
+            </a:solidFill>
+          </a:ln>
+        </p:spPr>
+        <p:style>
+          <a:lnRef idx="3">
+            <a:schemeClr val="accent1"/>
+          </a:lnRef>
+          <a:fillRef idx="0">
+            <a:schemeClr val="accent1"/>
+          </a:fillRef>
+          <a:effectRef idx="2">
+            <a:schemeClr val="accent1"/>
+          </a:effectRef>
+          <a:fontRef idx="minor">
+            <a:schemeClr val="tx1"/>
+          </a:fontRef>
+        </p:style>
+      </p:cxnSp>
+      <p:pic>
+        <p:nvPicPr>
+          <p:cNvPr id="3" name="圖片 2">
+            <a:extLst>
+              <a:ext uri="{FF2B5EF4-FFF2-40B4-BE49-F238E27FC236}">
+                <a16:creationId xmlns:a16="http://schemas.microsoft.com/office/drawing/2014/main" id="{CEE97A7F-D95E-69D5-204B-EA2D559F0FFD}"/>
+              </a:ext>
+            </a:extLst>
+          </p:cNvPr>
+          <p:cNvPicPr>
+            <a:picLocks noChangeAspect="1"/>
+          </p:cNvPicPr>
+          <p:nvPr/>
+        </p:nvPicPr>
+        <p:blipFill>
+          <a:blip r:embed="rId2">
+            <a:extLst>
+              <a:ext uri="{28A0092B-C50C-407E-A947-70E740481C1C}">
+                <a14:useLocalDpi xmlns:a14="http://schemas.microsoft.com/office/drawing/2010/main" val="0"/>
+              </a:ext>
+            </a:extLst>
+          </a:blip>
+          <a:stretch>
+            <a:fillRect/>
+          </a:stretch>
+        </p:blipFill>
+        <p:spPr>
+          <a:xfrm>
+            <a:off x="1076067" y="2464908"/>
+            <a:ext cx="10039866" cy="3143412"/>
+          </a:xfrm>
+          <a:prstGeom prst="rect">
+            <a:avLst/>
+          </a:prstGeom>
+        </p:spPr>
+      </p:pic>
+      <p:sp>
+        <p:nvSpPr>
+          <p:cNvPr id="6" name="文字方塊 5">
+            <a:extLst>
+              <a:ext uri="{FF2B5EF4-FFF2-40B4-BE49-F238E27FC236}">
+                <a16:creationId xmlns:a16="http://schemas.microsoft.com/office/drawing/2014/main" id="{8842C115-4F9A-66ED-F82C-EA9D9EE8DE41}"/>
+              </a:ext>
+            </a:extLst>
+          </p:cNvPr>
+          <p:cNvSpPr txBox="1"/>
+          <p:nvPr/>
+        </p:nvSpPr>
+        <p:spPr>
+          <a:xfrm>
+            <a:off x="3048762" y="1442720"/>
+            <a:ext cx="6094476" cy="523220"/>
+          </a:xfrm>
+          <a:prstGeom prst="rect">
+            <a:avLst/>
+          </a:prstGeom>
+          <a:noFill/>
+        </p:spPr>
+        <p:txBody>
+          <a:bodyPr wrap="square">
+            <a:spAutoFit/>
+          </a:bodyPr>
+          <a:lstStyle/>
+          <a:p>
+            <a:pPr algn="ctr"/>
+            <a:r>
+              <a:rPr lang="zh-TW" altLang="en-US" sz="2800" b="1" dirty="0">
+                <a:solidFill>
+                  <a:schemeClr val="accent1">
+                    <a:lumMod val="50000"/>
+                  </a:schemeClr>
+                </a:solidFill>
+                <a:latin typeface="微軟正黑體" panose="020B0604030504040204" pitchFamily="34" charset="-120"/>
+                <a:ea typeface="微軟正黑體" panose="020B0604030504040204" pitchFamily="34" charset="-120"/>
+              </a:rPr>
+              <a:t>還要再改，不是最新版</a:t>
+            </a:r>
+            <a:endParaRPr lang="en-US" altLang="zh-TW" sz="2800" b="1" dirty="0">
+              <a:solidFill>
+                <a:schemeClr val="accent1">
+                  <a:lumMod val="50000"/>
+                </a:schemeClr>
+              </a:solidFill>
+              <a:latin typeface="微軟正黑體" panose="020B0604030504040204" pitchFamily="34" charset="-120"/>
+              <a:ea typeface="微軟正黑體" panose="020B0604030504040204" pitchFamily="34" charset="-120"/>
+            </a:endParaRPr>
+          </a:p>
+        </p:txBody>
+      </p:sp>
+    </p:spTree>
+    <p:extLst>
+      <p:ext uri="{BB962C8B-B14F-4D97-AF65-F5344CB8AC3E}">
+        <p14:creationId xmlns:p14="http://schemas.microsoft.com/office/powerpoint/2010/main" val="3276122178"/>
+      </p:ext>
+    </p:extLst>
+  </p:cSld>
+  <p:clrMapOvr>
+    <a:masterClrMapping/>
+  </p:clrMapOvr>
+</p:sld>
+</file>
+
 <file path=ppt/slides/slide2.xml><?xml version="1.0" encoding="utf-8"?>
 <p:sld xmlns:a="http://schemas.openxmlformats.org/drawingml/2006/main" xmlns:r="http://schemas.openxmlformats.org/officeDocument/2006/relationships" xmlns:p="http://schemas.openxmlformats.org/presentationml/2006/main">
   <p:cSld>
@@ -4589,7 +4915,7 @@
         </p:nvSpPr>
         <p:spPr>
           <a:xfrm>
-            <a:off x="3317240" y="1644754"/>
+            <a:off x="3317240" y="1644295"/>
             <a:ext cx="5557520" cy="1387336"/>
           </a:xfrm>
         </p:spPr>
@@ -4798,7 +5124,7 @@
         <p:spPr>
           <a:xfrm>
             <a:off x="1557152" y="3428081"/>
-            <a:ext cx="3520173" cy="2668031"/>
+            <a:ext cx="4169022" cy="2668031"/>
           </a:xfrm>
           <a:prstGeom prst="rect">
             <a:avLst/>
@@ -5175,7 +5501,7 @@
         </p:nvSpPr>
         <p:spPr>
           <a:xfrm>
-            <a:off x="7114673" y="3429000"/>
+            <a:off x="6465828" y="3427163"/>
             <a:ext cx="4169022" cy="2848205"/>
           </a:xfrm>
           <a:prstGeom prst="rect">
@@ -5593,7 +5919,7 @@
         <p:cNvPr id="1" name="">
           <a:extLst>
             <a:ext uri="{FF2B5EF4-FFF2-40B4-BE49-F238E27FC236}">
-              <a16:creationId xmlns:a16="http://schemas.microsoft.com/office/drawing/2014/main" id="{A00A857C-39C4-87D4-DA50-CD0D744315A3}"/>
+              <a16:creationId xmlns:a16="http://schemas.microsoft.com/office/drawing/2014/main" id="{F8811F01-AD10-7662-CB7A-305635CE721D}"/>
             </a:ext>
           </a:extLst>
         </p:cNvPr>
@@ -5613,7 +5939,7 @@
           <p:cNvPr id="5" name="標題 4">
             <a:extLst>
               <a:ext uri="{FF2B5EF4-FFF2-40B4-BE49-F238E27FC236}">
-                <a16:creationId xmlns:a16="http://schemas.microsoft.com/office/drawing/2014/main" id="{D49023E7-F124-8FB7-88DA-83BA3DAA8DCC}"/>
+                <a16:creationId xmlns:a16="http://schemas.microsoft.com/office/drawing/2014/main" id="{64E6F712-69C6-4E82-FE82-26F958DD06B9}"/>
               </a:ext>
             </a:extLst>
           </p:cNvPr>
@@ -5647,7 +5973,7 @@
                 <a:latin typeface="微軟正黑體" panose="020B0604030504040204" pitchFamily="34" charset="-120"/>
                 <a:ea typeface="微軟正黑體" panose="020B0604030504040204" pitchFamily="34" charset="-120"/>
               </a:rPr>
-              <a:t>實際操作</a:t>
+              <a:t>實作截圖</a:t>
             </a:r>
           </a:p>
         </p:txBody>
@@ -5657,267 +5983,7 @@
           <p:cNvPr id="7" name="直線接點 6">
             <a:extLst>
               <a:ext uri="{FF2B5EF4-FFF2-40B4-BE49-F238E27FC236}">
-                <a16:creationId xmlns:a16="http://schemas.microsoft.com/office/drawing/2014/main" id="{C40BC236-5A03-7B21-8AE0-7C38CF38EF8F}"/>
-              </a:ext>
-            </a:extLst>
-          </p:cNvPr>
-          <p:cNvCxnSpPr>
-            <a:cxnSpLocks/>
-          </p:cNvCxnSpPr>
-          <p:nvPr/>
-        </p:nvCxnSpPr>
-        <p:spPr>
-          <a:xfrm>
-            <a:off x="538480" y="1249680"/>
-            <a:ext cx="11115040" cy="0"/>
-          </a:xfrm>
-          <a:prstGeom prst="line">
-            <a:avLst/>
-          </a:prstGeom>
-          <a:ln>
-            <a:solidFill>
-              <a:schemeClr val="accent1">
-                <a:lumMod val="50000"/>
-              </a:schemeClr>
-            </a:solidFill>
-          </a:ln>
-        </p:spPr>
-        <p:style>
-          <a:lnRef idx="3">
-            <a:schemeClr val="accent1"/>
-          </a:lnRef>
-          <a:fillRef idx="0">
-            <a:schemeClr val="accent1"/>
-          </a:fillRef>
-          <a:effectRef idx="2">
-            <a:schemeClr val="accent1"/>
-          </a:effectRef>
-          <a:fontRef idx="minor">
-            <a:schemeClr val="tx1"/>
-          </a:fontRef>
-        </p:style>
-      </p:cxnSp>
-      <p:sp>
-        <p:nvSpPr>
-          <p:cNvPr id="4" name="文字方塊 3">
-            <a:extLst>
-              <a:ext uri="{FF2B5EF4-FFF2-40B4-BE49-F238E27FC236}">
-                <a16:creationId xmlns:a16="http://schemas.microsoft.com/office/drawing/2014/main" id="{387341E8-841B-44F5-420F-0679D74842FA}"/>
-              </a:ext>
-            </a:extLst>
-          </p:cNvPr>
-          <p:cNvSpPr txBox="1"/>
-          <p:nvPr/>
-        </p:nvSpPr>
-        <p:spPr>
-          <a:xfrm>
-            <a:off x="3048000" y="2472592"/>
-            <a:ext cx="6094476" cy="523220"/>
-          </a:xfrm>
-          <a:prstGeom prst="rect">
-            <a:avLst/>
-          </a:prstGeom>
-          <a:noFill/>
-        </p:spPr>
-        <p:txBody>
-          <a:bodyPr wrap="square">
-            <a:spAutoFit/>
-          </a:bodyPr>
-          <a:lstStyle/>
-          <a:p>
-            <a:pPr algn="ctr"/>
-            <a:r>
-              <a:rPr lang="zh-TW" altLang="en-US" sz="2800" b="1" dirty="0">
-                <a:solidFill>
-                  <a:schemeClr val="accent1">
-                    <a:lumMod val="50000"/>
-                  </a:schemeClr>
-                </a:solidFill>
-                <a:latin typeface="微軟正黑體" panose="020B0604030504040204" pitchFamily="34" charset="-120"/>
-                <a:ea typeface="微軟正黑體" panose="020B0604030504040204" pitchFamily="34" charset="-120"/>
-              </a:rPr>
-              <a:t>儀表板 </a:t>
-            </a:r>
-            <a:r>
-              <a:rPr lang="en-US" altLang="zh-TW" sz="2800" b="1" dirty="0">
-                <a:solidFill>
-                  <a:schemeClr val="accent1">
-                    <a:lumMod val="50000"/>
-                  </a:schemeClr>
-                </a:solidFill>
-                <a:latin typeface="微軟正黑體" panose="020B0604030504040204" pitchFamily="34" charset="-120"/>
-                <a:ea typeface="微軟正黑體" panose="020B0604030504040204" pitchFamily="34" charset="-120"/>
-              </a:rPr>
-              <a:t>DEMO</a:t>
-            </a:r>
-          </a:p>
-        </p:txBody>
-      </p:sp>
-      <p:sp>
-        <p:nvSpPr>
-          <p:cNvPr id="6" name="文字方塊 5">
-            <a:extLst>
-              <a:ext uri="{FF2B5EF4-FFF2-40B4-BE49-F238E27FC236}">
-                <a16:creationId xmlns:a16="http://schemas.microsoft.com/office/drawing/2014/main" id="{CAA08505-B2BF-B0C2-4659-C4BCC6A0ADE4}"/>
-              </a:ext>
-            </a:extLst>
-          </p:cNvPr>
-          <p:cNvSpPr txBox="1"/>
-          <p:nvPr/>
-        </p:nvSpPr>
-        <p:spPr>
-          <a:xfrm>
-            <a:off x="3048000" y="3523779"/>
-            <a:ext cx="6096000" cy="1200329"/>
-          </a:xfrm>
-          <a:prstGeom prst="rect">
-            <a:avLst/>
-          </a:prstGeom>
-          <a:noFill/>
-        </p:spPr>
-        <p:txBody>
-          <a:bodyPr wrap="square">
-            <a:spAutoFit/>
-          </a:bodyPr>
-          <a:lstStyle/>
-          <a:p>
-            <a:r>
-              <a:rPr lang="zh-TW" altLang="en-US" dirty="0">
-                <a:solidFill>
-                  <a:schemeClr val="accent1">
-                    <a:lumMod val="50000"/>
-                  </a:schemeClr>
-                </a:solidFill>
-                <a:hlinkClick r:id="rId2">
-                  <a:extLst>
-                    <a:ext uri="{A12FA001-AC4F-418D-AE19-62706E023703}">
-                      <ahyp:hlinkClr xmlns:ahyp="http://schemas.microsoft.com/office/drawing/2018/hyperlinkcolor" val="tx"/>
-                    </a:ext>
-                  </a:extLst>
-                </a:hlinkClick>
-              </a:rPr>
-              <a:t>https://app.powerbi.com/view?r=eyJrIjoiMDA3Nzg3ZTItNWM1My00YTZlLTgwN2MtMWM4NTJiYzg3OTIyIiwidCI6IjQ1NmIwZjQ0LWMyNjItNDNjMC1hZGM2LWUzN2MwNTVhZWNkMCIsImMiOjEwfQ%3D%3D</a:t>
-            </a:r>
-            <a:endParaRPr lang="zh-TW" altLang="en-US" dirty="0">
-              <a:solidFill>
-                <a:schemeClr val="accent1">
-                  <a:lumMod val="50000"/>
-                </a:schemeClr>
-              </a:solidFill>
-            </a:endParaRPr>
-          </a:p>
-        </p:txBody>
-      </p:sp>
-    </p:spTree>
-    <p:extLst>
-      <p:ext uri="{BB962C8B-B14F-4D97-AF65-F5344CB8AC3E}">
-        <p14:creationId xmlns:p14="http://schemas.microsoft.com/office/powerpoint/2010/main" val="2027601596"/>
-      </p:ext>
-    </p:extLst>
-  </p:cSld>
-  <p:clrMapOvr>
-    <a:masterClrMapping/>
-  </p:clrMapOvr>
-</p:sld>
-</file>
-
-<file path=ppt/slides/slide5.xml><?xml version="1.0" encoding="utf-8"?>
-<p:sld xmlns:a="http://schemas.openxmlformats.org/drawingml/2006/main" xmlns:r="http://schemas.openxmlformats.org/officeDocument/2006/relationships" xmlns:p="http://schemas.openxmlformats.org/presentationml/2006/main">
-  <p:cSld>
-    <p:bg>
-      <p:bgPr>
-        <a:solidFill>
-          <a:schemeClr val="tx2">
-            <a:lumMod val="10000"/>
-            <a:lumOff val="90000"/>
-          </a:schemeClr>
-        </a:solidFill>
-        <a:effectLst/>
-      </p:bgPr>
-    </p:bg>
-    <p:spTree>
-      <p:nvGrpSpPr>
-        <p:cNvPr id="1" name="">
-          <a:extLst>
-            <a:ext uri="{FF2B5EF4-FFF2-40B4-BE49-F238E27FC236}">
-              <a16:creationId xmlns:a16="http://schemas.microsoft.com/office/drawing/2014/main" id="{163800BB-5565-D1A8-CA09-77827450D441}"/>
-            </a:ext>
-          </a:extLst>
-        </p:cNvPr>
-        <p:cNvGrpSpPr/>
-        <p:nvPr/>
-      </p:nvGrpSpPr>
-      <p:grpSpPr>
-        <a:xfrm>
-          <a:off x="0" y="0"/>
-          <a:ext cx="0" cy="0"/>
-          <a:chOff x="0" y="0"/>
-          <a:chExt cx="0" cy="0"/>
-        </a:xfrm>
-      </p:grpSpPr>
-      <p:sp>
-        <p:nvSpPr>
-          <p:cNvPr id="5" name="標題 4">
-            <a:extLst>
-              <a:ext uri="{FF2B5EF4-FFF2-40B4-BE49-F238E27FC236}">
-                <a16:creationId xmlns:a16="http://schemas.microsoft.com/office/drawing/2014/main" id="{B6D9DCCD-B774-36A1-26EF-1BC6477C1597}"/>
-              </a:ext>
-            </a:extLst>
-          </p:cNvPr>
-          <p:cNvSpPr>
-            <a:spLocks noGrp="1"/>
-          </p:cNvSpPr>
-          <p:nvPr>
-            <p:ph type="ctrTitle"/>
-          </p:nvPr>
-        </p:nvSpPr>
-        <p:spPr>
-          <a:xfrm>
-            <a:off x="538480" y="223521"/>
-            <a:ext cx="11115040" cy="833120"/>
-          </a:xfrm>
-        </p:spPr>
-        <p:txBody>
-          <a:bodyPr>
-            <a:normAutofit/>
-          </a:bodyPr>
-          <a:lstStyle/>
-          <a:p>
-            <a:r>
-              <a:rPr lang="en-US" altLang="zh-TW" sz="4000" b="1" dirty="0">
-                <a:solidFill>
-                  <a:schemeClr val="tx2">
-                    <a:lumMod val="90000"/>
-                    <a:lumOff val="10000"/>
-                  </a:schemeClr>
-                </a:solidFill>
-                <a:latin typeface="微軟正黑體" panose="020B0604030504040204" pitchFamily="34" charset="-120"/>
-                <a:ea typeface="微軟正黑體" panose="020B0604030504040204" pitchFamily="34" charset="-120"/>
-              </a:rPr>
-              <a:t>GIT </a:t>
-            </a:r>
-            <a:r>
-              <a:rPr lang="zh-TW" altLang="en-US" sz="4000" b="1" dirty="0">
-                <a:solidFill>
-                  <a:schemeClr val="tx2">
-                    <a:lumMod val="90000"/>
-                    <a:lumOff val="10000"/>
-                  </a:schemeClr>
-                </a:solidFill>
-                <a:latin typeface="微軟正黑體" panose="020B0604030504040204" pitchFamily="34" charset="-120"/>
-                <a:ea typeface="微軟正黑體" panose="020B0604030504040204" pitchFamily="34" charset="-120"/>
-              </a:rPr>
-              <a:t>版本紀錄</a:t>
-            </a:r>
-          </a:p>
-        </p:txBody>
-      </p:sp>
-      <p:cxnSp>
-        <p:nvCxnSpPr>
-          <p:cNvPr id="7" name="直線接點 6">
-            <a:extLst>
-              <a:ext uri="{FF2B5EF4-FFF2-40B4-BE49-F238E27FC236}">
-                <a16:creationId xmlns:a16="http://schemas.microsoft.com/office/drawing/2014/main" id="{316DB3C5-2469-5463-A7D6-AF659F949A25}"/>
+                <a16:creationId xmlns:a16="http://schemas.microsoft.com/office/drawing/2014/main" id="{E1452788-D89F-7690-B7B0-05058DCBADCB}"/>
               </a:ext>
             </a:extLst>
           </p:cNvPr>
@@ -5962,7 +6028,7 @@
           <p:cNvPr id="3" name="圖片 2">
             <a:extLst>
               <a:ext uri="{FF2B5EF4-FFF2-40B4-BE49-F238E27FC236}">
-                <a16:creationId xmlns:a16="http://schemas.microsoft.com/office/drawing/2014/main" id="{CEE97A7F-D95E-69D5-204B-EA2D559F0FFD}"/>
+                <a16:creationId xmlns:a16="http://schemas.microsoft.com/office/drawing/2014/main" id="{86CB18BA-52FD-7495-232B-C44A1C8C411E}"/>
               </a:ext>
             </a:extLst>
           </p:cNvPr>
@@ -5972,33 +6038,832 @@
           <p:nvPr/>
         </p:nvPicPr>
         <p:blipFill>
-          <a:blip r:embed="rId2">
-            <a:extLst>
-              <a:ext uri="{28A0092B-C50C-407E-A947-70E740481C1C}">
-                <a14:useLocalDpi xmlns:a14="http://schemas.microsoft.com/office/drawing/2010/main" val="0"/>
-              </a:ext>
-            </a:extLst>
-          </a:blip>
+          <a:blip r:embed="rId2"/>
+          <a:srcRect l="16209"/>
           <a:stretch>
             <a:fillRect/>
           </a:stretch>
         </p:blipFill>
         <p:spPr>
           <a:xfrm>
-            <a:off x="1076067" y="2464908"/>
-            <a:ext cx="10039866" cy="3143412"/>
+            <a:off x="2041401" y="1360666"/>
+            <a:ext cx="8109198" cy="5416828"/>
           </a:xfrm>
           <a:prstGeom prst="rect">
             <a:avLst/>
           </a:prstGeom>
         </p:spPr>
       </p:pic>
+    </p:spTree>
+    <p:extLst>
+      <p:ext uri="{BB962C8B-B14F-4D97-AF65-F5344CB8AC3E}">
+        <p14:creationId xmlns:p14="http://schemas.microsoft.com/office/powerpoint/2010/main" val="2787629452"/>
+      </p:ext>
+    </p:extLst>
+  </p:cSld>
+  <p:clrMapOvr>
+    <a:masterClrMapping/>
+  </p:clrMapOvr>
+</p:sld>
+</file>
+
+<file path=ppt/slides/slide5.xml><?xml version="1.0" encoding="utf-8"?>
+<p:sld xmlns:a="http://schemas.openxmlformats.org/drawingml/2006/main" xmlns:r="http://schemas.openxmlformats.org/officeDocument/2006/relationships" xmlns:p="http://schemas.openxmlformats.org/presentationml/2006/main">
+  <p:cSld>
+    <p:bg>
+      <p:bgPr>
+        <a:solidFill>
+          <a:schemeClr val="tx2">
+            <a:lumMod val="10000"/>
+            <a:lumOff val="90000"/>
+          </a:schemeClr>
+        </a:solidFill>
+        <a:effectLst/>
+      </p:bgPr>
+    </p:bg>
+    <p:spTree>
+      <p:nvGrpSpPr>
+        <p:cNvPr id="1" name="">
+          <a:extLst>
+            <a:ext uri="{FF2B5EF4-FFF2-40B4-BE49-F238E27FC236}">
+              <a16:creationId xmlns:a16="http://schemas.microsoft.com/office/drawing/2014/main" id="{A00A857C-39C4-87D4-DA50-CD0D744315A3}"/>
+            </a:ext>
+          </a:extLst>
+        </p:cNvPr>
+        <p:cNvGrpSpPr/>
+        <p:nvPr/>
+      </p:nvGrpSpPr>
+      <p:grpSpPr>
+        <a:xfrm>
+          <a:off x="0" y="0"/>
+          <a:ext cx="0" cy="0"/>
+          <a:chOff x="0" y="0"/>
+          <a:chExt cx="0" cy="0"/>
+        </a:xfrm>
+      </p:grpSpPr>
+      <p:sp>
+        <p:nvSpPr>
+          <p:cNvPr id="5" name="標題 4">
+            <a:extLst>
+              <a:ext uri="{FF2B5EF4-FFF2-40B4-BE49-F238E27FC236}">
+                <a16:creationId xmlns:a16="http://schemas.microsoft.com/office/drawing/2014/main" id="{D49023E7-F124-8FB7-88DA-83BA3DAA8DCC}"/>
+              </a:ext>
+            </a:extLst>
+          </p:cNvPr>
+          <p:cNvSpPr>
+            <a:spLocks noGrp="1"/>
+          </p:cNvSpPr>
+          <p:nvPr>
+            <p:ph type="ctrTitle"/>
+          </p:nvPr>
+        </p:nvSpPr>
+        <p:spPr>
+          <a:xfrm>
+            <a:off x="538480" y="223521"/>
+            <a:ext cx="11115040" cy="833120"/>
+          </a:xfrm>
+        </p:spPr>
+        <p:txBody>
+          <a:bodyPr>
+            <a:normAutofit/>
+          </a:bodyPr>
+          <a:lstStyle/>
+          <a:p>
+            <a:r>
+              <a:rPr lang="zh-TW" altLang="en-US" sz="4000" b="1" dirty="0">
+                <a:solidFill>
+                  <a:schemeClr val="tx2">
+                    <a:lumMod val="90000"/>
+                    <a:lumOff val="10000"/>
+                  </a:schemeClr>
+                </a:solidFill>
+                <a:latin typeface="微軟正黑體" panose="020B0604030504040204" pitchFamily="34" charset="-120"/>
+                <a:ea typeface="微軟正黑體" panose="020B0604030504040204" pitchFamily="34" charset="-120"/>
+              </a:rPr>
+              <a:t>實作截圖</a:t>
+            </a:r>
+          </a:p>
+        </p:txBody>
+      </p:sp>
+      <p:cxnSp>
+        <p:nvCxnSpPr>
+          <p:cNvPr id="7" name="直線接點 6">
+            <a:extLst>
+              <a:ext uri="{FF2B5EF4-FFF2-40B4-BE49-F238E27FC236}">
+                <a16:creationId xmlns:a16="http://schemas.microsoft.com/office/drawing/2014/main" id="{C40BC236-5A03-7B21-8AE0-7C38CF38EF8F}"/>
+              </a:ext>
+            </a:extLst>
+          </p:cNvPr>
+          <p:cNvCxnSpPr>
+            <a:cxnSpLocks/>
+          </p:cNvCxnSpPr>
+          <p:nvPr/>
+        </p:nvCxnSpPr>
+        <p:spPr>
+          <a:xfrm>
+            <a:off x="538480" y="1249680"/>
+            <a:ext cx="11115040" cy="0"/>
+          </a:xfrm>
+          <a:prstGeom prst="line">
+            <a:avLst/>
+          </a:prstGeom>
+          <a:ln>
+            <a:solidFill>
+              <a:schemeClr val="accent1">
+                <a:lumMod val="50000"/>
+              </a:schemeClr>
+            </a:solidFill>
+          </a:ln>
+        </p:spPr>
+        <p:style>
+          <a:lnRef idx="3">
+            <a:schemeClr val="accent1"/>
+          </a:lnRef>
+          <a:fillRef idx="0">
+            <a:schemeClr val="accent1"/>
+          </a:fillRef>
+          <a:effectRef idx="2">
+            <a:schemeClr val="accent1"/>
+          </a:effectRef>
+          <a:fontRef idx="minor">
+            <a:schemeClr val="tx1"/>
+          </a:fontRef>
+        </p:style>
+      </p:cxnSp>
+      <p:pic>
+        <p:nvPicPr>
+          <p:cNvPr id="9" name="圖片 8">
+            <a:extLst>
+              <a:ext uri="{FF2B5EF4-FFF2-40B4-BE49-F238E27FC236}">
+                <a16:creationId xmlns:a16="http://schemas.microsoft.com/office/drawing/2014/main" id="{AB04FBD2-9E8F-240F-C77A-AF99EEB47B96}"/>
+              </a:ext>
+            </a:extLst>
+          </p:cNvPr>
+          <p:cNvPicPr>
+            <a:picLocks noChangeAspect="1"/>
+          </p:cNvPicPr>
+          <p:nvPr/>
+        </p:nvPicPr>
+        <p:blipFill>
+          <a:blip r:embed="rId2"/>
+          <a:srcRect l="16256"/>
+          <a:stretch>
+            <a:fillRect/>
+          </a:stretch>
+        </p:blipFill>
+        <p:spPr>
+          <a:xfrm>
+            <a:off x="2049021" y="1363459"/>
+            <a:ext cx="8093958" cy="5429529"/>
+          </a:xfrm>
+          <a:prstGeom prst="rect">
+            <a:avLst/>
+          </a:prstGeom>
+        </p:spPr>
+      </p:pic>
+    </p:spTree>
+    <p:extLst>
+      <p:ext uri="{BB962C8B-B14F-4D97-AF65-F5344CB8AC3E}">
+        <p14:creationId xmlns:p14="http://schemas.microsoft.com/office/powerpoint/2010/main" val="2027601596"/>
+      </p:ext>
+    </p:extLst>
+  </p:cSld>
+  <p:clrMapOvr>
+    <a:masterClrMapping/>
+  </p:clrMapOvr>
+</p:sld>
+</file>
+
+<file path=ppt/slides/slide6.xml><?xml version="1.0" encoding="utf-8"?>
+<p:sld xmlns:a="http://schemas.openxmlformats.org/drawingml/2006/main" xmlns:r="http://schemas.openxmlformats.org/officeDocument/2006/relationships" xmlns:p="http://schemas.openxmlformats.org/presentationml/2006/main">
+  <p:cSld>
+    <p:bg>
+      <p:bgPr>
+        <a:solidFill>
+          <a:schemeClr val="tx2">
+            <a:lumMod val="10000"/>
+            <a:lumOff val="90000"/>
+          </a:schemeClr>
+        </a:solidFill>
+        <a:effectLst/>
+      </p:bgPr>
+    </p:bg>
+    <p:spTree>
+      <p:nvGrpSpPr>
+        <p:cNvPr id="1" name="">
+          <a:extLst>
+            <a:ext uri="{FF2B5EF4-FFF2-40B4-BE49-F238E27FC236}">
+              <a16:creationId xmlns:a16="http://schemas.microsoft.com/office/drawing/2014/main" id="{AEC8DDA1-4098-6983-8BBB-B2F7ABE62A65}"/>
+            </a:ext>
+          </a:extLst>
+        </p:cNvPr>
+        <p:cNvGrpSpPr/>
+        <p:nvPr/>
+      </p:nvGrpSpPr>
+      <p:grpSpPr>
+        <a:xfrm>
+          <a:off x="0" y="0"/>
+          <a:ext cx="0" cy="0"/>
+          <a:chOff x="0" y="0"/>
+          <a:chExt cx="0" cy="0"/>
+        </a:xfrm>
+      </p:grpSpPr>
+      <p:sp>
+        <p:nvSpPr>
+          <p:cNvPr id="5" name="標題 4">
+            <a:extLst>
+              <a:ext uri="{FF2B5EF4-FFF2-40B4-BE49-F238E27FC236}">
+                <a16:creationId xmlns:a16="http://schemas.microsoft.com/office/drawing/2014/main" id="{1B7CA519-F415-D7DD-1194-762A8111E25F}"/>
+              </a:ext>
+            </a:extLst>
+          </p:cNvPr>
+          <p:cNvSpPr>
+            <a:spLocks noGrp="1"/>
+          </p:cNvSpPr>
+          <p:nvPr>
+            <p:ph type="ctrTitle"/>
+          </p:nvPr>
+        </p:nvSpPr>
+        <p:spPr>
+          <a:xfrm>
+            <a:off x="538480" y="223521"/>
+            <a:ext cx="11115040" cy="833120"/>
+          </a:xfrm>
+        </p:spPr>
+        <p:txBody>
+          <a:bodyPr>
+            <a:normAutofit/>
+          </a:bodyPr>
+          <a:lstStyle/>
+          <a:p>
+            <a:r>
+              <a:rPr lang="zh-TW" altLang="en-US" sz="4000" b="1" dirty="0">
+                <a:solidFill>
+                  <a:schemeClr val="tx2">
+                    <a:lumMod val="90000"/>
+                    <a:lumOff val="10000"/>
+                  </a:schemeClr>
+                </a:solidFill>
+                <a:latin typeface="微軟正黑體" panose="020B0604030504040204" pitchFamily="34" charset="-120"/>
+                <a:ea typeface="微軟正黑體" panose="020B0604030504040204" pitchFamily="34" charset="-120"/>
+              </a:rPr>
+              <a:t>實作截圖</a:t>
+            </a:r>
+          </a:p>
+        </p:txBody>
+      </p:sp>
+      <p:cxnSp>
+        <p:nvCxnSpPr>
+          <p:cNvPr id="7" name="直線接點 6">
+            <a:extLst>
+              <a:ext uri="{FF2B5EF4-FFF2-40B4-BE49-F238E27FC236}">
+                <a16:creationId xmlns:a16="http://schemas.microsoft.com/office/drawing/2014/main" id="{F2D2F776-B182-CAD3-6C06-BD5ECEB2F782}"/>
+              </a:ext>
+            </a:extLst>
+          </p:cNvPr>
+          <p:cNvCxnSpPr>
+            <a:cxnSpLocks/>
+          </p:cNvCxnSpPr>
+          <p:nvPr/>
+        </p:nvCxnSpPr>
+        <p:spPr>
+          <a:xfrm>
+            <a:off x="538480" y="1249680"/>
+            <a:ext cx="11115040" cy="0"/>
+          </a:xfrm>
+          <a:prstGeom prst="line">
+            <a:avLst/>
+          </a:prstGeom>
+          <a:ln>
+            <a:solidFill>
+              <a:schemeClr val="accent1">
+                <a:lumMod val="50000"/>
+              </a:schemeClr>
+            </a:solidFill>
+          </a:ln>
+        </p:spPr>
+        <p:style>
+          <a:lnRef idx="3">
+            <a:schemeClr val="accent1"/>
+          </a:lnRef>
+          <a:fillRef idx="0">
+            <a:schemeClr val="accent1"/>
+          </a:fillRef>
+          <a:effectRef idx="2">
+            <a:schemeClr val="accent1"/>
+          </a:effectRef>
+          <a:fontRef idx="minor">
+            <a:schemeClr val="tx1"/>
+          </a:fontRef>
+        </p:style>
+      </p:cxnSp>
+      <p:pic>
+        <p:nvPicPr>
+          <p:cNvPr id="3" name="圖片 2">
+            <a:extLst>
+              <a:ext uri="{FF2B5EF4-FFF2-40B4-BE49-F238E27FC236}">
+                <a16:creationId xmlns:a16="http://schemas.microsoft.com/office/drawing/2014/main" id="{5404BADE-A680-0A74-8DD5-3801F91A2C89}"/>
+              </a:ext>
+            </a:extLst>
+          </p:cNvPr>
+          <p:cNvPicPr>
+            <a:picLocks noChangeAspect="1"/>
+          </p:cNvPicPr>
+          <p:nvPr/>
+        </p:nvPicPr>
+        <p:blipFill>
+          <a:blip r:embed="rId2"/>
+          <a:srcRect l="15900"/>
+          <a:stretch>
+            <a:fillRect/>
+          </a:stretch>
+        </p:blipFill>
+        <p:spPr>
+          <a:xfrm>
+            <a:off x="2039813" y="1363841"/>
+            <a:ext cx="8112373" cy="5410478"/>
+          </a:xfrm>
+          <a:prstGeom prst="rect">
+            <a:avLst/>
+          </a:prstGeom>
+        </p:spPr>
+      </p:pic>
+    </p:spTree>
+    <p:extLst>
+      <p:ext uri="{BB962C8B-B14F-4D97-AF65-F5344CB8AC3E}">
+        <p14:creationId xmlns:p14="http://schemas.microsoft.com/office/powerpoint/2010/main" val="447743623"/>
+      </p:ext>
+    </p:extLst>
+  </p:cSld>
+  <p:clrMapOvr>
+    <a:masterClrMapping/>
+  </p:clrMapOvr>
+</p:sld>
+</file>
+
+<file path=ppt/slides/slide7.xml><?xml version="1.0" encoding="utf-8"?>
+<p:sld xmlns:a="http://schemas.openxmlformats.org/drawingml/2006/main" xmlns:r="http://schemas.openxmlformats.org/officeDocument/2006/relationships" xmlns:p="http://schemas.openxmlformats.org/presentationml/2006/main">
+  <p:cSld>
+    <p:bg>
+      <p:bgPr>
+        <a:solidFill>
+          <a:schemeClr val="tx2">
+            <a:lumMod val="10000"/>
+            <a:lumOff val="90000"/>
+          </a:schemeClr>
+        </a:solidFill>
+        <a:effectLst/>
+      </p:bgPr>
+    </p:bg>
+    <p:spTree>
+      <p:nvGrpSpPr>
+        <p:cNvPr id="1" name="">
+          <a:extLst>
+            <a:ext uri="{FF2B5EF4-FFF2-40B4-BE49-F238E27FC236}">
+              <a16:creationId xmlns:a16="http://schemas.microsoft.com/office/drawing/2014/main" id="{EF23532F-7DE5-7C4F-5D94-9A7B6A7696C0}"/>
+            </a:ext>
+          </a:extLst>
+        </p:cNvPr>
+        <p:cNvGrpSpPr/>
+        <p:nvPr/>
+      </p:nvGrpSpPr>
+      <p:grpSpPr>
+        <a:xfrm>
+          <a:off x="0" y="0"/>
+          <a:ext cx="0" cy="0"/>
+          <a:chOff x="0" y="0"/>
+          <a:chExt cx="0" cy="0"/>
+        </a:xfrm>
+      </p:grpSpPr>
+      <p:sp>
+        <p:nvSpPr>
+          <p:cNvPr id="5" name="標題 4">
+            <a:extLst>
+              <a:ext uri="{FF2B5EF4-FFF2-40B4-BE49-F238E27FC236}">
+                <a16:creationId xmlns:a16="http://schemas.microsoft.com/office/drawing/2014/main" id="{73620D54-8825-F62C-825C-9ADD83B7DD2D}"/>
+              </a:ext>
+            </a:extLst>
+          </p:cNvPr>
+          <p:cNvSpPr>
+            <a:spLocks noGrp="1"/>
+          </p:cNvSpPr>
+          <p:nvPr>
+            <p:ph type="ctrTitle"/>
+          </p:nvPr>
+        </p:nvSpPr>
+        <p:spPr>
+          <a:xfrm>
+            <a:off x="538480" y="223521"/>
+            <a:ext cx="11115040" cy="833120"/>
+          </a:xfrm>
+        </p:spPr>
+        <p:txBody>
+          <a:bodyPr>
+            <a:normAutofit/>
+          </a:bodyPr>
+          <a:lstStyle/>
+          <a:p>
+            <a:r>
+              <a:rPr lang="zh-TW" altLang="en-US" sz="4000" b="1" dirty="0">
+                <a:solidFill>
+                  <a:schemeClr val="tx2">
+                    <a:lumMod val="90000"/>
+                    <a:lumOff val="10000"/>
+                  </a:schemeClr>
+                </a:solidFill>
+                <a:latin typeface="微軟正黑體" panose="020B0604030504040204" pitchFamily="34" charset="-120"/>
+                <a:ea typeface="微軟正黑體" panose="020B0604030504040204" pitchFamily="34" charset="-120"/>
+              </a:rPr>
+              <a:t>實作截圖</a:t>
+            </a:r>
+          </a:p>
+        </p:txBody>
+      </p:sp>
+      <p:cxnSp>
+        <p:nvCxnSpPr>
+          <p:cNvPr id="7" name="直線接點 6">
+            <a:extLst>
+              <a:ext uri="{FF2B5EF4-FFF2-40B4-BE49-F238E27FC236}">
+                <a16:creationId xmlns:a16="http://schemas.microsoft.com/office/drawing/2014/main" id="{5E1D47F2-ACCF-DC2E-7DE4-6E624028A673}"/>
+              </a:ext>
+            </a:extLst>
+          </p:cNvPr>
+          <p:cNvCxnSpPr>
+            <a:cxnSpLocks/>
+          </p:cNvCxnSpPr>
+          <p:nvPr/>
+        </p:nvCxnSpPr>
+        <p:spPr>
+          <a:xfrm>
+            <a:off x="538480" y="1249680"/>
+            <a:ext cx="11115040" cy="0"/>
+          </a:xfrm>
+          <a:prstGeom prst="line">
+            <a:avLst/>
+          </a:prstGeom>
+          <a:ln>
+            <a:solidFill>
+              <a:schemeClr val="accent1">
+                <a:lumMod val="50000"/>
+              </a:schemeClr>
+            </a:solidFill>
+          </a:ln>
+        </p:spPr>
+        <p:style>
+          <a:lnRef idx="3">
+            <a:schemeClr val="accent1"/>
+          </a:lnRef>
+          <a:fillRef idx="0">
+            <a:schemeClr val="accent1"/>
+          </a:fillRef>
+          <a:effectRef idx="2">
+            <a:schemeClr val="accent1"/>
+          </a:effectRef>
+          <a:fontRef idx="minor">
+            <a:schemeClr val="tx1"/>
+          </a:fontRef>
+        </p:style>
+      </p:cxnSp>
+      <p:pic>
+        <p:nvPicPr>
+          <p:cNvPr id="3" name="圖片 2">
+            <a:extLst>
+              <a:ext uri="{FF2B5EF4-FFF2-40B4-BE49-F238E27FC236}">
+                <a16:creationId xmlns:a16="http://schemas.microsoft.com/office/drawing/2014/main" id="{A4307F2D-00C9-0DB6-95E7-CA07AE37E20D}"/>
+              </a:ext>
+            </a:extLst>
+          </p:cNvPr>
+          <p:cNvPicPr>
+            <a:picLocks noChangeAspect="1"/>
+          </p:cNvPicPr>
+          <p:nvPr/>
+        </p:nvPicPr>
+        <p:blipFill>
+          <a:blip r:embed="rId2"/>
+          <a:srcRect l="16120"/>
+          <a:stretch>
+            <a:fillRect/>
+          </a:stretch>
+        </p:blipFill>
+        <p:spPr>
+          <a:xfrm>
+            <a:off x="2050397" y="1355374"/>
+            <a:ext cx="8091206" cy="5410478"/>
+          </a:xfrm>
+          <a:prstGeom prst="rect">
+            <a:avLst/>
+          </a:prstGeom>
+        </p:spPr>
+      </p:pic>
+    </p:spTree>
+    <p:extLst>
+      <p:ext uri="{BB962C8B-B14F-4D97-AF65-F5344CB8AC3E}">
+        <p14:creationId xmlns:p14="http://schemas.microsoft.com/office/powerpoint/2010/main" val="1217901577"/>
+      </p:ext>
+    </p:extLst>
+  </p:cSld>
+  <p:clrMapOvr>
+    <a:masterClrMapping/>
+  </p:clrMapOvr>
+</p:sld>
+</file>
+
+<file path=ppt/slides/slide8.xml><?xml version="1.0" encoding="utf-8"?>
+<p:sld xmlns:a="http://schemas.openxmlformats.org/drawingml/2006/main" xmlns:r="http://schemas.openxmlformats.org/officeDocument/2006/relationships" xmlns:p="http://schemas.openxmlformats.org/presentationml/2006/main">
+  <p:cSld>
+    <p:bg>
+      <p:bgPr>
+        <a:solidFill>
+          <a:schemeClr val="tx2">
+            <a:lumMod val="10000"/>
+            <a:lumOff val="90000"/>
+          </a:schemeClr>
+        </a:solidFill>
+        <a:effectLst/>
+      </p:bgPr>
+    </p:bg>
+    <p:spTree>
+      <p:nvGrpSpPr>
+        <p:cNvPr id="1" name="">
+          <a:extLst>
+            <a:ext uri="{FF2B5EF4-FFF2-40B4-BE49-F238E27FC236}">
+              <a16:creationId xmlns:a16="http://schemas.microsoft.com/office/drawing/2014/main" id="{D1BC7990-210B-006B-3603-2ECCCF76C9E0}"/>
+            </a:ext>
+          </a:extLst>
+        </p:cNvPr>
+        <p:cNvGrpSpPr/>
+        <p:nvPr/>
+      </p:nvGrpSpPr>
+      <p:grpSpPr>
+        <a:xfrm>
+          <a:off x="0" y="0"/>
+          <a:ext cx="0" cy="0"/>
+          <a:chOff x="0" y="0"/>
+          <a:chExt cx="0" cy="0"/>
+        </a:xfrm>
+      </p:grpSpPr>
+      <p:sp>
+        <p:nvSpPr>
+          <p:cNvPr id="5" name="標題 4">
+            <a:extLst>
+              <a:ext uri="{FF2B5EF4-FFF2-40B4-BE49-F238E27FC236}">
+                <a16:creationId xmlns:a16="http://schemas.microsoft.com/office/drawing/2014/main" id="{81A8955B-22FA-1F47-F0CE-A8593E833272}"/>
+              </a:ext>
+            </a:extLst>
+          </p:cNvPr>
+          <p:cNvSpPr>
+            <a:spLocks noGrp="1"/>
+          </p:cNvSpPr>
+          <p:nvPr>
+            <p:ph type="ctrTitle"/>
+          </p:nvPr>
+        </p:nvSpPr>
+        <p:spPr>
+          <a:xfrm>
+            <a:off x="538480" y="223521"/>
+            <a:ext cx="11115040" cy="833120"/>
+          </a:xfrm>
+        </p:spPr>
+        <p:txBody>
+          <a:bodyPr>
+            <a:normAutofit/>
+          </a:bodyPr>
+          <a:lstStyle/>
+          <a:p>
+            <a:r>
+              <a:rPr lang="zh-TW" altLang="en-US" sz="4000" b="1" dirty="0">
+                <a:solidFill>
+                  <a:schemeClr val="tx2">
+                    <a:lumMod val="90000"/>
+                    <a:lumOff val="10000"/>
+                  </a:schemeClr>
+                </a:solidFill>
+                <a:latin typeface="微軟正黑體" panose="020B0604030504040204" pitchFamily="34" charset="-120"/>
+                <a:ea typeface="微軟正黑體" panose="020B0604030504040204" pitchFamily="34" charset="-120"/>
+              </a:rPr>
+              <a:t>實作截圖</a:t>
+            </a:r>
+          </a:p>
+        </p:txBody>
+      </p:sp>
+      <p:cxnSp>
+        <p:nvCxnSpPr>
+          <p:cNvPr id="7" name="直線接點 6">
+            <a:extLst>
+              <a:ext uri="{FF2B5EF4-FFF2-40B4-BE49-F238E27FC236}">
+                <a16:creationId xmlns:a16="http://schemas.microsoft.com/office/drawing/2014/main" id="{C1197744-F576-F988-75D5-ACB528F9B6B1}"/>
+              </a:ext>
+            </a:extLst>
+          </p:cNvPr>
+          <p:cNvCxnSpPr>
+            <a:cxnSpLocks/>
+          </p:cNvCxnSpPr>
+          <p:nvPr/>
+        </p:nvCxnSpPr>
+        <p:spPr>
+          <a:xfrm>
+            <a:off x="538480" y="1249680"/>
+            <a:ext cx="11115040" cy="0"/>
+          </a:xfrm>
+          <a:prstGeom prst="line">
+            <a:avLst/>
+          </a:prstGeom>
+          <a:ln>
+            <a:solidFill>
+              <a:schemeClr val="accent1">
+                <a:lumMod val="50000"/>
+              </a:schemeClr>
+            </a:solidFill>
+          </a:ln>
+        </p:spPr>
+        <p:style>
+          <a:lnRef idx="3">
+            <a:schemeClr val="accent1"/>
+          </a:lnRef>
+          <a:fillRef idx="0">
+            <a:schemeClr val="accent1"/>
+          </a:fillRef>
+          <a:effectRef idx="2">
+            <a:schemeClr val="accent1"/>
+          </a:effectRef>
+          <a:fontRef idx="minor">
+            <a:schemeClr val="tx1"/>
+          </a:fontRef>
+        </p:style>
+      </p:cxnSp>
+      <p:pic>
+        <p:nvPicPr>
+          <p:cNvPr id="3" name="圖片 2">
+            <a:extLst>
+              <a:ext uri="{FF2B5EF4-FFF2-40B4-BE49-F238E27FC236}">
+                <a16:creationId xmlns:a16="http://schemas.microsoft.com/office/drawing/2014/main" id="{60E4581A-6BF8-20FF-7991-797E72FE5654}"/>
+              </a:ext>
+            </a:extLst>
+          </p:cNvPr>
+          <p:cNvPicPr>
+            <a:picLocks noChangeAspect="1"/>
+          </p:cNvPicPr>
+          <p:nvPr/>
+        </p:nvPicPr>
+        <p:blipFill>
+          <a:blip r:embed="rId2"/>
+          <a:srcRect l="16099"/>
+          <a:stretch>
+            <a:fillRect/>
+          </a:stretch>
+        </p:blipFill>
+        <p:spPr>
+          <a:xfrm>
+            <a:off x="2041401" y="1351522"/>
+            <a:ext cx="8109198" cy="5416828"/>
+          </a:xfrm>
+          <a:prstGeom prst="rect">
+            <a:avLst/>
+          </a:prstGeom>
+        </p:spPr>
+      </p:pic>
+    </p:spTree>
+    <p:extLst>
+      <p:ext uri="{BB962C8B-B14F-4D97-AF65-F5344CB8AC3E}">
+        <p14:creationId xmlns:p14="http://schemas.microsoft.com/office/powerpoint/2010/main" val="2040838702"/>
+      </p:ext>
+    </p:extLst>
+  </p:cSld>
+  <p:clrMapOvr>
+    <a:masterClrMapping/>
+  </p:clrMapOvr>
+</p:sld>
+</file>
+
+<file path=ppt/slides/slide9.xml><?xml version="1.0" encoding="utf-8"?>
+<p:sld xmlns:a="http://schemas.openxmlformats.org/drawingml/2006/main" xmlns:r="http://schemas.openxmlformats.org/officeDocument/2006/relationships" xmlns:p="http://schemas.openxmlformats.org/presentationml/2006/main">
+  <p:cSld>
+    <p:bg>
+      <p:bgPr>
+        <a:solidFill>
+          <a:schemeClr val="tx2">
+            <a:lumMod val="10000"/>
+            <a:lumOff val="90000"/>
+          </a:schemeClr>
+        </a:solidFill>
+        <a:effectLst/>
+      </p:bgPr>
+    </p:bg>
+    <p:spTree>
+      <p:nvGrpSpPr>
+        <p:cNvPr id="1" name="">
+          <a:extLst>
+            <a:ext uri="{FF2B5EF4-FFF2-40B4-BE49-F238E27FC236}">
+              <a16:creationId xmlns:a16="http://schemas.microsoft.com/office/drawing/2014/main" id="{898B73F6-170D-304E-52BD-4FD6A9E67473}"/>
+            </a:ext>
+          </a:extLst>
+        </p:cNvPr>
+        <p:cNvGrpSpPr/>
+        <p:nvPr/>
+      </p:nvGrpSpPr>
+      <p:grpSpPr>
+        <a:xfrm>
+          <a:off x="0" y="0"/>
+          <a:ext cx="0" cy="0"/>
+          <a:chOff x="0" y="0"/>
+          <a:chExt cx="0" cy="0"/>
+        </a:xfrm>
+      </p:grpSpPr>
+      <p:sp>
+        <p:nvSpPr>
+          <p:cNvPr id="5" name="標題 4">
+            <a:extLst>
+              <a:ext uri="{FF2B5EF4-FFF2-40B4-BE49-F238E27FC236}">
+                <a16:creationId xmlns:a16="http://schemas.microsoft.com/office/drawing/2014/main" id="{C1997A9D-AC90-2FC0-3028-677DD97D194D}"/>
+              </a:ext>
+            </a:extLst>
+          </p:cNvPr>
+          <p:cNvSpPr>
+            <a:spLocks noGrp="1"/>
+          </p:cNvSpPr>
+          <p:nvPr>
+            <p:ph type="ctrTitle"/>
+          </p:nvPr>
+        </p:nvSpPr>
+        <p:spPr>
+          <a:xfrm>
+            <a:off x="538480" y="223521"/>
+            <a:ext cx="11115040" cy="833120"/>
+          </a:xfrm>
+        </p:spPr>
+        <p:txBody>
+          <a:bodyPr>
+            <a:normAutofit/>
+          </a:bodyPr>
+          <a:lstStyle/>
+          <a:p>
+            <a:r>
+              <a:rPr lang="zh-TW" altLang="en-US" sz="4000" b="1" dirty="0">
+                <a:solidFill>
+                  <a:schemeClr val="tx2">
+                    <a:lumMod val="90000"/>
+                    <a:lumOff val="10000"/>
+                  </a:schemeClr>
+                </a:solidFill>
+                <a:latin typeface="微軟正黑體" panose="020B0604030504040204" pitchFamily="34" charset="-120"/>
+                <a:ea typeface="微軟正黑體" panose="020B0604030504040204" pitchFamily="34" charset="-120"/>
+              </a:rPr>
+              <a:t>實際操作</a:t>
+            </a:r>
+          </a:p>
+        </p:txBody>
+      </p:sp>
+      <p:cxnSp>
+        <p:nvCxnSpPr>
+          <p:cNvPr id="7" name="直線接點 6">
+            <a:extLst>
+              <a:ext uri="{FF2B5EF4-FFF2-40B4-BE49-F238E27FC236}">
+                <a16:creationId xmlns:a16="http://schemas.microsoft.com/office/drawing/2014/main" id="{5E13EEB0-80AE-CDC2-BB6F-5A4173B5A811}"/>
+              </a:ext>
+            </a:extLst>
+          </p:cNvPr>
+          <p:cNvCxnSpPr>
+            <a:cxnSpLocks/>
+          </p:cNvCxnSpPr>
+          <p:nvPr/>
+        </p:nvCxnSpPr>
+        <p:spPr>
+          <a:xfrm>
+            <a:off x="538480" y="1249680"/>
+            <a:ext cx="11115040" cy="0"/>
+          </a:xfrm>
+          <a:prstGeom prst="line">
+            <a:avLst/>
+          </a:prstGeom>
+          <a:ln>
+            <a:solidFill>
+              <a:schemeClr val="accent1">
+                <a:lumMod val="50000"/>
+              </a:schemeClr>
+            </a:solidFill>
+          </a:ln>
+        </p:spPr>
+        <p:style>
+          <a:lnRef idx="3">
+            <a:schemeClr val="accent1"/>
+          </a:lnRef>
+          <a:fillRef idx="0">
+            <a:schemeClr val="accent1"/>
+          </a:fillRef>
+          <a:effectRef idx="2">
+            <a:schemeClr val="accent1"/>
+          </a:effectRef>
+          <a:fontRef idx="minor">
+            <a:schemeClr val="tx1"/>
+          </a:fontRef>
+        </p:style>
+      </p:cxnSp>
       <p:sp>
         <p:nvSpPr>
           <p:cNvPr id="6" name="文字方塊 5">
             <a:extLst>
               <a:ext uri="{FF2B5EF4-FFF2-40B4-BE49-F238E27FC236}">
-                <a16:creationId xmlns:a16="http://schemas.microsoft.com/office/drawing/2014/main" id="{8842C115-4F9A-66ED-F82C-EA9D9EE8DE41}"/>
+                <a16:creationId xmlns:a16="http://schemas.microsoft.com/office/drawing/2014/main" id="{322B10AE-CC96-C7BB-767E-C3DDD6CBA435}"/>
               </a:ext>
             </a:extLst>
           </p:cNvPr>
@@ -6007,8 +6872,8 @@
         </p:nvSpPr>
         <p:spPr>
           <a:xfrm>
-            <a:off x="3048762" y="1442720"/>
-            <a:ext cx="6094476" cy="523220"/>
+            <a:off x="3048000" y="2828835"/>
+            <a:ext cx="6096000" cy="1200329"/>
           </a:xfrm>
           <a:prstGeom prst="rect">
             <a:avLst/>
@@ -6021,27 +6886,29 @@
           </a:bodyPr>
           <a:lstStyle/>
           <a:p>
-            <a:pPr algn="ctr"/>
-            <a:r>
-              <a:rPr lang="zh-TW" altLang="en-US" sz="2800" b="1" dirty="0">
+            <a:r>
+              <a:rPr lang="zh-TW" altLang="en-US" dirty="0">
                 <a:solidFill>
                   <a:schemeClr val="accent1">
                     <a:lumMod val="50000"/>
                   </a:schemeClr>
                 </a:solidFill>
-                <a:latin typeface="微軟正黑體" panose="020B0604030504040204" pitchFamily="34" charset="-120"/>
-                <a:ea typeface="微軟正黑體" panose="020B0604030504040204" pitchFamily="34" charset="-120"/>
+                <a:hlinkClick r:id="rId2">
+                  <a:extLst>
+                    <a:ext uri="{A12FA001-AC4F-418D-AE19-62706E023703}">
+                      <ahyp:hlinkClr xmlns:ahyp="http://schemas.microsoft.com/office/drawing/2018/hyperlinkcolor" val="tx"/>
+                    </a:ext>
+                  </a:extLst>
+                </a:hlinkClick>
               </a:rPr>
-              <a:t>還要再改，不是最新版</a:t>
-            </a:r>
-            <a:endParaRPr lang="en-US" altLang="zh-TW" sz="2800" b="1" dirty="0">
+              <a:t>https://app.powerbi.com/view?r=eyJrIjoiMDA3Nzg3ZTItNWM1My00YTZlLTgwN2MtMWM4NTJiYzg3OTIyIiwidCI6IjQ1NmIwZjQ0LWMyNjItNDNjMC1hZGM2LWUzN2MwNTVhZWNkMCIsImMiOjEwfQ%3D%3D</a:t>
+            </a:r>
+            <a:endParaRPr lang="zh-TW" altLang="en-US" dirty="0">
               <a:solidFill>
                 <a:schemeClr val="accent1">
                   <a:lumMod val="50000"/>
                 </a:schemeClr>
               </a:solidFill>
-              <a:latin typeface="微軟正黑體" panose="020B0604030504040204" pitchFamily="34" charset="-120"/>
-              <a:ea typeface="微軟正黑體" panose="020B0604030504040204" pitchFamily="34" charset="-120"/>
             </a:endParaRPr>
           </a:p>
         </p:txBody>
@@ -6049,7 +6916,7 @@
     </p:spTree>
     <p:extLst>
       <p:ext uri="{BB962C8B-B14F-4D97-AF65-F5344CB8AC3E}">
-        <p14:creationId xmlns:p14="http://schemas.microsoft.com/office/powerpoint/2010/main" val="3276122178"/>
+        <p14:creationId xmlns:p14="http://schemas.microsoft.com/office/powerpoint/2010/main" val="2185778571"/>
       </p:ext>
     </p:extLst>
   </p:cSld>

--- a/112111102_吳映潔.pptx
+++ b/112111102_吳映潔.pptx
@@ -137,7 +137,7 @@
   <pc:docChgLst>
     <pc:chgData name="映潔 吳" userId="ce8478969c818b5d" providerId="LiveId" clId="{02718E11-8C50-4BF9-8911-C664F181BE0F}"/>
     <pc:docChg chg="undo custSel addSld delSld modSld sldOrd">
-      <pc:chgData name="映潔 吳" userId="ce8478969c818b5d" providerId="LiveId" clId="{02718E11-8C50-4BF9-8911-C664F181BE0F}" dt="2026-06-14T08:16:47.375" v="838" actId="1076"/>
+      <pc:chgData name="映潔 吳" userId="ce8478969c818b5d" providerId="LiveId" clId="{02718E11-8C50-4BF9-8911-C664F181BE0F}" dt="2026-06-14T08:34:15.932" v="840" actId="478"/>
       <pc:docMkLst>
         <pc:docMk/>
       </pc:docMkLst>
@@ -517,7 +517,7 @@
         </pc:spChg>
       </pc:sldChg>
       <pc:sldChg chg="addSp delSp modSp add mod">
-        <pc:chgData name="映潔 吳" userId="ce8478969c818b5d" providerId="LiveId" clId="{02718E11-8C50-4BF9-8911-C664F181BE0F}" dt="2026-06-14T03:10:46.990" v="768" actId="1076"/>
+        <pc:chgData name="映潔 吳" userId="ce8478969c818b5d" providerId="LiveId" clId="{02718E11-8C50-4BF9-8911-C664F181BE0F}" dt="2026-06-14T08:34:15.932" v="840" actId="478"/>
         <pc:sldMkLst>
           <pc:docMk/>
           <pc:sldMk cId="3276122178" sldId="263"/>
@@ -530,16 +530,16 @@
             <ac:spMk id="3" creationId="{73A2830E-9C06-05A3-686F-A1EF06210A69}"/>
           </ac:spMkLst>
         </pc:spChg>
-        <pc:spChg chg="add mod">
-          <ac:chgData name="映潔 吳" userId="ce8478969c818b5d" providerId="LiveId" clId="{02718E11-8C50-4BF9-8911-C664F181BE0F}" dt="2026-06-14T03:10:46.990" v="768" actId="1076"/>
+        <pc:spChg chg="add del mod">
+          <ac:chgData name="映潔 吳" userId="ce8478969c818b5d" providerId="LiveId" clId="{02718E11-8C50-4BF9-8911-C664F181BE0F}" dt="2026-06-14T08:34:15.932" v="840" actId="478"/>
           <ac:spMkLst>
             <pc:docMk/>
             <pc:sldMk cId="3276122178" sldId="263"/>
             <ac:spMk id="6" creationId="{8842C115-4F9A-66ED-F82C-EA9D9EE8DE41}"/>
           </ac:spMkLst>
         </pc:spChg>
-        <pc:picChg chg="add mod">
-          <ac:chgData name="映潔 吳" userId="ce8478969c818b5d" providerId="LiveId" clId="{02718E11-8C50-4BF9-8911-C664F181BE0F}" dt="2026-06-14T03:10:29.079" v="724" actId="1076"/>
+        <pc:picChg chg="add del mod">
+          <ac:chgData name="映潔 吳" userId="ce8478969c818b5d" providerId="LiveId" clId="{02718E11-8C50-4BF9-8911-C664F181BE0F}" dt="2026-06-14T08:34:12.715" v="839" actId="478"/>
           <ac:picMkLst>
             <pc:docMk/>
             <pc:sldMk cId="3276122178" sldId="263"/>
@@ -4461,95 +4461,6 @@
           </a:fontRef>
         </p:style>
       </p:cxnSp>
-      <p:pic>
-        <p:nvPicPr>
-          <p:cNvPr id="3" name="圖片 2">
-            <a:extLst>
-              <a:ext uri="{FF2B5EF4-FFF2-40B4-BE49-F238E27FC236}">
-                <a16:creationId xmlns:a16="http://schemas.microsoft.com/office/drawing/2014/main" id="{CEE97A7F-D95E-69D5-204B-EA2D559F0FFD}"/>
-              </a:ext>
-            </a:extLst>
-          </p:cNvPr>
-          <p:cNvPicPr>
-            <a:picLocks noChangeAspect="1"/>
-          </p:cNvPicPr>
-          <p:nvPr/>
-        </p:nvPicPr>
-        <p:blipFill>
-          <a:blip r:embed="rId2">
-            <a:extLst>
-              <a:ext uri="{28A0092B-C50C-407E-A947-70E740481C1C}">
-                <a14:useLocalDpi xmlns:a14="http://schemas.microsoft.com/office/drawing/2010/main" val="0"/>
-              </a:ext>
-            </a:extLst>
-          </a:blip>
-          <a:stretch>
-            <a:fillRect/>
-          </a:stretch>
-        </p:blipFill>
-        <p:spPr>
-          <a:xfrm>
-            <a:off x="1076067" y="2464908"/>
-            <a:ext cx="10039866" cy="3143412"/>
-          </a:xfrm>
-          <a:prstGeom prst="rect">
-            <a:avLst/>
-          </a:prstGeom>
-        </p:spPr>
-      </p:pic>
-      <p:sp>
-        <p:nvSpPr>
-          <p:cNvPr id="6" name="文字方塊 5">
-            <a:extLst>
-              <a:ext uri="{FF2B5EF4-FFF2-40B4-BE49-F238E27FC236}">
-                <a16:creationId xmlns:a16="http://schemas.microsoft.com/office/drawing/2014/main" id="{8842C115-4F9A-66ED-F82C-EA9D9EE8DE41}"/>
-              </a:ext>
-            </a:extLst>
-          </p:cNvPr>
-          <p:cNvSpPr txBox="1"/>
-          <p:nvPr/>
-        </p:nvSpPr>
-        <p:spPr>
-          <a:xfrm>
-            <a:off x="3048762" y="1442720"/>
-            <a:ext cx="6094476" cy="523220"/>
-          </a:xfrm>
-          <a:prstGeom prst="rect">
-            <a:avLst/>
-          </a:prstGeom>
-          <a:noFill/>
-        </p:spPr>
-        <p:txBody>
-          <a:bodyPr wrap="square">
-            <a:spAutoFit/>
-          </a:bodyPr>
-          <a:lstStyle/>
-          <a:p>
-            <a:pPr algn="ctr"/>
-            <a:r>
-              <a:rPr lang="zh-TW" altLang="en-US" sz="2800" b="1" dirty="0">
-                <a:solidFill>
-                  <a:schemeClr val="accent1">
-                    <a:lumMod val="50000"/>
-                  </a:schemeClr>
-                </a:solidFill>
-                <a:latin typeface="微軟正黑體" panose="020B0604030504040204" pitchFamily="34" charset="-120"/>
-                <a:ea typeface="微軟正黑體" panose="020B0604030504040204" pitchFamily="34" charset="-120"/>
-              </a:rPr>
-              <a:t>還要再改，不是最新版</a:t>
-            </a:r>
-            <a:endParaRPr lang="en-US" altLang="zh-TW" sz="2800" b="1" dirty="0">
-              <a:solidFill>
-                <a:schemeClr val="accent1">
-                  <a:lumMod val="50000"/>
-                </a:schemeClr>
-              </a:solidFill>
-              <a:latin typeface="微軟正黑體" panose="020B0604030504040204" pitchFamily="34" charset="-120"/>
-              <a:ea typeface="微軟正黑體" panose="020B0604030504040204" pitchFamily="34" charset="-120"/>
-            </a:endParaRPr>
-          </a:p>
-        </p:txBody>
-      </p:sp>
     </p:spTree>
     <p:extLst>
       <p:ext uri="{BB962C8B-B14F-4D97-AF65-F5344CB8AC3E}">

--- a/112111102_吳映潔.pptx
+++ b/112111102_吳映潔.pptx
@@ -137,7 +137,7 @@
   <pc:docChgLst>
     <pc:chgData name="映潔 吳" userId="ce8478969c818b5d" providerId="LiveId" clId="{02718E11-8C50-4BF9-8911-C664F181BE0F}"/>
     <pc:docChg chg="undo custSel addSld delSld modSld sldOrd">
-      <pc:chgData name="映潔 吳" userId="ce8478969c818b5d" providerId="LiveId" clId="{02718E11-8C50-4BF9-8911-C664F181BE0F}" dt="2026-06-14T08:34:15.932" v="840" actId="478"/>
+      <pc:chgData name="映潔 吳" userId="ce8478969c818b5d" providerId="LiveId" clId="{02718E11-8C50-4BF9-8911-C664F181BE0F}" dt="2026-06-14T08:41:07.195" v="849" actId="1076"/>
       <pc:docMkLst>
         <pc:docMk/>
       </pc:docMkLst>
@@ -517,7 +517,7 @@
         </pc:spChg>
       </pc:sldChg>
       <pc:sldChg chg="addSp delSp modSp add mod">
-        <pc:chgData name="映潔 吳" userId="ce8478969c818b5d" providerId="LiveId" clId="{02718E11-8C50-4BF9-8911-C664F181BE0F}" dt="2026-06-14T08:34:15.932" v="840" actId="478"/>
+        <pc:chgData name="映潔 吳" userId="ce8478969c818b5d" providerId="LiveId" clId="{02718E11-8C50-4BF9-8911-C664F181BE0F}" dt="2026-06-14T08:41:07.195" v="849" actId="1076"/>
         <pc:sldMkLst>
           <pc:docMk/>
           <pc:sldMk cId="3276122178" sldId="263"/>
@@ -544,6 +544,14 @@
             <pc:docMk/>
             <pc:sldMk cId="3276122178" sldId="263"/>
             <ac:picMk id="3" creationId="{CEE97A7F-D95E-69D5-204B-EA2D559F0FFD}"/>
+          </ac:picMkLst>
+        </pc:picChg>
+        <pc:picChg chg="add mod">
+          <ac:chgData name="映潔 吳" userId="ce8478969c818b5d" providerId="LiveId" clId="{02718E11-8C50-4BF9-8911-C664F181BE0F}" dt="2026-06-14T08:41:07.195" v="849" actId="1076"/>
+          <ac:picMkLst>
+            <pc:docMk/>
+            <pc:sldMk cId="3276122178" sldId="263"/>
+            <ac:picMk id="3" creationId="{D05A70D5-8E0E-7999-4BD1-9B7863B0548E}"/>
           </ac:picMkLst>
         </pc:picChg>
       </pc:sldChg>
@@ -4461,6 +4469,36 @@
           </a:fontRef>
         </p:style>
       </p:cxnSp>
+      <p:pic>
+        <p:nvPicPr>
+          <p:cNvPr id="3" name="圖片 2">
+            <a:extLst>
+              <a:ext uri="{FF2B5EF4-FFF2-40B4-BE49-F238E27FC236}">
+                <a16:creationId xmlns:a16="http://schemas.microsoft.com/office/drawing/2014/main" id="{D05A70D5-8E0E-7999-4BD1-9B7863B0548E}"/>
+              </a:ext>
+            </a:extLst>
+          </p:cNvPr>
+          <p:cNvPicPr>
+            <a:picLocks noChangeAspect="1"/>
+          </p:cNvPicPr>
+          <p:nvPr/>
+        </p:nvPicPr>
+        <p:blipFill>
+          <a:blip r:embed="rId2"/>
+          <a:stretch>
+            <a:fillRect/>
+          </a:stretch>
+        </p:blipFill>
+        <p:spPr>
+          <a:xfrm>
+            <a:off x="1514239" y="1983761"/>
+            <a:ext cx="9163521" cy="4134062"/>
+          </a:xfrm>
+          <a:prstGeom prst="rect">
+            <a:avLst/>
+          </a:prstGeom>
+        </p:spPr>
+      </p:pic>
     </p:spTree>
     <p:extLst>
       <p:ext uri="{BB962C8B-B14F-4D97-AF65-F5344CB8AC3E}">

--- a/112111102_吳映潔.pptx
+++ b/112111102_吳映潔.pptx
@@ -124,20 +124,12 @@
 </p:presentation>
 </file>
 
-<file path=ppt/revisionInfo.xml><?xml version="1.0" encoding="utf-8"?>
-<p1510:revInfo xmlns:a="http://schemas.openxmlformats.org/drawingml/2006/main" xmlns:r="http://schemas.openxmlformats.org/officeDocument/2006/relationships" xmlns:p1510="http://schemas.microsoft.com/office/powerpoint/2015/10/main">
-  <p1510:revLst>
-    <p1510:client id="{F9B8B6BF-D384-4909-ADE4-41FF50F4634E}" v="9" dt="2026-06-14T01:30:16.947"/>
-  </p1510:revLst>
-</p1510:revInfo>
-</file>
-
 <file path=ppt/changesInfos/changesInfo1.xml><?xml version="1.0" encoding="utf-8"?>
 <pc:chgInfo xmlns:a="http://schemas.openxmlformats.org/drawingml/2006/main" xmlns:r="http://schemas.openxmlformats.org/officeDocument/2006/relationships" xmlns:ac="http://schemas.microsoft.com/office/drawing/2013/main/command" xmlns:pc="http://schemas.microsoft.com/office/powerpoint/2013/main/command">
   <pc:docChgLst>
     <pc:chgData name="映潔 吳" userId="ce8478969c818b5d" providerId="LiveId" clId="{02718E11-8C50-4BF9-8911-C664F181BE0F}"/>
     <pc:docChg chg="undo custSel addSld delSld modSld sldOrd">
-      <pc:chgData name="映潔 吳" userId="ce8478969c818b5d" providerId="LiveId" clId="{02718E11-8C50-4BF9-8911-C664F181BE0F}" dt="2026-06-14T08:41:07.195" v="849" actId="1076"/>
+      <pc:chgData name="映潔 吳" userId="ce8478969c818b5d" providerId="LiveId" clId="{02718E11-8C50-4BF9-8911-C664F181BE0F}" dt="2026-06-16T01:21:44.805" v="852" actId="1076"/>
       <pc:docMkLst>
         <pc:docMk/>
       </pc:docMkLst>
@@ -163,84 +155,6 @@
             <ac:spMk id="3" creationId="{95D43DE2-BEBC-8AAB-B48F-1B9B1C4C3145}"/>
           </ac:spMkLst>
         </pc:spChg>
-        <pc:spChg chg="add mod">
-          <ac:chgData name="映潔 吳" userId="ce8478969c818b5d" providerId="LiveId" clId="{02718E11-8C50-4BF9-8911-C664F181BE0F}" dt="2026-06-14T00:58:49.682" v="3"/>
-          <ac:spMkLst>
-            <pc:docMk/>
-            <pc:sldMk cId="1940510760" sldId="256"/>
-            <ac:spMk id="5" creationId="{C7FFDD88-788D-1203-9D0E-DB78005FFF24}"/>
-          </ac:spMkLst>
-        </pc:spChg>
-        <pc:spChg chg="add del mod">
-          <ac:chgData name="映潔 吳" userId="ce8478969c818b5d" providerId="LiveId" clId="{02718E11-8C50-4BF9-8911-C664F181BE0F}" dt="2026-06-14T01:00:15.947" v="24" actId="478"/>
-          <ac:spMkLst>
-            <pc:docMk/>
-            <pc:sldMk cId="1940510760" sldId="256"/>
-            <ac:spMk id="7" creationId="{B613ADA6-6325-23E9-FC17-B68580F8167F}"/>
-          </ac:spMkLst>
-        </pc:spChg>
-        <pc:graphicFrameChg chg="add mod">
-          <ac:chgData name="映潔 吳" userId="ce8478969c818b5d" providerId="LiveId" clId="{02718E11-8C50-4BF9-8911-C664F181BE0F}" dt="2026-06-14T00:58:48.182" v="2"/>
-          <ac:graphicFrameMkLst>
-            <pc:docMk/>
-            <pc:sldMk cId="1940510760" sldId="256"/>
-            <ac:graphicFrameMk id="4" creationId="{710099FB-E509-0626-3103-AA29086DE596}"/>
-          </ac:graphicFrameMkLst>
-        </pc:graphicFrameChg>
-      </pc:sldChg>
-      <pc:sldChg chg="new del">
-        <pc:chgData name="映潔 吳" userId="ce8478969c818b5d" providerId="LiveId" clId="{02718E11-8C50-4BF9-8911-C664F181BE0F}" dt="2026-06-14T01:01:34.949" v="58" actId="47"/>
-        <pc:sldMkLst>
-          <pc:docMk/>
-          <pc:sldMk cId="4117208725" sldId="257"/>
-        </pc:sldMkLst>
-      </pc:sldChg>
-      <pc:sldChg chg="addSp delSp modSp add del mod">
-        <pc:chgData name="映潔 吳" userId="ce8478969c818b5d" providerId="LiveId" clId="{02718E11-8C50-4BF9-8911-C664F181BE0F}" dt="2026-06-14T01:32:44.515" v="169" actId="47"/>
-        <pc:sldMkLst>
-          <pc:docMk/>
-          <pc:sldMk cId="2934306591" sldId="258"/>
-        </pc:sldMkLst>
-        <pc:spChg chg="del">
-          <ac:chgData name="映潔 吳" userId="ce8478969c818b5d" providerId="LiveId" clId="{02718E11-8C50-4BF9-8911-C664F181BE0F}" dt="2026-06-14T01:02:24.999" v="63" actId="478"/>
-          <ac:spMkLst>
-            <pc:docMk/>
-            <pc:sldMk cId="2934306591" sldId="258"/>
-            <ac:spMk id="2" creationId="{85D6F87F-3559-74DE-4425-881EF401C385}"/>
-          </ac:spMkLst>
-        </pc:spChg>
-        <pc:spChg chg="mod">
-          <ac:chgData name="映潔 吳" userId="ce8478969c818b5d" providerId="LiveId" clId="{02718E11-8C50-4BF9-8911-C664F181BE0F}" dt="2026-06-14T01:31:33.382" v="163" actId="1076"/>
-          <ac:spMkLst>
-            <pc:docMk/>
-            <pc:sldMk cId="2934306591" sldId="258"/>
-            <ac:spMk id="3" creationId="{4AD2C5C8-DF77-E24B-5850-F42B11EFA6A1}"/>
-          </ac:spMkLst>
-        </pc:spChg>
-        <pc:spChg chg="add mod">
-          <ac:chgData name="映潔 吳" userId="ce8478969c818b5d" providerId="LiveId" clId="{02718E11-8C50-4BF9-8911-C664F181BE0F}" dt="2026-06-14T01:30:07.417" v="144" actId="2711"/>
-          <ac:spMkLst>
-            <pc:docMk/>
-            <pc:sldMk cId="2934306591" sldId="258"/>
-            <ac:spMk id="5" creationId="{988D3A59-09C4-86FE-D43E-99E252E6C22A}"/>
-          </ac:spMkLst>
-        </pc:spChg>
-        <pc:spChg chg="add">
-          <ac:chgData name="映潔 吳" userId="ce8478969c818b5d" providerId="LiveId" clId="{02718E11-8C50-4BF9-8911-C664F181BE0F}" dt="2026-06-14T01:30:15.765" v="145"/>
-          <ac:spMkLst>
-            <pc:docMk/>
-            <pc:sldMk cId="2934306591" sldId="258"/>
-            <ac:spMk id="11" creationId="{860488E5-49EA-0B3A-CD50-86FCCE187F92}"/>
-          </ac:spMkLst>
-        </pc:spChg>
-        <pc:cxnChg chg="add mod">
-          <ac:chgData name="映潔 吳" userId="ce8478969c818b5d" providerId="LiveId" clId="{02718E11-8C50-4BF9-8911-C664F181BE0F}" dt="2026-06-14T01:04:04.991" v="79" actId="14100"/>
-          <ac:cxnSpMkLst>
-            <pc:docMk/>
-            <pc:sldMk cId="2934306591" sldId="258"/>
-            <ac:cxnSpMk id="7" creationId="{9D14B508-30A4-5BF1-BF13-166FA4D4DFB1}"/>
-          </ac:cxnSpMkLst>
-        </pc:cxnChg>
       </pc:sldChg>
       <pc:sldChg chg="addSp delSp modSp add mod ord">
         <pc:chgData name="映潔 吳" userId="ce8478969c818b5d" providerId="LiveId" clId="{02718E11-8C50-4BF9-8911-C664F181BE0F}" dt="2026-06-14T08:00:21.771" v="788" actId="1076"/>
@@ -248,28 +162,12 @@
           <pc:docMk/>
           <pc:sldMk cId="663800678" sldId="259"/>
         </pc:sldMkLst>
-        <pc:spChg chg="add">
-          <ac:chgData name="映潔 吳" userId="ce8478969c818b5d" providerId="LiveId" clId="{02718E11-8C50-4BF9-8911-C664F181BE0F}" dt="2026-06-14T01:33:37.204" v="231"/>
-          <ac:spMkLst>
-            <pc:docMk/>
-            <pc:sldMk cId="663800678" sldId="259"/>
-            <ac:spMk id="2" creationId="{80CFA12B-30F8-CF6E-351D-7AB9B970CBE2}"/>
-          </ac:spMkLst>
-        </pc:spChg>
         <pc:spChg chg="mod">
           <ac:chgData name="映潔 吳" userId="ce8478969c818b5d" providerId="LiveId" clId="{02718E11-8C50-4BF9-8911-C664F181BE0F}" dt="2026-06-14T08:00:21.771" v="788" actId="1076"/>
           <ac:spMkLst>
             <pc:docMk/>
             <pc:sldMk cId="663800678" sldId="259"/>
             <ac:spMk id="3" creationId="{DBC3311F-D211-BAD2-676E-71C9A24ECE27}"/>
-          </ac:spMkLst>
-        </pc:spChg>
-        <pc:spChg chg="add del mod">
-          <ac:chgData name="映潔 吳" userId="ce8478969c818b5d" providerId="LiveId" clId="{02718E11-8C50-4BF9-8911-C664F181BE0F}" dt="2026-06-14T02:57:23.311" v="588" actId="478"/>
-          <ac:spMkLst>
-            <pc:docMk/>
-            <pc:sldMk cId="663800678" sldId="259"/>
-            <ac:spMk id="4" creationId="{6C3DD775-9038-FA78-C030-33EC60D13BEB}"/>
           </ac:spMkLst>
         </pc:spChg>
         <pc:spChg chg="mod">
@@ -294,22 +192,6 @@
             <pc:docMk/>
             <pc:sldMk cId="663800678" sldId="259"/>
             <ac:spMk id="8" creationId="{6D85E43B-1BF6-73A9-F7A5-14C2071FC9AD}"/>
-          </ac:spMkLst>
-        </pc:spChg>
-        <pc:spChg chg="add">
-          <ac:chgData name="映潔 吳" userId="ce8478969c818b5d" providerId="LiveId" clId="{02718E11-8C50-4BF9-8911-C664F181BE0F}" dt="2026-06-14T02:55:42.075" v="535"/>
-          <ac:spMkLst>
-            <pc:docMk/>
-            <pc:sldMk cId="663800678" sldId="259"/>
-            <ac:spMk id="9" creationId="{D7EE80CC-D36A-65B9-C69C-3C681582FC70}"/>
-          </ac:spMkLst>
-        </pc:spChg>
-        <pc:spChg chg="add">
-          <ac:chgData name="映潔 吳" userId="ce8478969c818b5d" providerId="LiveId" clId="{02718E11-8C50-4BF9-8911-C664F181BE0F}" dt="2026-06-14T02:55:44.187" v="536"/>
-          <ac:spMkLst>
-            <pc:docMk/>
-            <pc:sldMk cId="663800678" sldId="259"/>
-            <ac:spMk id="10" creationId="{C60C329D-1798-38D3-0A62-A5B7914CE522}"/>
           </ac:spMkLst>
         </pc:spChg>
         <pc:cxnChg chg="mod">
@@ -344,106 +226,12 @@
           </ac:spMkLst>
         </pc:spChg>
       </pc:sldChg>
-      <pc:sldChg chg="addSp delSp modSp add del mod ord">
-        <pc:chgData name="映潔 吳" userId="ce8478969c818b5d" providerId="LiveId" clId="{02718E11-8C50-4BF9-8911-C664F181BE0F}" dt="2026-06-14T03:00:56.384" v="664" actId="47"/>
-        <pc:sldMkLst>
-          <pc:docMk/>
-          <pc:sldMk cId="1039985546" sldId="261"/>
-        </pc:sldMkLst>
-        <pc:spChg chg="del mod">
-          <ac:chgData name="映潔 吳" userId="ce8478969c818b5d" providerId="LiveId" clId="{02718E11-8C50-4BF9-8911-C664F181BE0F}" dt="2026-06-14T01:49:36.490" v="464" actId="478"/>
-          <ac:spMkLst>
-            <pc:docMk/>
-            <pc:sldMk cId="1039985546" sldId="261"/>
-            <ac:spMk id="3" creationId="{168C81FF-D61F-AAD5-201E-791FC56F25E2}"/>
-          </ac:spMkLst>
-        </pc:spChg>
-        <pc:spChg chg="add del mod">
-          <ac:chgData name="映潔 吳" userId="ce8478969c818b5d" providerId="LiveId" clId="{02718E11-8C50-4BF9-8911-C664F181BE0F}" dt="2026-06-14T01:49:44.089" v="465" actId="478"/>
-          <ac:spMkLst>
-            <pc:docMk/>
-            <pc:sldMk cId="1039985546" sldId="261"/>
-            <ac:spMk id="4" creationId="{9D945EA8-0371-69C1-BD95-BACFAF82CAF4}"/>
-          </ac:spMkLst>
-        </pc:spChg>
-        <pc:spChg chg="mod">
-          <ac:chgData name="映潔 吳" userId="ce8478969c818b5d" providerId="LiveId" clId="{02718E11-8C50-4BF9-8911-C664F181BE0F}" dt="2026-06-14T01:49:30.683" v="463" actId="20577"/>
-          <ac:spMkLst>
-            <pc:docMk/>
-            <pc:sldMk cId="1039985546" sldId="261"/>
-            <ac:spMk id="5" creationId="{1AA83D92-83BC-D9F8-873E-C8F6E5503AC8}"/>
-          </ac:spMkLst>
-        </pc:spChg>
-        <pc:spChg chg="add del mod">
-          <ac:chgData name="映潔 吳" userId="ce8478969c818b5d" providerId="LiveId" clId="{02718E11-8C50-4BF9-8911-C664F181BE0F}" dt="2026-06-14T01:57:42.690" v="517" actId="478"/>
-          <ac:spMkLst>
-            <pc:docMk/>
-            <pc:sldMk cId="1039985546" sldId="261"/>
-            <ac:spMk id="6" creationId="{A6A646F3-7318-ED8F-BDB3-9F5ACFA46CCE}"/>
-          </ac:spMkLst>
-        </pc:spChg>
-        <pc:spChg chg="add del mod">
-          <ac:chgData name="映潔 吳" userId="ce8478969c818b5d" providerId="LiveId" clId="{02718E11-8C50-4BF9-8911-C664F181BE0F}" dt="2026-06-14T01:57:38.818" v="514" actId="478"/>
-          <ac:spMkLst>
-            <pc:docMk/>
-            <pc:sldMk cId="1039985546" sldId="261"/>
-            <ac:spMk id="8" creationId="{A1F7DB28-89D6-1DCB-C354-D6BECE919C9C}"/>
-          </ac:spMkLst>
-        </pc:spChg>
-        <pc:spChg chg="add mod">
-          <ac:chgData name="映潔 吳" userId="ce8478969c818b5d" providerId="LiveId" clId="{02718E11-8C50-4BF9-8911-C664F181BE0F}" dt="2026-06-14T01:56:55.192" v="504" actId="20577"/>
-          <ac:spMkLst>
-            <pc:docMk/>
-            <pc:sldMk cId="1039985546" sldId="261"/>
-            <ac:spMk id="9" creationId="{775C80D8-275E-7771-17BE-6973020DA538}"/>
-          </ac:spMkLst>
-        </pc:spChg>
-        <pc:spChg chg="add del mod">
-          <ac:chgData name="映潔 吳" userId="ce8478969c818b5d" providerId="LiveId" clId="{02718E11-8C50-4BF9-8911-C664F181BE0F}" dt="2026-06-14T01:57:40.482" v="515" actId="478"/>
-          <ac:spMkLst>
-            <pc:docMk/>
-            <pc:sldMk cId="1039985546" sldId="261"/>
-            <ac:spMk id="10" creationId="{4751CD69-4D45-B78F-5516-DEA5C958050C}"/>
-          </ac:spMkLst>
-        </pc:spChg>
-        <pc:spChg chg="add del mod">
-          <ac:chgData name="映潔 吳" userId="ce8478969c818b5d" providerId="LiveId" clId="{02718E11-8C50-4BF9-8911-C664F181BE0F}" dt="2026-06-14T01:57:59.270" v="518" actId="478"/>
-          <ac:spMkLst>
-            <pc:docMk/>
-            <pc:sldMk cId="1039985546" sldId="261"/>
-            <ac:spMk id="12" creationId="{69204048-9155-9AD8-9677-661E76A7E14D}"/>
-          </ac:spMkLst>
-        </pc:spChg>
-      </pc:sldChg>
-      <pc:sldChg chg="add del">
-        <pc:chgData name="映潔 吳" userId="ce8478969c818b5d" providerId="LiveId" clId="{02718E11-8C50-4BF9-8911-C664F181BE0F}" dt="2026-06-14T01:40:47.211" v="359" actId="2890"/>
-        <pc:sldMkLst>
-          <pc:docMk/>
-          <pc:sldMk cId="332979469" sldId="262"/>
-        </pc:sldMkLst>
-      </pc:sldChg>
       <pc:sldChg chg="addSp delSp modSp add del mod">
         <pc:chgData name="映潔 吳" userId="ce8478969c818b5d" providerId="LiveId" clId="{02718E11-8C50-4BF9-8911-C664F181BE0F}" dt="2026-06-14T08:16:29.316" v="836" actId="1076"/>
         <pc:sldMkLst>
           <pc:docMk/>
           <pc:sldMk cId="2027601596" sldId="262"/>
         </pc:sldMkLst>
-        <pc:spChg chg="del mod">
-          <ac:chgData name="映潔 吳" userId="ce8478969c818b5d" providerId="LiveId" clId="{02718E11-8C50-4BF9-8911-C664F181BE0F}" dt="2026-06-14T03:01:17.018" v="690" actId="478"/>
-          <ac:spMkLst>
-            <pc:docMk/>
-            <pc:sldMk cId="2027601596" sldId="262"/>
-            <ac:spMk id="3" creationId="{CE3EA92D-93F1-4F0A-0EAC-8F9B7CE27050}"/>
-          </ac:spMkLst>
-        </pc:spChg>
-        <pc:spChg chg="add del mod">
-          <ac:chgData name="映潔 吳" userId="ce8478969c818b5d" providerId="LiveId" clId="{02718E11-8C50-4BF9-8911-C664F181BE0F}" dt="2026-06-14T08:08:03.694" v="789" actId="478"/>
-          <ac:spMkLst>
-            <pc:docMk/>
-            <pc:sldMk cId="2027601596" sldId="262"/>
-            <ac:spMk id="4" creationId="{387341E8-841B-44F5-420F-0679D74842FA}"/>
-          </ac:spMkLst>
-        </pc:spChg>
         <pc:spChg chg="mod">
           <ac:chgData name="映潔 吳" userId="ce8478969c818b5d" providerId="LiveId" clId="{02718E11-8C50-4BF9-8911-C664F181BE0F}" dt="2026-06-14T08:08:26.129" v="806" actId="20577"/>
           <ac:spMkLst>
@@ -452,30 +240,6 @@
             <ac:spMk id="5" creationId="{D49023E7-F124-8FB7-88DA-83BA3DAA8DCC}"/>
           </ac:spMkLst>
         </pc:spChg>
-        <pc:spChg chg="add del mod">
-          <ac:chgData name="映潔 吳" userId="ce8478969c818b5d" providerId="LiveId" clId="{02718E11-8C50-4BF9-8911-C664F181BE0F}" dt="2026-06-14T08:08:31.257" v="807" actId="478"/>
-          <ac:spMkLst>
-            <pc:docMk/>
-            <pc:sldMk cId="2027601596" sldId="262"/>
-            <ac:spMk id="6" creationId="{CAA08505-B2BF-B0C2-4659-C4BCC6A0ADE4}"/>
-          </ac:spMkLst>
-        </pc:spChg>
-        <pc:picChg chg="add del">
-          <ac:chgData name="映潔 吳" userId="ce8478969c818b5d" providerId="LiveId" clId="{02718E11-8C50-4BF9-8911-C664F181BE0F}" dt="2026-06-14T08:09:18.910" v="812" actId="478"/>
-          <ac:picMkLst>
-            <pc:docMk/>
-            <pc:sldMk cId="2027601596" sldId="262"/>
-            <ac:picMk id="3" creationId="{27F8C4D3-9E64-32C8-9338-16A141ACB15C}"/>
-          </ac:picMkLst>
-        </pc:picChg>
-        <pc:picChg chg="add del mod">
-          <ac:chgData name="映潔 吳" userId="ce8478969c818b5d" providerId="LiveId" clId="{02718E11-8C50-4BF9-8911-C664F181BE0F}" dt="2026-06-14T04:29:40.906" v="779" actId="478"/>
-          <ac:picMkLst>
-            <pc:docMk/>
-            <pc:sldMk cId="2027601596" sldId="262"/>
-            <ac:picMk id="3" creationId="{90D80FC2-1E81-1302-1FF3-A64105E71FE5}"/>
-          </ac:picMkLst>
-        </pc:picChg>
         <pc:picChg chg="add mod modCrop">
           <ac:chgData name="映潔 吳" userId="ce8478969c818b5d" providerId="LiveId" clId="{02718E11-8C50-4BF9-8911-C664F181BE0F}" dt="2026-06-14T08:16:29.316" v="836" actId="1076"/>
           <ac:picMkLst>
@@ -485,73 +249,26 @@
           </ac:picMkLst>
         </pc:picChg>
       </pc:sldChg>
-      <pc:sldChg chg="delSp modSp add del mod ord">
-        <pc:chgData name="映潔 吳" userId="ce8478969c818b5d" providerId="LiveId" clId="{02718E11-8C50-4BF9-8911-C664F181BE0F}" dt="2026-06-14T03:00:54.973" v="663" actId="47"/>
-        <pc:sldMkLst>
-          <pc:docMk/>
-          <pc:sldMk cId="548452817" sldId="263"/>
-        </pc:sldMkLst>
-        <pc:spChg chg="del mod">
-          <ac:chgData name="映潔 吳" userId="ce8478969c818b5d" providerId="LiveId" clId="{02718E11-8C50-4BF9-8911-C664F181BE0F}" dt="2026-06-14T01:57:21.334" v="507" actId="478"/>
-          <ac:spMkLst>
-            <pc:docMk/>
-            <pc:sldMk cId="548452817" sldId="263"/>
-            <ac:spMk id="8" creationId="{B3189F32-A471-C199-446D-1E07DC560F72}"/>
-          </ac:spMkLst>
-        </pc:spChg>
-        <pc:spChg chg="del">
-          <ac:chgData name="映潔 吳" userId="ce8478969c818b5d" providerId="LiveId" clId="{02718E11-8C50-4BF9-8911-C664F181BE0F}" dt="2026-06-14T01:57:26.015" v="509" actId="478"/>
-          <ac:spMkLst>
-            <pc:docMk/>
-            <pc:sldMk cId="548452817" sldId="263"/>
-            <ac:spMk id="9" creationId="{87D4E07C-93ED-1FEF-10A3-963C70B21DC3}"/>
-          </ac:spMkLst>
-        </pc:spChg>
-        <pc:spChg chg="del">
-          <ac:chgData name="映潔 吳" userId="ce8478969c818b5d" providerId="LiveId" clId="{02718E11-8C50-4BF9-8911-C664F181BE0F}" dt="2026-06-14T01:57:22.731" v="508" actId="478"/>
-          <ac:spMkLst>
-            <pc:docMk/>
-            <pc:sldMk cId="548452817" sldId="263"/>
-            <ac:spMk id="10" creationId="{A56B6BA9-A15A-42ED-C165-3CB8E68E1CBE}"/>
-          </ac:spMkLst>
-        </pc:spChg>
-      </pc:sldChg>
       <pc:sldChg chg="addSp delSp modSp add mod">
-        <pc:chgData name="映潔 吳" userId="ce8478969c818b5d" providerId="LiveId" clId="{02718E11-8C50-4BF9-8911-C664F181BE0F}" dt="2026-06-14T08:41:07.195" v="849" actId="1076"/>
+        <pc:chgData name="映潔 吳" userId="ce8478969c818b5d" providerId="LiveId" clId="{02718E11-8C50-4BF9-8911-C664F181BE0F}" dt="2026-06-16T01:21:44.805" v="852" actId="1076"/>
         <pc:sldMkLst>
           <pc:docMk/>
           <pc:sldMk cId="3276122178" sldId="263"/>
         </pc:sldMkLst>
-        <pc:spChg chg="del">
-          <ac:chgData name="映潔 吳" userId="ce8478969c818b5d" providerId="LiveId" clId="{02718E11-8C50-4BF9-8911-C664F181BE0F}" dt="2026-06-14T03:02:00.308" v="719" actId="478"/>
-          <ac:spMkLst>
-            <pc:docMk/>
-            <pc:sldMk cId="3276122178" sldId="263"/>
-            <ac:spMk id="3" creationId="{73A2830E-9C06-05A3-686F-A1EF06210A69}"/>
-          </ac:spMkLst>
-        </pc:spChg>
-        <pc:spChg chg="add del mod">
-          <ac:chgData name="映潔 吳" userId="ce8478969c818b5d" providerId="LiveId" clId="{02718E11-8C50-4BF9-8911-C664F181BE0F}" dt="2026-06-14T08:34:15.932" v="840" actId="478"/>
-          <ac:spMkLst>
-            <pc:docMk/>
-            <pc:sldMk cId="3276122178" sldId="263"/>
-            <ac:spMk id="6" creationId="{8842C115-4F9A-66ED-F82C-EA9D9EE8DE41}"/>
-          </ac:spMkLst>
-        </pc:spChg>
         <pc:picChg chg="add del mod">
-          <ac:chgData name="映潔 吳" userId="ce8478969c818b5d" providerId="LiveId" clId="{02718E11-8C50-4BF9-8911-C664F181BE0F}" dt="2026-06-14T08:34:12.715" v="839" actId="478"/>
-          <ac:picMkLst>
-            <pc:docMk/>
-            <pc:sldMk cId="3276122178" sldId="263"/>
-            <ac:picMk id="3" creationId="{CEE97A7F-D95E-69D5-204B-EA2D559F0FFD}"/>
-          </ac:picMkLst>
-        </pc:picChg>
-        <pc:picChg chg="add mod">
-          <ac:chgData name="映潔 吳" userId="ce8478969c818b5d" providerId="LiveId" clId="{02718E11-8C50-4BF9-8911-C664F181BE0F}" dt="2026-06-14T08:41:07.195" v="849" actId="1076"/>
+          <ac:chgData name="映潔 吳" userId="ce8478969c818b5d" providerId="LiveId" clId="{02718E11-8C50-4BF9-8911-C664F181BE0F}" dt="2026-06-16T01:21:37.746" v="850" actId="478"/>
           <ac:picMkLst>
             <pc:docMk/>
             <pc:sldMk cId="3276122178" sldId="263"/>
             <ac:picMk id="3" creationId="{D05A70D5-8E0E-7999-4BD1-9B7863B0548E}"/>
+          </ac:picMkLst>
+        </pc:picChg>
+        <pc:picChg chg="add mod">
+          <ac:chgData name="映潔 吳" userId="ce8478969c818b5d" providerId="LiveId" clId="{02718E11-8C50-4BF9-8911-C664F181BE0F}" dt="2026-06-16T01:21:44.805" v="852" actId="1076"/>
+          <ac:picMkLst>
+            <pc:docMk/>
+            <pc:sldMk cId="3276122178" sldId="263"/>
+            <ac:picMk id="4" creationId="{C48C038B-D5FF-98D4-A29A-1FDD5C9D49B4}"/>
           </ac:picMkLst>
         </pc:picChg>
       </pc:sldChg>
@@ -560,13 +277,6 @@
         <pc:sldMkLst>
           <pc:docMk/>
           <pc:sldMk cId="2185778571" sldId="264"/>
-        </pc:sldMkLst>
-      </pc:sldChg>
-      <pc:sldChg chg="add del">
-        <pc:chgData name="映潔 吳" userId="ce8478969c818b5d" providerId="LiveId" clId="{02718E11-8C50-4BF9-8911-C664F181BE0F}" dt="2026-06-14T03:00:57.395" v="665" actId="47"/>
-        <pc:sldMkLst>
-          <pc:docMk/>
-          <pc:sldMk cId="2457011713" sldId="264"/>
         </pc:sldMkLst>
       </pc:sldChg>
       <pc:sldChg chg="modSp add mod ord">
@@ -716,7 +426,7 @@
           <a:p>
             <a:fld id="{DF572D60-C997-4059-9B2E-4DF1C7679F89}" type="datetimeFigureOut">
               <a:rPr lang="zh-TW" altLang="en-US" smtClean="0"/>
-              <a:t>2026/6/14</a:t>
+              <a:t>2026/6/16</a:t>
             </a:fld>
             <a:endParaRPr lang="zh-TW" altLang="en-US"/>
           </a:p>
@@ -1130,7 +840,7 @@
           <a:p>
             <a:fld id="{DFE1A592-53B1-4732-B9A9-80A052F90276}" type="datetimeFigureOut">
               <a:rPr lang="zh-TW" altLang="en-US" smtClean="0"/>
-              <a:t>2026/6/14</a:t>
+              <a:t>2026/6/16</a:t>
             </a:fld>
             <a:endParaRPr lang="zh-TW" altLang="en-US"/>
           </a:p>
@@ -1328,7 +1038,7 @@
           <a:p>
             <a:fld id="{DFE1A592-53B1-4732-B9A9-80A052F90276}" type="datetimeFigureOut">
               <a:rPr lang="zh-TW" altLang="en-US" smtClean="0"/>
-              <a:t>2026/6/14</a:t>
+              <a:t>2026/6/16</a:t>
             </a:fld>
             <a:endParaRPr lang="zh-TW" altLang="en-US"/>
           </a:p>
@@ -1536,7 +1246,7 @@
           <a:p>
             <a:fld id="{DFE1A592-53B1-4732-B9A9-80A052F90276}" type="datetimeFigureOut">
               <a:rPr lang="zh-TW" altLang="en-US" smtClean="0"/>
-              <a:t>2026/6/14</a:t>
+              <a:t>2026/6/16</a:t>
             </a:fld>
             <a:endParaRPr lang="zh-TW" altLang="en-US"/>
           </a:p>
@@ -1734,7 +1444,7 @@
           <a:p>
             <a:fld id="{DFE1A592-53B1-4732-B9A9-80A052F90276}" type="datetimeFigureOut">
               <a:rPr lang="zh-TW" altLang="en-US" smtClean="0"/>
-              <a:t>2026/6/14</a:t>
+              <a:t>2026/6/16</a:t>
             </a:fld>
             <a:endParaRPr lang="zh-TW" altLang="en-US"/>
           </a:p>
@@ -2009,7 +1719,7 @@
           <a:p>
             <a:fld id="{DFE1A592-53B1-4732-B9A9-80A052F90276}" type="datetimeFigureOut">
               <a:rPr lang="zh-TW" altLang="en-US" smtClean="0"/>
-              <a:t>2026/6/14</a:t>
+              <a:t>2026/6/16</a:t>
             </a:fld>
             <a:endParaRPr lang="zh-TW" altLang="en-US"/>
           </a:p>
@@ -2274,7 +1984,7 @@
           <a:p>
             <a:fld id="{DFE1A592-53B1-4732-B9A9-80A052F90276}" type="datetimeFigureOut">
               <a:rPr lang="zh-TW" altLang="en-US" smtClean="0"/>
-              <a:t>2026/6/14</a:t>
+              <a:t>2026/6/16</a:t>
             </a:fld>
             <a:endParaRPr lang="zh-TW" altLang="en-US"/>
           </a:p>
@@ -2686,7 +2396,7 @@
           <a:p>
             <a:fld id="{DFE1A592-53B1-4732-B9A9-80A052F90276}" type="datetimeFigureOut">
               <a:rPr lang="zh-TW" altLang="en-US" smtClean="0"/>
-              <a:t>2026/6/14</a:t>
+              <a:t>2026/6/16</a:t>
             </a:fld>
             <a:endParaRPr lang="zh-TW" altLang="en-US"/>
           </a:p>
@@ -2827,7 +2537,7 @@
           <a:p>
             <a:fld id="{DFE1A592-53B1-4732-B9A9-80A052F90276}" type="datetimeFigureOut">
               <a:rPr lang="zh-TW" altLang="en-US" smtClean="0"/>
-              <a:t>2026/6/14</a:t>
+              <a:t>2026/6/16</a:t>
             </a:fld>
             <a:endParaRPr lang="zh-TW" altLang="en-US"/>
           </a:p>
@@ -2940,7 +2650,7 @@
           <a:p>
             <a:fld id="{DFE1A592-53B1-4732-B9A9-80A052F90276}" type="datetimeFigureOut">
               <a:rPr lang="zh-TW" altLang="en-US" smtClean="0"/>
-              <a:t>2026/6/14</a:t>
+              <a:t>2026/6/16</a:t>
             </a:fld>
             <a:endParaRPr lang="zh-TW" altLang="en-US"/>
           </a:p>
@@ -3251,7 +2961,7 @@
           <a:p>
             <a:fld id="{DFE1A592-53B1-4732-B9A9-80A052F90276}" type="datetimeFigureOut">
               <a:rPr lang="zh-TW" altLang="en-US" smtClean="0"/>
-              <a:t>2026/6/14</a:t>
+              <a:t>2026/6/16</a:t>
             </a:fld>
             <a:endParaRPr lang="zh-TW" altLang="en-US"/>
           </a:p>
@@ -3539,7 +3249,7 @@
           <a:p>
             <a:fld id="{DFE1A592-53B1-4732-B9A9-80A052F90276}" type="datetimeFigureOut">
               <a:rPr lang="zh-TW" altLang="en-US" smtClean="0"/>
-              <a:t>2026/6/14</a:t>
+              <a:t>2026/6/16</a:t>
             </a:fld>
             <a:endParaRPr lang="zh-TW" altLang="en-US"/>
           </a:p>
@@ -3780,7 +3490,7 @@
           <a:p>
             <a:fld id="{DFE1A592-53B1-4732-B9A9-80A052F90276}" type="datetimeFigureOut">
               <a:rPr lang="zh-TW" altLang="en-US" smtClean="0"/>
-              <a:t>2026/6/14</a:t>
+              <a:t>2026/6/16</a:t>
             </a:fld>
             <a:endParaRPr lang="zh-TW" altLang="en-US"/>
           </a:p>
@@ -4471,10 +4181,10 @@
       </p:cxnSp>
       <p:pic>
         <p:nvPicPr>
-          <p:cNvPr id="3" name="圖片 2">
-            <a:extLst>
-              <a:ext uri="{FF2B5EF4-FFF2-40B4-BE49-F238E27FC236}">
-                <a16:creationId xmlns:a16="http://schemas.microsoft.com/office/drawing/2014/main" id="{D05A70D5-8E0E-7999-4BD1-9B7863B0548E}"/>
+          <p:cNvPr id="4" name="圖片 3">
+            <a:extLst>
+              <a:ext uri="{FF2B5EF4-FFF2-40B4-BE49-F238E27FC236}">
+                <a16:creationId xmlns:a16="http://schemas.microsoft.com/office/drawing/2014/main" id="{C48C038B-D5FF-98D4-A29A-1FDD5C9D49B4}"/>
               </a:ext>
             </a:extLst>
           </p:cNvPr>
@@ -4491,8 +4201,8 @@
         </p:blipFill>
         <p:spPr>
           <a:xfrm>
-            <a:off x="1514239" y="1983761"/>
-            <a:ext cx="9163521" cy="4134062"/>
+            <a:off x="1520590" y="1503415"/>
+            <a:ext cx="9150820" cy="5131064"/>
           </a:xfrm>
           <a:prstGeom prst="rect">
             <a:avLst/>
